--- a/项目/学习项目/研究生阶段/多任务成像/组会汇报/LDM论文组会汇报-2026-09-20.pptx
+++ b/项目/学习项目/研究生阶段/多任务成像/组会汇报/LDM论文组会汇报-2026-09-20.pptx
@@ -3015,7 +3015,7 @@
           <a:p>
             <a:r>
               <a:rPr lang="en-US" dirty="0"/>
-              <a:t>逐符号讲公式：Q 来自 UNet 中间特征（N 个空间位置），K/V 来自条件 token（M 个）。softmax(QK^T/√d) 是每个空间位置对条件的注意力分布，加权 V 得到条件信息，残差并回。维度注解要念：φ_i(z_t)∈R^{N×d_ε}，τ_θ(y)∈R^{M×d_τ}，投影矩阵把两者投到公共的 d 维。强调“可插拔”：换条件只需换 τ_θ，主干不动——这正是我们多条件系统想要的性质。</a:t>
+              <a:t>学术直述版讲法：先走图——UNet 第 i 层特征展平为 N 个位置 token，经 W_Q 投影为查询 Q；条件 y 经 τ_θ 编码为 M 个 token，经 W_K、W_V 投影为键与值。右侧四步：① QKᵀ/√d 逐对相似度打分（√d 防止 softmax 饱和）；② 按行 softmax 得注意力权重，每行和为 1；③ 权重聚合 V，每个位置得到专属的条件信息；④ 残差叠加回主干，不替换原特征。补一句公式原貌：Attention(Q,K,V)=softmax(QKᵀ/√d)·V。下方四条性质各点一句即可。注意 N 随层级变化（深层少、浅层多），M 可变长。</a:t>
             </a:r>
             <a:endParaRPr lang="en-US" dirty="0"/>
           </a:p>
@@ -25600,7 +25600,7 @@
                 <a:ea typeface="微软雅黑" pitchFamily="34" charset="-122"/>
                 <a:cs typeface="微软雅黑" pitchFamily="34" charset="-120"/>
               </a:rPr>
-              <a:t>Cross-attention：任意模态条件的通用接口</a:t>
+              <a:t>Cross-attention：条件注入的四步计算</a:t>
             </a:r>
             <a:endParaRPr lang="en-US" sz="2800" dirty="0"/>
           </a:p>
@@ -25614,76 +25614,232 @@
         </p:nvSpPr>
         <p:spPr>
           <a:xfrm>
-            <a:off x="457200" y="1371600"/>
-            <a:ext cx="6903720" cy="1234440"/>
+            <a:off x="548640" y="1572768"/>
+            <a:ext cx="2148840" cy="749808"/>
           </a:xfrm>
           <a:prstGeom prst="roundRect">
             <a:avLst>
-              <a:gd name="adj" fmla="val 5185"/>
+              <a:gd name="adj" fmla="val 6098"/>
             </a:avLst>
           </a:prstGeom>
           <a:solidFill>
             <a:srgbClr val="FFFFFF"/>
           </a:solidFill>
-          <a:ln w="12700">
+          <a:ln w="15875">
             <a:solidFill>
               <a:srgbClr val="D9D5EF"/>
             </a:solidFill>
             <a:prstDash val="solid"/>
           </a:ln>
-          <a:effectLst>
-            <a:outerShdw sx="100000" sy="100000" kx="0" ky="0" algn="bl" rotWithShape="0" blurRad="88900" dist="25400" dir="2700000">
-              <a:srgbClr val="000000">
-                <a:alpha val="13000"/>
-              </a:srgbClr>
-            </a:outerShdw>
-          </a:effectLst>
-        </p:spPr>
-      </p:sp>
-      <p:sp>
-        <p:nvSpPr>
-          <p:cNvPr id="6" name="Shape 3"/>
-          <p:cNvSpPr/>
-          <p:nvPr/>
-        </p:nvSpPr>
-        <p:spPr>
-          <a:xfrm>
-            <a:off x="457200" y="2834640"/>
-            <a:ext cx="6903720" cy="1097280"/>
+        </p:spPr>
+      </p:sp>
+      <p:sp>
+        <p:nvSpPr>
+          <p:cNvPr id="5" name="Text 3"/>
+          <p:cNvSpPr/>
+          <p:nvPr/>
+        </p:nvSpPr>
+        <p:spPr>
+          <a:xfrm>
+            <a:off x="603504" y="1572768"/>
+            <a:ext cx="2039112" cy="749808"/>
+          </a:xfrm>
+          <a:prstGeom prst="rect">
+            <a:avLst/>
+          </a:prstGeom>
+          <a:noFill/>
+          <a:ln/>
+        </p:spPr>
+        <p:txBody>
+          <a:bodyPr wrap="square" lIns="0" tIns="0" rIns="0" bIns="0" rtlCol="0" anchor="ctr"/>
+          <a:lstStyle/>
+          <a:p>
+            <a:pPr algn="ctr" indent="0" marL="0">
+              <a:buNone/>
+            </a:pPr>
+            <a:r>
+              <a:rPr lang="en-US" sz="1150" b="1" dirty="0">
+                <a:solidFill>
+                  <a:srgbClr val="1F2937"/>
+                </a:solidFill>
+                <a:latin typeface="微软雅黑" pitchFamily="34" charset="0"/>
+                <a:ea typeface="微软雅黑" pitchFamily="34" charset="-122"/>
+                <a:cs typeface="微软雅黑" pitchFamily="34" charset="-120"/>
+              </a:rPr>
+              <a:t>UNet 第 i 层特征</a:t>
+            </a:r>
+            <a:endParaRPr lang="en-US" sz="1150" dirty="0"/>
+          </a:p>
+          <a:p>
+            <a:pPr algn="ctr" indent="0" marL="0">
+              <a:buNone/>
+            </a:pPr>
+            <a:r>
+              <a:rPr lang="en-US" sz="1150" b="1" dirty="0">
+                <a:solidFill>
+                  <a:srgbClr val="1F2937"/>
+                </a:solidFill>
+                <a:latin typeface="微软雅黑" pitchFamily="34" charset="0"/>
+                <a:ea typeface="微软雅黑" pitchFamily="34" charset="-122"/>
+                <a:cs typeface="微软雅黑" pitchFamily="34" charset="-120"/>
+              </a:rPr>
+              <a:t>φᵢ(z_t) ∈ R^{N×d_ε}</a:t>
+            </a:r>
+            <a:endParaRPr lang="en-US" sz="1150" dirty="0"/>
+          </a:p>
+        </p:txBody>
+      </p:sp>
+      <p:sp>
+        <p:nvSpPr>
+          <p:cNvPr id="6" name="Shape 4"/>
+          <p:cNvSpPr/>
+          <p:nvPr/>
+        </p:nvSpPr>
+        <p:spPr>
+          <a:xfrm>
+            <a:off x="2724912" y="1947672"/>
+            <a:ext cx="320040" cy="0"/>
+          </a:xfrm>
+          <a:prstGeom prst="line">
+            <a:avLst/>
+          </a:prstGeom>
+          <a:noFill/>
+          <a:ln w="27940">
+            <a:solidFill>
+              <a:srgbClr val="6B7280"/>
+            </a:solidFill>
+            <a:prstDash val="solid"/>
+            <a:tailEnd type="triangle"/>
+          </a:ln>
+        </p:spPr>
+      </p:sp>
+      <p:sp>
+        <p:nvSpPr>
+          <p:cNvPr id="7" name="Shape 5"/>
+          <p:cNvSpPr/>
+          <p:nvPr/>
+        </p:nvSpPr>
+        <p:spPr>
+          <a:xfrm>
+            <a:off x="3072384" y="1700784"/>
+            <a:ext cx="969264" cy="493776"/>
           </a:xfrm>
           <a:prstGeom prst="roundRect">
             <a:avLst>
-              <a:gd name="adj" fmla="val 5833"/>
+              <a:gd name="adj" fmla="val 9259"/>
+            </a:avLst>
+          </a:prstGeom>
+          <a:solidFill>
+            <a:srgbClr val="EFEDF9"/>
+          </a:solidFill>
+          <a:ln w="15875">
+            <a:solidFill>
+              <a:srgbClr val="4C3FB1"/>
+            </a:solidFill>
+            <a:prstDash val="solid"/>
+          </a:ln>
+        </p:spPr>
+      </p:sp>
+      <p:sp>
+        <p:nvSpPr>
+          <p:cNvPr id="8" name="Text 6"/>
+          <p:cNvSpPr/>
+          <p:nvPr/>
+        </p:nvSpPr>
+        <p:spPr>
+          <a:xfrm>
+            <a:off x="3127248" y="1700784"/>
+            <a:ext cx="859536" cy="493776"/>
+          </a:xfrm>
+          <a:prstGeom prst="rect">
+            <a:avLst/>
+          </a:prstGeom>
+          <a:noFill/>
+          <a:ln/>
+        </p:spPr>
+        <p:txBody>
+          <a:bodyPr wrap="square" lIns="0" tIns="0" rIns="0" bIns="0" rtlCol="0" anchor="ctr"/>
+          <a:lstStyle/>
+          <a:p>
+            <a:pPr algn="ctr" indent="0" marL="0">
+              <a:buNone/>
+            </a:pPr>
+            <a:r>
+              <a:rPr lang="en-US" sz="1200" dirty="0">
+                <a:solidFill>
+                  <a:srgbClr val="372E8A"/>
+                </a:solidFill>
+                <a:latin typeface="微软雅黑" pitchFamily="34" charset="0"/>
+                <a:ea typeface="微软雅黑" pitchFamily="34" charset="-122"/>
+                <a:cs typeface="微软雅黑" pitchFamily="34" charset="-120"/>
+              </a:rPr>
+              <a:t>W_Q</a:t>
+            </a:r>
+            <a:endParaRPr lang="en-US" sz="1200" dirty="0"/>
+          </a:p>
+        </p:txBody>
+      </p:sp>
+      <p:sp>
+        <p:nvSpPr>
+          <p:cNvPr id="9" name="Shape 7"/>
+          <p:cNvSpPr/>
+          <p:nvPr/>
+        </p:nvSpPr>
+        <p:spPr>
+          <a:xfrm>
+            <a:off x="4069080" y="1947672"/>
+            <a:ext cx="320040" cy="0"/>
+          </a:xfrm>
+          <a:prstGeom prst="line">
+            <a:avLst/>
+          </a:prstGeom>
+          <a:noFill/>
+          <a:ln w="27940">
+            <a:solidFill>
+              <a:srgbClr val="6B7280"/>
+            </a:solidFill>
+            <a:prstDash val="solid"/>
+            <a:tailEnd type="triangle"/>
+          </a:ln>
+        </p:spPr>
+      </p:sp>
+      <p:sp>
+        <p:nvSpPr>
+          <p:cNvPr id="10" name="Shape 8"/>
+          <p:cNvSpPr/>
+          <p:nvPr/>
+        </p:nvSpPr>
+        <p:spPr>
+          <a:xfrm>
+            <a:off x="4416552" y="1572768"/>
+            <a:ext cx="1417320" cy="749808"/>
+          </a:xfrm>
+          <a:prstGeom prst="roundRect">
+            <a:avLst>
+              <a:gd name="adj" fmla="val 6098"/>
             </a:avLst>
           </a:prstGeom>
           <a:solidFill>
             <a:srgbClr val="FFFFFF"/>
           </a:solidFill>
-          <a:ln w="12700">
+          <a:ln w="15875">
             <a:solidFill>
               <a:srgbClr val="D9D5EF"/>
             </a:solidFill>
             <a:prstDash val="solid"/>
           </a:ln>
-          <a:effectLst>
-            <a:outerShdw sx="100000" sy="100000" kx="0" ky="0" algn="bl" rotWithShape="0" blurRad="88900" dist="25400" dir="2700000">
-              <a:srgbClr val="000000">
-                <a:alpha val="13000"/>
-              </a:srgbClr>
-            </a:outerShdw>
-          </a:effectLst>
-        </p:spPr>
-      </p:sp>
-      <p:sp>
-        <p:nvSpPr>
-          <p:cNvPr id="8" name="Text 4"/>
-          <p:cNvSpPr/>
-          <p:nvPr/>
-        </p:nvSpPr>
-        <p:spPr>
-          <a:xfrm>
-            <a:off x="457200" y="4160520"/>
-            <a:ext cx="3291840" cy="365760"/>
+        </p:spPr>
+      </p:sp>
+      <p:sp>
+        <p:nvSpPr>
+          <p:cNvPr id="11" name="Text 9"/>
+          <p:cNvSpPr/>
+          <p:nvPr/>
+        </p:nvSpPr>
+        <p:spPr>
+          <a:xfrm>
+            <a:off x="4471416" y="1572768"/>
+            <a:ext cx="1307592" cy="749808"/>
           </a:xfrm>
           <a:prstGeom prst="rect">
             <a:avLst/>
@@ -25695,327 +25851,28 @@
           <a:bodyPr wrap="square" lIns="0" tIns="0" rIns="0" bIns="0" rtlCol="0" anchor="ctr"/>
           <a:lstStyle/>
           <a:p>
-            <a:pPr indent="0" marL="0">
+            <a:pPr algn="ctr" indent="0" marL="0">
               <a:buNone/>
             </a:pPr>
             <a:r>
-              <a:rPr lang="en-US" sz="1300" b="1" dirty="0">
-                <a:solidFill>
-                  <a:srgbClr val="372E8A"/>
-                </a:solidFill>
-                <a:latin typeface="微软雅黑" pitchFamily="34" charset="0"/>
-                <a:ea typeface="微软雅黑" pitchFamily="34" charset="-122"/>
-                <a:cs typeface="微软雅黑" pitchFamily="34" charset="-120"/>
-              </a:rPr>
-              <a:t>Q ← φ_i(z_t)</a:t>
-            </a:r>
-            <a:endParaRPr lang="en-US" sz="1300" dirty="0"/>
-          </a:p>
-        </p:txBody>
-      </p:sp>
-      <p:sp>
-        <p:nvSpPr>
-          <p:cNvPr id="9" name="Text 5"/>
-          <p:cNvSpPr/>
-          <p:nvPr/>
-        </p:nvSpPr>
-        <p:spPr>
-          <a:xfrm>
-            <a:off x="3794760" y="4160520"/>
-            <a:ext cx="3566160" cy="365760"/>
-          </a:xfrm>
-          <a:prstGeom prst="rect">
-            <a:avLst/>
-          </a:prstGeom>
-          <a:noFill/>
-          <a:ln/>
-        </p:spPr>
-        <p:txBody>
-          <a:bodyPr wrap="square" lIns="0" tIns="0" rIns="0" bIns="0" rtlCol="0" anchor="ctr"/>
-          <a:lstStyle/>
-          <a:p>
-            <a:pPr indent="0" marL="0">
+              <a:rPr lang="en-US" sz="1100" dirty="0">
+                <a:solidFill>
+                  <a:srgbClr val="1F2937"/>
+                </a:solidFill>
+                <a:latin typeface="微软雅黑" pitchFamily="34" charset="0"/>
+                <a:ea typeface="微软雅黑" pitchFamily="34" charset="-122"/>
+                <a:cs typeface="微软雅黑" pitchFamily="34" charset="-120"/>
+              </a:rPr>
+              <a:t>Q ∈ R^{N×d}</a:t>
+            </a:r>
+            <a:endParaRPr lang="en-US" sz="1100" dirty="0"/>
+          </a:p>
+          <a:p>
+            <a:pPr algn="ctr" indent="0" marL="0">
               <a:buNone/>
             </a:pPr>
             <a:r>
-              <a:rPr lang="en-US" sz="1250" dirty="0">
-                <a:solidFill>
-                  <a:srgbClr val="6B7280"/>
-                </a:solidFill>
-                <a:latin typeface="微软雅黑" pitchFamily="34" charset="0"/>
-                <a:ea typeface="微软雅黑" pitchFamily="34" charset="-122"/>
-                <a:cs typeface="微软雅黑" pitchFamily="34" charset="-120"/>
-              </a:rPr>
-              <a:t>UNet 第 i 层特征展平为 N 个空间 token</a:t>
-            </a:r>
-            <a:endParaRPr lang="en-US" sz="1250" dirty="0"/>
-          </a:p>
-        </p:txBody>
-      </p:sp>
-      <p:sp>
-        <p:nvSpPr>
-          <p:cNvPr id="10" name="Text 6"/>
-          <p:cNvSpPr/>
-          <p:nvPr/>
-        </p:nvSpPr>
-        <p:spPr>
-          <a:xfrm>
-            <a:off x="457200" y="4572000"/>
-            <a:ext cx="3291840" cy="365760"/>
-          </a:xfrm>
-          <a:prstGeom prst="rect">
-            <a:avLst/>
-          </a:prstGeom>
-          <a:noFill/>
-          <a:ln/>
-        </p:spPr>
-        <p:txBody>
-          <a:bodyPr wrap="square" lIns="0" tIns="0" rIns="0" bIns="0" rtlCol="0" anchor="ctr"/>
-          <a:lstStyle/>
-          <a:p>
-            <a:pPr indent="0" marL="0">
-              <a:buNone/>
-            </a:pPr>
-            <a:r>
-              <a:rPr lang="en-US" sz="1300" b="1" dirty="0">
-                <a:solidFill>
-                  <a:srgbClr val="372E8A"/>
-                </a:solidFill>
-                <a:latin typeface="微软雅黑" pitchFamily="34" charset="0"/>
-                <a:ea typeface="微软雅黑" pitchFamily="34" charset="-122"/>
-                <a:cs typeface="微软雅黑" pitchFamily="34" charset="-120"/>
-              </a:rPr>
-              <a:t>K, V ← τ_θ(y)</a:t>
-            </a:r>
-            <a:endParaRPr lang="en-US" sz="1300" dirty="0"/>
-          </a:p>
-        </p:txBody>
-      </p:sp>
-      <p:sp>
-        <p:nvSpPr>
-          <p:cNvPr id="11" name="Text 7"/>
-          <p:cNvSpPr/>
-          <p:nvPr/>
-        </p:nvSpPr>
-        <p:spPr>
-          <a:xfrm>
-            <a:off x="3794760" y="4572000"/>
-            <a:ext cx="3566160" cy="365760"/>
-          </a:xfrm>
-          <a:prstGeom prst="rect">
-            <a:avLst/>
-          </a:prstGeom>
-          <a:noFill/>
-          <a:ln/>
-        </p:spPr>
-        <p:txBody>
-          <a:bodyPr wrap="square" lIns="0" tIns="0" rIns="0" bIns="0" rtlCol="0" anchor="ctr"/>
-          <a:lstStyle/>
-          <a:p>
-            <a:pPr indent="0" marL="0">
-              <a:buNone/>
-            </a:pPr>
-            <a:r>
-              <a:rPr lang="en-US" sz="1250" dirty="0">
-                <a:solidFill>
-                  <a:srgbClr val="6B7280"/>
-                </a:solidFill>
-                <a:latin typeface="微软雅黑" pitchFamily="34" charset="0"/>
-                <a:ea typeface="微软雅黑" pitchFamily="34" charset="-122"/>
-                <a:cs typeface="微软雅黑" pitchFamily="34" charset="-120"/>
-              </a:rPr>
-              <a:t>条件编码为 M 个 token（可变长）</a:t>
-            </a:r>
-            <a:endParaRPr lang="en-US" sz="1250" dirty="0"/>
-          </a:p>
-        </p:txBody>
-      </p:sp>
-      <p:sp>
-        <p:nvSpPr>
-          <p:cNvPr id="12" name="Text 8"/>
-          <p:cNvSpPr/>
-          <p:nvPr/>
-        </p:nvSpPr>
-        <p:spPr>
-          <a:xfrm>
-            <a:off x="457200" y="4983480"/>
-            <a:ext cx="3291840" cy="365760"/>
-          </a:xfrm>
-          <a:prstGeom prst="rect">
-            <a:avLst/>
-          </a:prstGeom>
-          <a:noFill/>
-          <a:ln/>
-        </p:spPr>
-        <p:txBody>
-          <a:bodyPr wrap="square" lIns="0" tIns="0" rIns="0" bIns="0" rtlCol="0" anchor="ctr"/>
-          <a:lstStyle/>
-          <a:p>
-            <a:pPr indent="0" marL="0">
-              <a:buNone/>
-            </a:pPr>
-            <a:r>
-              <a:rPr lang="en-US" sz="1300" b="1" dirty="0">
-                <a:solidFill>
-                  <a:srgbClr val="372E8A"/>
-                </a:solidFill>
-                <a:latin typeface="微软雅黑" pitchFamily="34" charset="0"/>
-                <a:ea typeface="微软雅黑" pitchFamily="34" charset="-122"/>
-                <a:cs typeface="微软雅黑" pitchFamily="34" charset="-120"/>
-              </a:rPr>
-              <a:t>输出</a:t>
-            </a:r>
-            <a:endParaRPr lang="en-US" sz="1300" dirty="0"/>
-          </a:p>
-        </p:txBody>
-      </p:sp>
-      <p:sp>
-        <p:nvSpPr>
-          <p:cNvPr id="13" name="Text 9"/>
-          <p:cNvSpPr/>
-          <p:nvPr/>
-        </p:nvSpPr>
-        <p:spPr>
-          <a:xfrm>
-            <a:off x="3794760" y="4983480"/>
-            <a:ext cx="3566160" cy="365760"/>
-          </a:xfrm>
-          <a:prstGeom prst="rect">
-            <a:avLst/>
-          </a:prstGeom>
-          <a:noFill/>
-          <a:ln/>
-        </p:spPr>
-        <p:txBody>
-          <a:bodyPr wrap="square" lIns="0" tIns="0" rIns="0" bIns="0" rtlCol="0" anchor="ctr"/>
-          <a:lstStyle/>
-          <a:p>
-            <a:pPr indent="0" marL="0">
-              <a:buNone/>
-            </a:pPr>
-            <a:r>
-              <a:rPr lang="en-US" sz="1250" dirty="0">
-                <a:solidFill>
-                  <a:srgbClr val="6B7280"/>
-                </a:solidFill>
-                <a:latin typeface="微软雅黑" pitchFamily="34" charset="0"/>
-                <a:ea typeface="微软雅黑" pitchFamily="34" charset="-122"/>
-                <a:cs typeface="微软雅黑" pitchFamily="34" charset="-120"/>
-              </a:rPr>
-              <a:t>以残差形式并回 UNet 主干</a:t>
-            </a:r>
-            <a:endParaRPr lang="en-US" sz="1250" dirty="0"/>
-          </a:p>
-        </p:txBody>
-      </p:sp>
-      <p:sp>
-        <p:nvSpPr>
-          <p:cNvPr id="14" name="Text 10"/>
-          <p:cNvSpPr/>
-          <p:nvPr/>
-        </p:nvSpPr>
-        <p:spPr>
-          <a:xfrm>
-            <a:off x="457200" y="5394960"/>
-            <a:ext cx="3291840" cy="365760"/>
-          </a:xfrm>
-          <a:prstGeom prst="rect">
-            <a:avLst/>
-          </a:prstGeom>
-          <a:noFill/>
-          <a:ln/>
-        </p:spPr>
-        <p:txBody>
-          <a:bodyPr wrap="square" lIns="0" tIns="0" rIns="0" bIns="0" rtlCol="0" anchor="ctr"/>
-          <a:lstStyle/>
-          <a:p>
-            <a:pPr indent="0" marL="0">
-              <a:buNone/>
-            </a:pPr>
-            <a:r>
-              <a:rPr lang="en-US" sz="1300" b="1" dirty="0">
-                <a:solidFill>
-                  <a:srgbClr val="372E8A"/>
-                </a:solidFill>
-                <a:latin typeface="微软雅黑" pitchFamily="34" charset="0"/>
-                <a:ea typeface="微软雅黑" pitchFamily="34" charset="-122"/>
-                <a:cs typeface="微软雅黑" pitchFamily="34" charset="-120"/>
-              </a:rPr>
-              <a:t>训练</a:t>
-            </a:r>
-            <a:endParaRPr lang="en-US" sz="1300" dirty="0"/>
-          </a:p>
-        </p:txBody>
-      </p:sp>
-      <p:sp>
-        <p:nvSpPr>
-          <p:cNvPr id="15" name="Text 11"/>
-          <p:cNvSpPr/>
-          <p:nvPr/>
-        </p:nvSpPr>
-        <p:spPr>
-          <a:xfrm>
-            <a:off x="3794760" y="5394960"/>
-            <a:ext cx="3566160" cy="365760"/>
-          </a:xfrm>
-          <a:prstGeom prst="rect">
-            <a:avLst/>
-          </a:prstGeom>
-          <a:noFill/>
-          <a:ln/>
-        </p:spPr>
-        <p:txBody>
-          <a:bodyPr wrap="square" lIns="0" tIns="0" rIns="0" bIns="0" rtlCol="0" anchor="ctr"/>
-          <a:lstStyle/>
-          <a:p>
-            <a:pPr indent="0" marL="0">
-              <a:buNone/>
-            </a:pPr>
-            <a:r>
-              <a:rPr lang="en-US" sz="1250" dirty="0">
-                <a:solidFill>
-                  <a:srgbClr val="6B7280"/>
-                </a:solidFill>
-                <a:latin typeface="微软雅黑" pitchFamily="34" charset="0"/>
-                <a:ea typeface="微软雅黑" pitchFamily="34" charset="-122"/>
-                <a:cs typeface="微软雅黑" pitchFamily="34" charset="-120"/>
-              </a:rPr>
-              <a:t>τ_θ 与 ε_θ 联合端到端优化</a:t>
-            </a:r>
-            <a:endParaRPr lang="en-US" sz="1250" dirty="0"/>
-          </a:p>
-        </p:txBody>
-      </p:sp>
-      <p:sp>
-        <p:nvSpPr>
-          <p:cNvPr id="16" name="Text 12"/>
-          <p:cNvSpPr/>
-          <p:nvPr/>
-        </p:nvSpPr>
-        <p:spPr>
-          <a:xfrm>
-            <a:off x="7680960" y="1463040"/>
-            <a:ext cx="4023360" cy="3291840"/>
-          </a:xfrm>
-          <a:prstGeom prst="rect">
-            <a:avLst/>
-          </a:prstGeom>
-          <a:noFill/>
-          <a:ln/>
-        </p:spPr>
-        <p:txBody>
-          <a:bodyPr wrap="square" lIns="0" tIns="0" rIns="0" bIns="0" rtlCol="0" anchor="t"/>
-          <a:lstStyle/>
-          <a:p>
-            <a:pPr marL="152400" indent="-152400">
-              <a:spcAft>
-                <a:spcPts val="900"/>
-              </a:spcAft>
-              <a:buSzPct val="100000"/>
-              <a:buChar char="▪"/>
-            </a:pPr>
-            <a:r>
-              <a:rPr lang="en-US" sz="1400" dirty="0">
+              <a:rPr lang="en-US" sz="1100" dirty="0">
                 <a:solidFill>
                   <a:srgbClr val="1F2937"/>
                 </a:solidFill>
@@ -26023,74 +25880,32 @@
                 <a:ea typeface="微软雅黑" pitchFamily="34" charset="-122"/>
                 <a:cs typeface="微软雅黑" pitchFamily="34" charset="-120"/>
               </a:rPr>
-              <a:t>直觉：每个空间位置（Q）自行决定“看条件的哪一段”（K/V）</a:t>
-            </a:r>
-            <a:endParaRPr lang="en-US" sz="1400" dirty="0"/>
-          </a:p>
-          <a:p>
-            <a:pPr marL="152400" indent="-152400">
-              <a:spcAft>
-                <a:spcPts val="900"/>
-              </a:spcAft>
-              <a:buSzPct val="100000"/>
-              <a:buChar char="▪"/>
-            </a:pPr>
-            <a:r>
-              <a:rPr lang="en-US" sz="1400" dirty="0">
-                <a:solidFill>
-                  <a:srgbClr val="1F2937"/>
-                </a:solidFill>
-                <a:latin typeface="微软雅黑" pitchFamily="34" charset="0"/>
-                <a:ea typeface="微软雅黑" pitchFamily="34" charset="-122"/>
-                <a:cs typeface="微软雅黑" pitchFamily="34" charset="-120"/>
-              </a:rPr>
-              <a:t>τ_θ 是领域专家，可插拔：文本=Transformer（CLIP），布局=小CNN</a:t>
-            </a:r>
-            <a:endParaRPr lang="en-US" sz="1400" dirty="0"/>
-          </a:p>
-          <a:p>
-            <a:pPr marL="152400" indent="-152400">
-              <a:spcAft>
-                <a:spcPts val="900"/>
-              </a:spcAft>
-              <a:buSzPct val="100000"/>
-              <a:buChar char="▪"/>
-            </a:pPr>
-            <a:r>
-              <a:rPr lang="en-US" sz="1400" dirty="0">
-                <a:solidFill>
-                  <a:srgbClr val="1F2937"/>
-                </a:solidFill>
-                <a:latin typeface="微软雅黑" pitchFamily="34" charset="0"/>
-                <a:ea typeface="微软雅黑" pitchFamily="34" charset="-122"/>
-                <a:cs typeface="微软雅黑" pitchFamily="34" charset="-120"/>
-              </a:rPr>
-              <a:t>条件注入与主干解耦 → 多条件融合的天然容器</a:t>
-            </a:r>
-            <a:endParaRPr lang="en-US" sz="1400" dirty="0"/>
-          </a:p>
-        </p:txBody>
-      </p:sp>
-      <p:sp>
-        <p:nvSpPr>
-          <p:cNvPr id="17" name="Shape 13"/>
-          <p:cNvSpPr/>
-          <p:nvPr/>
-        </p:nvSpPr>
-        <p:spPr>
-          <a:xfrm>
-            <a:off x="7680960" y="4572000"/>
-            <a:ext cx="4023360" cy="1417320"/>
+              <a:t>查询（各空间位置）</a:t>
+            </a:r>
+            <a:endParaRPr lang="en-US" sz="1100" dirty="0"/>
+          </a:p>
+        </p:txBody>
+      </p:sp>
+      <p:sp>
+        <p:nvSpPr>
+          <p:cNvPr id="12" name="Shape 10"/>
+          <p:cNvSpPr/>
+          <p:nvPr/>
+        </p:nvSpPr>
+        <p:spPr>
+          <a:xfrm>
+            <a:off x="548640" y="3346704"/>
+            <a:ext cx="2148840" cy="749808"/>
           </a:xfrm>
           <a:prstGeom prst="roundRect">
             <a:avLst>
-              <a:gd name="adj" fmla="val 3871"/>
+              <a:gd name="adj" fmla="val 6098"/>
             </a:avLst>
           </a:prstGeom>
           <a:solidFill>
-            <a:srgbClr val="EFEDF9"/>
+            <a:srgbClr val="FFFFFF"/>
           </a:solidFill>
-          <a:ln w="9525">
+          <a:ln w="15875">
             <a:solidFill>
               <a:srgbClr val="D9D5EF"/>
             </a:solidFill>
@@ -26100,14 +25915,294 @@
       </p:sp>
       <p:sp>
         <p:nvSpPr>
-          <p:cNvPr id="18" name="Text 14"/>
-          <p:cNvSpPr/>
-          <p:nvPr/>
-        </p:nvSpPr>
-        <p:spPr>
-          <a:xfrm>
-            <a:off x="7845552" y="4681728"/>
-            <a:ext cx="3694176" cy="737006"/>
+          <p:cNvPr id="13" name="Text 11"/>
+          <p:cNvSpPr/>
+          <p:nvPr/>
+        </p:nvSpPr>
+        <p:spPr>
+          <a:xfrm>
+            <a:off x="603504" y="3346704"/>
+            <a:ext cx="2039112" cy="749808"/>
+          </a:xfrm>
+          <a:prstGeom prst="rect">
+            <a:avLst/>
+          </a:prstGeom>
+          <a:noFill/>
+          <a:ln/>
+        </p:spPr>
+        <p:txBody>
+          <a:bodyPr wrap="square" lIns="0" tIns="0" rIns="0" bIns="0" rtlCol="0" anchor="ctr"/>
+          <a:lstStyle/>
+          <a:p>
+            <a:pPr algn="ctr" indent="0" marL="0">
+              <a:buNone/>
+            </a:pPr>
+            <a:r>
+              <a:rPr lang="en-US" sz="1150" b="1" dirty="0">
+                <a:solidFill>
+                  <a:srgbClr val="1F2937"/>
+                </a:solidFill>
+                <a:latin typeface="微软雅黑" pitchFamily="34" charset="0"/>
+                <a:ea typeface="微软雅黑" pitchFamily="34" charset="-122"/>
+                <a:cs typeface="微软雅黑" pitchFamily="34" charset="-120"/>
+              </a:rPr>
+              <a:t>条件 y</a:t>
+            </a:r>
+            <a:endParaRPr lang="en-US" sz="1150" dirty="0"/>
+          </a:p>
+          <a:p>
+            <a:pPr algn="ctr" indent="0" marL="0">
+              <a:buNone/>
+            </a:pPr>
+            <a:r>
+              <a:rPr lang="en-US" sz="1150" b="1" dirty="0">
+                <a:solidFill>
+                  <a:srgbClr val="1F2937"/>
+                </a:solidFill>
+                <a:latin typeface="微软雅黑" pitchFamily="34" charset="0"/>
+                <a:ea typeface="微软雅黑" pitchFamily="34" charset="-122"/>
+                <a:cs typeface="微软雅黑" pitchFamily="34" charset="-120"/>
+              </a:rPr>
+              <a:t>文本 / 类别 / 布局 / 参数</a:t>
+            </a:r>
+            <a:endParaRPr lang="en-US" sz="1150" dirty="0"/>
+          </a:p>
+        </p:txBody>
+      </p:sp>
+      <p:sp>
+        <p:nvSpPr>
+          <p:cNvPr id="14" name="Shape 12"/>
+          <p:cNvSpPr/>
+          <p:nvPr/>
+        </p:nvSpPr>
+        <p:spPr>
+          <a:xfrm>
+            <a:off x="2724912" y="3721608"/>
+            <a:ext cx="320040" cy="0"/>
+          </a:xfrm>
+          <a:prstGeom prst="line">
+            <a:avLst/>
+          </a:prstGeom>
+          <a:noFill/>
+          <a:ln w="27940">
+            <a:solidFill>
+              <a:srgbClr val="6B7280"/>
+            </a:solidFill>
+            <a:prstDash val="solid"/>
+            <a:tailEnd type="triangle"/>
+          </a:ln>
+        </p:spPr>
+      </p:sp>
+      <p:sp>
+        <p:nvSpPr>
+          <p:cNvPr id="15" name="Shape 13"/>
+          <p:cNvSpPr/>
+          <p:nvPr/>
+        </p:nvSpPr>
+        <p:spPr>
+          <a:xfrm>
+            <a:off x="3072384" y="3474720"/>
+            <a:ext cx="969264" cy="493776"/>
+          </a:xfrm>
+          <a:prstGeom prst="roundRect">
+            <a:avLst>
+              <a:gd name="adj" fmla="val 9259"/>
+            </a:avLst>
+          </a:prstGeom>
+          <a:solidFill>
+            <a:srgbClr val="EFEDF9"/>
+          </a:solidFill>
+          <a:ln w="15875">
+            <a:solidFill>
+              <a:srgbClr val="4C3FB1"/>
+            </a:solidFill>
+            <a:prstDash val="solid"/>
+          </a:ln>
+        </p:spPr>
+      </p:sp>
+      <p:sp>
+        <p:nvSpPr>
+          <p:cNvPr id="16" name="Text 14"/>
+          <p:cNvSpPr/>
+          <p:nvPr/>
+        </p:nvSpPr>
+        <p:spPr>
+          <a:xfrm>
+            <a:off x="3127248" y="3474720"/>
+            <a:ext cx="859536" cy="493776"/>
+          </a:xfrm>
+          <a:prstGeom prst="rect">
+            <a:avLst/>
+          </a:prstGeom>
+          <a:noFill/>
+          <a:ln/>
+        </p:spPr>
+        <p:txBody>
+          <a:bodyPr wrap="square" lIns="0" tIns="0" rIns="0" bIns="0" rtlCol="0" anchor="ctr"/>
+          <a:lstStyle/>
+          <a:p>
+            <a:pPr algn="ctr" indent="0" marL="0">
+              <a:buNone/>
+            </a:pPr>
+            <a:r>
+              <a:rPr lang="en-US" sz="1100" dirty="0">
+                <a:solidFill>
+                  <a:srgbClr val="372E8A"/>
+                </a:solidFill>
+                <a:latin typeface="微软雅黑" pitchFamily="34" charset="0"/>
+                <a:ea typeface="微软雅黑" pitchFamily="34" charset="-122"/>
+                <a:cs typeface="微软雅黑" pitchFamily="34" charset="-120"/>
+              </a:rPr>
+              <a:t>τ_θ 编码</a:t>
+            </a:r>
+            <a:endParaRPr lang="en-US" sz="1100" dirty="0"/>
+          </a:p>
+        </p:txBody>
+      </p:sp>
+      <p:sp>
+        <p:nvSpPr>
+          <p:cNvPr id="17" name="Shape 15"/>
+          <p:cNvSpPr/>
+          <p:nvPr/>
+        </p:nvSpPr>
+        <p:spPr>
+          <a:xfrm>
+            <a:off x="4069080" y="3721608"/>
+            <a:ext cx="320040" cy="0"/>
+          </a:xfrm>
+          <a:prstGeom prst="line">
+            <a:avLst/>
+          </a:prstGeom>
+          <a:noFill/>
+          <a:ln w="27940">
+            <a:solidFill>
+              <a:srgbClr val="6B7280"/>
+            </a:solidFill>
+            <a:prstDash val="solid"/>
+            <a:tailEnd type="triangle"/>
+          </a:ln>
+        </p:spPr>
+      </p:sp>
+      <p:sp>
+        <p:nvSpPr>
+          <p:cNvPr id="18" name="Shape 16"/>
+          <p:cNvSpPr/>
+          <p:nvPr/>
+        </p:nvSpPr>
+        <p:spPr>
+          <a:xfrm>
+            <a:off x="4416552" y="3310128"/>
+            <a:ext cx="1417320" cy="822960"/>
+          </a:xfrm>
+          <a:prstGeom prst="roundRect">
+            <a:avLst>
+              <a:gd name="adj" fmla="val 5556"/>
+            </a:avLst>
+          </a:prstGeom>
+          <a:solidFill>
+            <a:srgbClr val="FFFFFF"/>
+          </a:solidFill>
+          <a:ln w="15875">
+            <a:solidFill>
+              <a:srgbClr val="D9D5EF"/>
+            </a:solidFill>
+            <a:prstDash val="solid"/>
+          </a:ln>
+        </p:spPr>
+      </p:sp>
+      <p:sp>
+        <p:nvSpPr>
+          <p:cNvPr id="19" name="Text 17"/>
+          <p:cNvSpPr/>
+          <p:nvPr/>
+        </p:nvSpPr>
+        <p:spPr>
+          <a:xfrm>
+            <a:off x="4471416" y="3310128"/>
+            <a:ext cx="1307592" cy="822960"/>
+          </a:xfrm>
+          <a:prstGeom prst="rect">
+            <a:avLst/>
+          </a:prstGeom>
+          <a:noFill/>
+          <a:ln/>
+        </p:spPr>
+        <p:txBody>
+          <a:bodyPr wrap="square" lIns="0" tIns="0" rIns="0" bIns="0" rtlCol="0" anchor="ctr"/>
+          <a:lstStyle/>
+          <a:p>
+            <a:pPr algn="ctr" indent="0" marL="0">
+              <a:buNone/>
+            </a:pPr>
+            <a:r>
+              <a:rPr lang="en-US" sz="1000" dirty="0">
+                <a:solidFill>
+                  <a:srgbClr val="1F2937"/>
+                </a:solidFill>
+                <a:latin typeface="微软雅黑" pitchFamily="34" charset="0"/>
+                <a:ea typeface="微软雅黑" pitchFamily="34" charset="-122"/>
+                <a:cs typeface="微软雅黑" pitchFamily="34" charset="-120"/>
+              </a:rPr>
+              <a:t>K, V ∈ R^{M×d}</a:t>
+            </a:r>
+            <a:endParaRPr lang="en-US" sz="1000" dirty="0"/>
+          </a:p>
+          <a:p>
+            <a:pPr algn="ctr" indent="0" marL="0">
+              <a:buNone/>
+            </a:pPr>
+            <a:r>
+              <a:rPr lang="en-US" sz="1000" dirty="0">
+                <a:solidFill>
+                  <a:srgbClr val="1F2937"/>
+                </a:solidFill>
+                <a:latin typeface="微软雅黑" pitchFamily="34" charset="0"/>
+                <a:ea typeface="微软雅黑" pitchFamily="34" charset="-122"/>
+                <a:cs typeface="微软雅黑" pitchFamily="34" charset="-120"/>
+              </a:rPr>
+              <a:t>键 / 值（M 个条件 token，经 W_K、W_V 投影）</a:t>
+            </a:r>
+            <a:endParaRPr lang="en-US" sz="1000" dirty="0"/>
+          </a:p>
+        </p:txBody>
+      </p:sp>
+      <p:sp>
+        <p:nvSpPr>
+          <p:cNvPr id="20" name="Shape 18"/>
+          <p:cNvSpPr/>
+          <p:nvPr/>
+        </p:nvSpPr>
+        <p:spPr>
+          <a:xfrm>
+            <a:off x="6263640" y="1554480"/>
+            <a:ext cx="5394960" cy="603504"/>
+          </a:xfrm>
+          <a:prstGeom prst="roundRect">
+            <a:avLst>
+              <a:gd name="adj" fmla="val 9091"/>
+            </a:avLst>
+          </a:prstGeom>
+          <a:solidFill>
+            <a:srgbClr val="FFFFFF"/>
+          </a:solidFill>
+          <a:ln w="13970">
+            <a:solidFill>
+              <a:srgbClr val="D9D5EF"/>
+            </a:solidFill>
+            <a:prstDash val="solid"/>
+          </a:ln>
+        </p:spPr>
+      </p:sp>
+      <p:sp>
+        <p:nvSpPr>
+          <p:cNvPr id="21" name="Text 19"/>
+          <p:cNvSpPr/>
+          <p:nvPr/>
+        </p:nvSpPr>
+        <p:spPr>
+          <a:xfrm>
+            <a:off x="6446520" y="1554480"/>
+            <a:ext cx="1005840" cy="603504"/>
           </a:xfrm>
           <a:prstGeom prst="rect">
             <a:avLst/>
@@ -26123,30 +26218,30 @@
               <a:buNone/>
             </a:pPr>
             <a:r>
-              <a:rPr lang="en-US" sz="3000" b="1" dirty="0">
-                <a:solidFill>
-                  <a:srgbClr val="F59E0B"/>
-                </a:solidFill>
-                <a:latin typeface="微软雅黑" pitchFamily="34" charset="0"/>
-                <a:ea typeface="微软雅黑" pitchFamily="34" charset="-122"/>
-                <a:cs typeface="微软雅黑" pitchFamily="34" charset="-120"/>
-              </a:rPr>
-              <a:t>通用接口</a:t>
-            </a:r>
-            <a:endParaRPr lang="en-US" sz="3000" dirty="0"/>
-          </a:p>
-        </p:txBody>
-      </p:sp>
-      <p:sp>
-        <p:nvSpPr>
-          <p:cNvPr id="19" name="Text 15"/>
-          <p:cNvSpPr/>
-          <p:nvPr/>
-        </p:nvSpPr>
-        <p:spPr>
-          <a:xfrm>
-            <a:off x="7845552" y="5394046"/>
-            <a:ext cx="3694176" cy="538582"/>
+              <a:rPr lang="en-US" sz="1250" b="1" dirty="0">
+                <a:solidFill>
+                  <a:srgbClr val="372E8A"/>
+                </a:solidFill>
+                <a:latin typeface="微软雅黑" pitchFamily="34" charset="0"/>
+                <a:ea typeface="微软雅黑" pitchFamily="34" charset="-122"/>
+                <a:cs typeface="微软雅黑" pitchFamily="34" charset="-120"/>
+              </a:rPr>
+              <a:t>① 打分</a:t>
+            </a:r>
+            <a:endParaRPr lang="en-US" sz="1250" dirty="0"/>
+          </a:p>
+        </p:txBody>
+      </p:sp>
+      <p:sp>
+        <p:nvSpPr>
+          <p:cNvPr id="22" name="Text 20"/>
+          <p:cNvSpPr/>
+          <p:nvPr/>
+        </p:nvSpPr>
+        <p:spPr>
+          <a:xfrm>
+            <a:off x="7498080" y="1554480"/>
+            <a:ext cx="4069080" cy="603504"/>
           </a:xfrm>
           <a:prstGeom prst="rect">
             <a:avLst/>
@@ -26155,14 +26250,744 @@
           <a:ln/>
         </p:spPr>
         <p:txBody>
-          <a:bodyPr wrap="square" lIns="0" tIns="0" rIns="0" bIns="0" rtlCol="0" anchor="t"/>
+          <a:bodyPr wrap="square" lIns="0" tIns="0" rIns="0" bIns="0" rtlCol="0" anchor="ctr"/>
           <a:lstStyle/>
           <a:p>
             <a:pPr indent="0" marL="0">
               <a:buNone/>
             </a:pPr>
             <a:r>
-              <a:rPr lang="en-US" sz="1250" dirty="0">
+              <a:rPr lang="en-US" sz="1200" dirty="0">
+                <a:solidFill>
+                  <a:srgbClr val="1F2937"/>
+                </a:solidFill>
+                <a:latin typeface="微软雅黑" pitchFamily="34" charset="0"/>
+                <a:ea typeface="微软雅黑" pitchFamily="34" charset="-122"/>
+                <a:cs typeface="微软雅黑" pitchFamily="34" charset="-120"/>
+              </a:rPr>
+              <a:t>S = QKᵀ / √d —— Q 与 K 逐对相似度</a:t>
+            </a:r>
+            <a:endParaRPr lang="en-US" sz="1200" dirty="0"/>
+          </a:p>
+        </p:txBody>
+      </p:sp>
+      <p:sp>
+        <p:nvSpPr>
+          <p:cNvPr id="23" name="Shape 21"/>
+          <p:cNvSpPr/>
+          <p:nvPr/>
+        </p:nvSpPr>
+        <p:spPr>
+          <a:xfrm>
+            <a:off x="8961120" y="2176272"/>
+            <a:ext cx="0" cy="128016"/>
+          </a:xfrm>
+          <a:prstGeom prst="line">
+            <a:avLst/>
+          </a:prstGeom>
+          <a:noFill/>
+          <a:ln w="27940">
+            <a:solidFill>
+              <a:srgbClr val="6B7280"/>
+            </a:solidFill>
+            <a:prstDash val="solid"/>
+            <a:tailEnd type="triangle"/>
+          </a:ln>
+        </p:spPr>
+      </p:sp>
+      <p:sp>
+        <p:nvSpPr>
+          <p:cNvPr id="24" name="Shape 22"/>
+          <p:cNvSpPr/>
+          <p:nvPr/>
+        </p:nvSpPr>
+        <p:spPr>
+          <a:xfrm>
+            <a:off x="6263640" y="2340864"/>
+            <a:ext cx="5394960" cy="603504"/>
+          </a:xfrm>
+          <a:prstGeom prst="roundRect">
+            <a:avLst>
+              <a:gd name="adj" fmla="val 9091"/>
+            </a:avLst>
+          </a:prstGeom>
+          <a:solidFill>
+            <a:srgbClr val="FFFFFF"/>
+          </a:solidFill>
+          <a:ln w="13970">
+            <a:solidFill>
+              <a:srgbClr val="D9D5EF"/>
+            </a:solidFill>
+            <a:prstDash val="solid"/>
+          </a:ln>
+        </p:spPr>
+      </p:sp>
+      <p:sp>
+        <p:nvSpPr>
+          <p:cNvPr id="25" name="Text 23"/>
+          <p:cNvSpPr/>
+          <p:nvPr/>
+        </p:nvSpPr>
+        <p:spPr>
+          <a:xfrm>
+            <a:off x="6446520" y="2340864"/>
+            <a:ext cx="1005840" cy="603504"/>
+          </a:xfrm>
+          <a:prstGeom prst="rect">
+            <a:avLst/>
+          </a:prstGeom>
+          <a:noFill/>
+          <a:ln/>
+        </p:spPr>
+        <p:txBody>
+          <a:bodyPr wrap="square" lIns="0" tIns="0" rIns="0" bIns="0" rtlCol="0" anchor="ctr"/>
+          <a:lstStyle/>
+          <a:p>
+            <a:pPr indent="0" marL="0">
+              <a:buNone/>
+            </a:pPr>
+            <a:r>
+              <a:rPr lang="en-US" sz="1250" b="1" dirty="0">
+                <a:solidFill>
+                  <a:srgbClr val="372E8A"/>
+                </a:solidFill>
+                <a:latin typeface="微软雅黑" pitchFamily="34" charset="0"/>
+                <a:ea typeface="微软雅黑" pitchFamily="34" charset="-122"/>
+                <a:cs typeface="微软雅黑" pitchFamily="34" charset="-120"/>
+              </a:rPr>
+              <a:t>② 归一化</a:t>
+            </a:r>
+            <a:endParaRPr lang="en-US" sz="1250" dirty="0"/>
+          </a:p>
+        </p:txBody>
+      </p:sp>
+      <p:sp>
+        <p:nvSpPr>
+          <p:cNvPr id="26" name="Text 24"/>
+          <p:cNvSpPr/>
+          <p:nvPr/>
+        </p:nvSpPr>
+        <p:spPr>
+          <a:xfrm>
+            <a:off x="7498080" y="2340864"/>
+            <a:ext cx="4069080" cy="603504"/>
+          </a:xfrm>
+          <a:prstGeom prst="rect">
+            <a:avLst/>
+          </a:prstGeom>
+          <a:noFill/>
+          <a:ln/>
+        </p:spPr>
+        <p:txBody>
+          <a:bodyPr wrap="square" lIns="0" tIns="0" rIns="0" bIns="0" rtlCol="0" anchor="ctr"/>
+          <a:lstStyle/>
+          <a:p>
+            <a:pPr indent="0" marL="0">
+              <a:buNone/>
+            </a:pPr>
+            <a:r>
+              <a:rPr lang="en-US" sz="1200" dirty="0">
+                <a:solidFill>
+                  <a:srgbClr val="1F2937"/>
+                </a:solidFill>
+                <a:latin typeface="微软雅黑" pitchFamily="34" charset="0"/>
+                <a:ea typeface="微软雅黑" pitchFamily="34" charset="-122"/>
+                <a:cs typeface="微软雅黑" pitchFamily="34" charset="-120"/>
+              </a:rPr>
+              <a:t>A = softmax(S) —— 每行和为 1 的注意力权重</a:t>
+            </a:r>
+            <a:endParaRPr lang="en-US" sz="1200" dirty="0"/>
+          </a:p>
+        </p:txBody>
+      </p:sp>
+      <p:sp>
+        <p:nvSpPr>
+          <p:cNvPr id="27" name="Shape 25"/>
+          <p:cNvSpPr/>
+          <p:nvPr/>
+        </p:nvSpPr>
+        <p:spPr>
+          <a:xfrm>
+            <a:off x="8961120" y="2962656"/>
+            <a:ext cx="0" cy="128016"/>
+          </a:xfrm>
+          <a:prstGeom prst="line">
+            <a:avLst/>
+          </a:prstGeom>
+          <a:noFill/>
+          <a:ln w="27940">
+            <a:solidFill>
+              <a:srgbClr val="6B7280"/>
+            </a:solidFill>
+            <a:prstDash val="solid"/>
+            <a:tailEnd type="triangle"/>
+          </a:ln>
+        </p:spPr>
+      </p:sp>
+      <p:sp>
+        <p:nvSpPr>
+          <p:cNvPr id="28" name="Shape 26"/>
+          <p:cNvSpPr/>
+          <p:nvPr/>
+        </p:nvSpPr>
+        <p:spPr>
+          <a:xfrm>
+            <a:off x="6263640" y="3127248"/>
+            <a:ext cx="5394960" cy="603504"/>
+          </a:xfrm>
+          <a:prstGeom prst="roundRect">
+            <a:avLst>
+              <a:gd name="adj" fmla="val 9091"/>
+            </a:avLst>
+          </a:prstGeom>
+          <a:solidFill>
+            <a:srgbClr val="FFFFFF"/>
+          </a:solidFill>
+          <a:ln w="13970">
+            <a:solidFill>
+              <a:srgbClr val="D9D5EF"/>
+            </a:solidFill>
+            <a:prstDash val="solid"/>
+          </a:ln>
+        </p:spPr>
+      </p:sp>
+      <p:sp>
+        <p:nvSpPr>
+          <p:cNvPr id="29" name="Text 27"/>
+          <p:cNvSpPr/>
+          <p:nvPr/>
+        </p:nvSpPr>
+        <p:spPr>
+          <a:xfrm>
+            <a:off x="6446520" y="3127248"/>
+            <a:ext cx="1005840" cy="603504"/>
+          </a:xfrm>
+          <a:prstGeom prst="rect">
+            <a:avLst/>
+          </a:prstGeom>
+          <a:noFill/>
+          <a:ln/>
+        </p:spPr>
+        <p:txBody>
+          <a:bodyPr wrap="square" lIns="0" tIns="0" rIns="0" bIns="0" rtlCol="0" anchor="ctr"/>
+          <a:lstStyle/>
+          <a:p>
+            <a:pPr indent="0" marL="0">
+              <a:buNone/>
+            </a:pPr>
+            <a:r>
+              <a:rPr lang="en-US" sz="1250" b="1" dirty="0">
+                <a:solidFill>
+                  <a:srgbClr val="372E8A"/>
+                </a:solidFill>
+                <a:latin typeface="微软雅黑" pitchFamily="34" charset="0"/>
+                <a:ea typeface="微软雅黑" pitchFamily="34" charset="-122"/>
+                <a:cs typeface="微软雅黑" pitchFamily="34" charset="-120"/>
+              </a:rPr>
+              <a:t>③ 聚合</a:t>
+            </a:r>
+            <a:endParaRPr lang="en-US" sz="1250" dirty="0"/>
+          </a:p>
+        </p:txBody>
+      </p:sp>
+      <p:sp>
+        <p:nvSpPr>
+          <p:cNvPr id="30" name="Text 28"/>
+          <p:cNvSpPr/>
+          <p:nvPr/>
+        </p:nvSpPr>
+        <p:spPr>
+          <a:xfrm>
+            <a:off x="7498080" y="3127248"/>
+            <a:ext cx="4069080" cy="603504"/>
+          </a:xfrm>
+          <a:prstGeom prst="rect">
+            <a:avLst/>
+          </a:prstGeom>
+          <a:noFill/>
+          <a:ln/>
+        </p:spPr>
+        <p:txBody>
+          <a:bodyPr wrap="square" lIns="0" tIns="0" rIns="0" bIns="0" rtlCol="0" anchor="ctr"/>
+          <a:lstStyle/>
+          <a:p>
+            <a:pPr indent="0" marL="0">
+              <a:buNone/>
+            </a:pPr>
+            <a:r>
+              <a:rPr lang="en-US" sz="1200" dirty="0">
+                <a:solidFill>
+                  <a:srgbClr val="1F2937"/>
+                </a:solidFill>
+                <a:latin typeface="微软雅黑" pitchFamily="34" charset="0"/>
+                <a:ea typeface="微软雅黑" pitchFamily="34" charset="-122"/>
+                <a:cs typeface="微软雅黑" pitchFamily="34" charset="-120"/>
+              </a:rPr>
+              <a:t>O = A · V —— 各位置按权重聚合条件信息</a:t>
+            </a:r>
+            <a:endParaRPr lang="en-US" sz="1200" dirty="0"/>
+          </a:p>
+        </p:txBody>
+      </p:sp>
+      <p:sp>
+        <p:nvSpPr>
+          <p:cNvPr id="31" name="Shape 29"/>
+          <p:cNvSpPr/>
+          <p:nvPr/>
+        </p:nvSpPr>
+        <p:spPr>
+          <a:xfrm>
+            <a:off x="8961120" y="3749040"/>
+            <a:ext cx="0" cy="128016"/>
+          </a:xfrm>
+          <a:prstGeom prst="line">
+            <a:avLst/>
+          </a:prstGeom>
+          <a:noFill/>
+          <a:ln w="27940">
+            <a:solidFill>
+              <a:srgbClr val="6B7280"/>
+            </a:solidFill>
+            <a:prstDash val="solid"/>
+            <a:tailEnd type="triangle"/>
+          </a:ln>
+        </p:spPr>
+      </p:sp>
+      <p:sp>
+        <p:nvSpPr>
+          <p:cNvPr id="32" name="Shape 30"/>
+          <p:cNvSpPr/>
+          <p:nvPr/>
+        </p:nvSpPr>
+        <p:spPr>
+          <a:xfrm>
+            <a:off x="6263640" y="3913632"/>
+            <a:ext cx="5394960" cy="603504"/>
+          </a:xfrm>
+          <a:prstGeom prst="roundRect">
+            <a:avLst>
+              <a:gd name="adj" fmla="val 9091"/>
+            </a:avLst>
+          </a:prstGeom>
+          <a:solidFill>
+            <a:srgbClr val="EFEDF9"/>
+          </a:solidFill>
+          <a:ln w="19050">
+            <a:solidFill>
+              <a:srgbClr val="F59E0B"/>
+            </a:solidFill>
+            <a:prstDash val="solid"/>
+          </a:ln>
+        </p:spPr>
+      </p:sp>
+      <p:sp>
+        <p:nvSpPr>
+          <p:cNvPr id="33" name="Text 31"/>
+          <p:cNvSpPr/>
+          <p:nvPr/>
+        </p:nvSpPr>
+        <p:spPr>
+          <a:xfrm>
+            <a:off x="6446520" y="3913632"/>
+            <a:ext cx="1005840" cy="603504"/>
+          </a:xfrm>
+          <a:prstGeom prst="rect">
+            <a:avLst/>
+          </a:prstGeom>
+          <a:noFill/>
+          <a:ln/>
+        </p:spPr>
+        <p:txBody>
+          <a:bodyPr wrap="square" lIns="0" tIns="0" rIns="0" bIns="0" rtlCol="0" anchor="ctr"/>
+          <a:lstStyle/>
+          <a:p>
+            <a:pPr indent="0" marL="0">
+              <a:buNone/>
+            </a:pPr>
+            <a:r>
+              <a:rPr lang="en-US" sz="1250" b="1" dirty="0">
+                <a:solidFill>
+                  <a:srgbClr val="372E8A"/>
+                </a:solidFill>
+                <a:latin typeface="微软雅黑" pitchFamily="34" charset="0"/>
+                <a:ea typeface="微软雅黑" pitchFamily="34" charset="-122"/>
+                <a:cs typeface="微软雅黑" pitchFamily="34" charset="-120"/>
+              </a:rPr>
+              <a:t>④ 并入</a:t>
+            </a:r>
+            <a:endParaRPr lang="en-US" sz="1250" dirty="0"/>
+          </a:p>
+        </p:txBody>
+      </p:sp>
+      <p:sp>
+        <p:nvSpPr>
+          <p:cNvPr id="34" name="Text 32"/>
+          <p:cNvSpPr/>
+          <p:nvPr/>
+        </p:nvSpPr>
+        <p:spPr>
+          <a:xfrm>
+            <a:off x="7498080" y="3913632"/>
+            <a:ext cx="4069080" cy="603504"/>
+          </a:xfrm>
+          <a:prstGeom prst="rect">
+            <a:avLst/>
+          </a:prstGeom>
+          <a:noFill/>
+          <a:ln/>
+        </p:spPr>
+        <p:txBody>
+          <a:bodyPr wrap="square" lIns="0" tIns="0" rIns="0" bIns="0" rtlCol="0" anchor="ctr"/>
+          <a:lstStyle/>
+          <a:p>
+            <a:pPr indent="0" marL="0">
+              <a:buNone/>
+            </a:pPr>
+            <a:r>
+              <a:rPr lang="en-US" sz="1200" dirty="0">
+                <a:solidFill>
+                  <a:srgbClr val="1F2937"/>
+                </a:solidFill>
+                <a:latin typeface="微软雅黑" pitchFamily="34" charset="0"/>
+                <a:ea typeface="微软雅黑" pitchFamily="34" charset="-122"/>
+                <a:cs typeface="微软雅黑" pitchFamily="34" charset="-120"/>
+              </a:rPr>
+              <a:t>残差叠加至 φᵢ(z_t)，不替换原特征</a:t>
+            </a:r>
+            <a:endParaRPr lang="en-US" sz="1200" dirty="0"/>
+          </a:p>
+        </p:txBody>
+      </p:sp>
+      <p:sp>
+        <p:nvSpPr>
+          <p:cNvPr id="35" name="Shape 33"/>
+          <p:cNvSpPr/>
+          <p:nvPr/>
+        </p:nvSpPr>
+        <p:spPr>
+          <a:xfrm>
+            <a:off x="5861304" y="1947672"/>
+            <a:ext cx="365760" cy="0"/>
+          </a:xfrm>
+          <a:prstGeom prst="line">
+            <a:avLst/>
+          </a:prstGeom>
+          <a:noFill/>
+          <a:ln w="27940">
+            <a:solidFill>
+              <a:srgbClr val="6B7280"/>
+            </a:solidFill>
+            <a:prstDash val="solid"/>
+            <a:tailEnd type="triangle"/>
+          </a:ln>
+        </p:spPr>
+      </p:sp>
+      <p:sp>
+        <p:nvSpPr>
+          <p:cNvPr id="36" name="Shape 34"/>
+          <p:cNvSpPr/>
+          <p:nvPr/>
+        </p:nvSpPr>
+        <p:spPr>
+          <a:xfrm flipV="1">
+            <a:off x="5861304" y="3154680"/>
+            <a:ext cx="365760" cy="502920"/>
+          </a:xfrm>
+          <a:prstGeom prst="line">
+            <a:avLst/>
+          </a:prstGeom>
+          <a:noFill/>
+          <a:ln w="27940">
+            <a:solidFill>
+              <a:srgbClr val="6B7280"/>
+            </a:solidFill>
+            <a:prstDash val="solid"/>
+            <a:tailEnd type="triangle"/>
+          </a:ln>
+        </p:spPr>
+      </p:sp>
+      <p:sp>
+        <p:nvSpPr>
+          <p:cNvPr id="37" name="Shape 35"/>
+          <p:cNvSpPr/>
+          <p:nvPr/>
+        </p:nvSpPr>
+        <p:spPr>
+          <a:xfrm>
+            <a:off x="548640" y="4864608"/>
+            <a:ext cx="5486400" cy="585216"/>
+          </a:xfrm>
+          <a:prstGeom prst="rect">
+            <a:avLst/>
+          </a:prstGeom>
+          <a:solidFill>
+            <a:srgbClr val="F7F6FB"/>
+          </a:solidFill>
+          <a:ln w="9525">
+            <a:solidFill>
+              <a:srgbClr val="E4E1F5"/>
+            </a:solidFill>
+            <a:prstDash val="solid"/>
+          </a:ln>
+        </p:spPr>
+      </p:sp>
+      <p:sp>
+        <p:nvSpPr>
+          <p:cNvPr id="38" name="Text 36"/>
+          <p:cNvSpPr/>
+          <p:nvPr/>
+        </p:nvSpPr>
+        <p:spPr>
+          <a:xfrm>
+            <a:off x="713232" y="4864608"/>
+            <a:ext cx="5193792" cy="585216"/>
+          </a:xfrm>
+          <a:prstGeom prst="rect">
+            <a:avLst/>
+          </a:prstGeom>
+          <a:noFill/>
+          <a:ln/>
+        </p:spPr>
+        <p:txBody>
+          <a:bodyPr wrap="square" lIns="0" tIns="0" rIns="0" bIns="0" rtlCol="0" anchor="ctr"/>
+          <a:lstStyle/>
+          <a:p>
+            <a:pPr indent="0" marL="0">
+              <a:buNone/>
+            </a:pPr>
+            <a:r>
+              <a:rPr lang="en-US" sz="1200" dirty="0">
+                <a:solidFill>
+                  <a:srgbClr val="1F2937"/>
+                </a:solidFill>
+                <a:latin typeface="微软雅黑" pitchFamily="34" charset="0"/>
+                <a:ea typeface="微软雅黑" pitchFamily="34" charset="-122"/>
+                <a:cs typeface="微软雅黑" pitchFamily="34" charset="-120"/>
+              </a:rPr>
+              <a:t>逐位置注入：权重由内容相似度决定，每个空间位置获得专属的条件信息</a:t>
+            </a:r>
+            <a:endParaRPr lang="en-US" sz="1200" dirty="0"/>
+          </a:p>
+        </p:txBody>
+      </p:sp>
+      <p:sp>
+        <p:nvSpPr>
+          <p:cNvPr id="39" name="Shape 37"/>
+          <p:cNvSpPr/>
+          <p:nvPr/>
+        </p:nvSpPr>
+        <p:spPr>
+          <a:xfrm>
+            <a:off x="6263640" y="4864608"/>
+            <a:ext cx="5486400" cy="585216"/>
+          </a:xfrm>
+          <a:prstGeom prst="rect">
+            <a:avLst/>
+          </a:prstGeom>
+          <a:solidFill>
+            <a:srgbClr val="F7F6FB"/>
+          </a:solidFill>
+          <a:ln w="9525">
+            <a:solidFill>
+              <a:srgbClr val="E4E1F5"/>
+            </a:solidFill>
+            <a:prstDash val="solid"/>
+          </a:ln>
+        </p:spPr>
+      </p:sp>
+      <p:sp>
+        <p:nvSpPr>
+          <p:cNvPr id="40" name="Text 38"/>
+          <p:cNvSpPr/>
+          <p:nvPr/>
+        </p:nvSpPr>
+        <p:spPr>
+          <a:xfrm>
+            <a:off x="6428232" y="4864608"/>
+            <a:ext cx="5193792" cy="585216"/>
+          </a:xfrm>
+          <a:prstGeom prst="rect">
+            <a:avLst/>
+          </a:prstGeom>
+          <a:noFill/>
+          <a:ln/>
+        </p:spPr>
+        <p:txBody>
+          <a:bodyPr wrap="square" lIns="0" tIns="0" rIns="0" bIns="0" rtlCol="0" anchor="ctr"/>
+          <a:lstStyle/>
+          <a:p>
+            <a:pPr indent="0" marL="0">
+              <a:buNone/>
+            </a:pPr>
+            <a:r>
+              <a:rPr lang="en-US" sz="1200" dirty="0">
+                <a:solidFill>
+                  <a:srgbClr val="1F2937"/>
+                </a:solidFill>
+                <a:latin typeface="微软雅黑" pitchFamily="34" charset="0"/>
+                <a:ea typeface="微软雅黑" pitchFamily="34" charset="-122"/>
+                <a:cs typeface="微软雅黑" pitchFamily="34" charset="-120"/>
+              </a:rPr>
+              <a:t>模态无关：条件仅需编码为变长 token 序列，替换条件类型只替换 τ_θ</a:t>
+            </a:r>
+            <a:endParaRPr lang="en-US" sz="1200" dirty="0"/>
+          </a:p>
+        </p:txBody>
+      </p:sp>
+      <p:sp>
+        <p:nvSpPr>
+          <p:cNvPr id="41" name="Shape 39"/>
+          <p:cNvSpPr/>
+          <p:nvPr/>
+        </p:nvSpPr>
+        <p:spPr>
+          <a:xfrm>
+            <a:off x="548640" y="5577840"/>
+            <a:ext cx="5486400" cy="585216"/>
+          </a:xfrm>
+          <a:prstGeom prst="rect">
+            <a:avLst/>
+          </a:prstGeom>
+          <a:solidFill>
+            <a:srgbClr val="F7F6FB"/>
+          </a:solidFill>
+          <a:ln w="9525">
+            <a:solidFill>
+              <a:srgbClr val="E4E1F5"/>
+            </a:solidFill>
+            <a:prstDash val="solid"/>
+          </a:ln>
+        </p:spPr>
+      </p:sp>
+      <p:sp>
+        <p:nvSpPr>
+          <p:cNvPr id="42" name="Text 40"/>
+          <p:cNvSpPr/>
+          <p:nvPr/>
+        </p:nvSpPr>
+        <p:spPr>
+          <a:xfrm>
+            <a:off x="713232" y="5577840"/>
+            <a:ext cx="5193792" cy="585216"/>
+          </a:xfrm>
+          <a:prstGeom prst="rect">
+            <a:avLst/>
+          </a:prstGeom>
+          <a:noFill/>
+          <a:ln/>
+        </p:spPr>
+        <p:txBody>
+          <a:bodyPr wrap="square" lIns="0" tIns="0" rIns="0" bIns="0" rtlCol="0" anchor="ctr"/>
+          <a:lstStyle/>
+          <a:p>
+            <a:pPr indent="0" marL="0">
+              <a:buNone/>
+            </a:pPr>
+            <a:r>
+              <a:rPr lang="en-US" sz="1200" dirty="0">
+                <a:solidFill>
+                  <a:srgbClr val="1F2937"/>
+                </a:solidFill>
+                <a:latin typeface="微软雅黑" pitchFamily="34" charset="0"/>
+                <a:ea typeface="微软雅黑" pitchFamily="34" charset="-122"/>
+                <a:cs typeface="微软雅黑" pitchFamily="34" charset="-120"/>
+              </a:rPr>
+              <a:t>全程作用：U-Net 各分辨率层级均插入该模块，影响贯穿每个去噪步</a:t>
+            </a:r>
+            <a:endParaRPr lang="en-US" sz="1200" dirty="0"/>
+          </a:p>
+        </p:txBody>
+      </p:sp>
+      <p:sp>
+        <p:nvSpPr>
+          <p:cNvPr id="43" name="Shape 41"/>
+          <p:cNvSpPr/>
+          <p:nvPr/>
+        </p:nvSpPr>
+        <p:spPr>
+          <a:xfrm>
+            <a:off x="6263640" y="5577840"/>
+            <a:ext cx="5486400" cy="585216"/>
+          </a:xfrm>
+          <a:prstGeom prst="rect">
+            <a:avLst/>
+          </a:prstGeom>
+          <a:solidFill>
+            <a:srgbClr val="F7F6FB"/>
+          </a:solidFill>
+          <a:ln w="9525">
+            <a:solidFill>
+              <a:srgbClr val="E4E1F5"/>
+            </a:solidFill>
+            <a:prstDash val="solid"/>
+          </a:ln>
+        </p:spPr>
+      </p:sp>
+      <p:sp>
+        <p:nvSpPr>
+          <p:cNvPr id="44" name="Text 42"/>
+          <p:cNvSpPr/>
+          <p:nvPr/>
+        </p:nvSpPr>
+        <p:spPr>
+          <a:xfrm>
+            <a:off x="6428232" y="5577840"/>
+            <a:ext cx="5193792" cy="585216"/>
+          </a:xfrm>
+          <a:prstGeom prst="rect">
+            <a:avLst/>
+          </a:prstGeom>
+          <a:noFill/>
+          <a:ln/>
+        </p:spPr>
+        <p:txBody>
+          <a:bodyPr wrap="square" lIns="0" tIns="0" rIns="0" bIns="0" rtlCol="0" anchor="ctr"/>
+          <a:lstStyle/>
+          <a:p>
+            <a:pPr indent="0" marL="0">
+              <a:buNone/>
+            </a:pPr>
+            <a:r>
+              <a:rPr lang="en-US" sz="1200" dirty="0">
+                <a:solidFill>
+                  <a:srgbClr val="1F2937"/>
+                </a:solidFill>
+                <a:latin typeface="微软雅黑" pitchFamily="34" charset="0"/>
+                <a:ea typeface="微软雅黑" pitchFamily="34" charset="-122"/>
+                <a:cs typeface="微软雅黑" pitchFamily="34" charset="-120"/>
+              </a:rPr>
+              <a:t>端到端优化：τ_θ、投影矩阵与 ε_θ 由式(3)联合训练</a:t>
+            </a:r>
+            <a:endParaRPr lang="en-US" sz="1200" dirty="0"/>
+          </a:p>
+        </p:txBody>
+      </p:sp>
+      <p:sp>
+        <p:nvSpPr>
+          <p:cNvPr id="45" name="Text 43"/>
+          <p:cNvSpPr/>
+          <p:nvPr/>
+        </p:nvSpPr>
+        <p:spPr>
+          <a:xfrm>
+            <a:off x="548640" y="6327648"/>
+            <a:ext cx="10515600" cy="274320"/>
+          </a:xfrm>
+          <a:prstGeom prst="rect">
+            <a:avLst/>
+          </a:prstGeom>
+          <a:noFill/>
+          <a:ln/>
+        </p:spPr>
+        <p:txBody>
+          <a:bodyPr wrap="square" lIns="0" tIns="0" rIns="0" bIns="0" rtlCol="0" anchor="ctr"/>
+          <a:lstStyle/>
+          <a:p>
+            <a:pPr indent="0" marL="0">
+              <a:buNone/>
+            </a:pPr>
+            <a:r>
+              <a:rPr lang="en-US" sz="1150" dirty="0">
                 <a:solidFill>
                   <a:srgbClr val="6B7280"/>
                 </a:solidFill>
@@ -26170,15 +26995,15 @@
                 <a:ea typeface="微软雅黑" pitchFamily="34" charset="-122"/>
                 <a:cs typeface="微软雅黑" pitchFamily="34" charset="-120"/>
               </a:rPr>
-              <a:t>后续 SD 的 text cross-attention 即由此而来</a:t>
-            </a:r>
-            <a:endParaRPr lang="en-US" sz="1250" dirty="0"/>
-          </a:p>
-        </p:txBody>
-      </p:sp>
-      <p:sp>
-        <p:nvSpPr>
-          <p:cNvPr id="20" name="Text 16"/>
+              <a:t>权重矩阵 A ∈ R^{N×M}（注意力图）可直接可视化，用于分析空间位置与条件 token 的关联</a:t>
+            </a:r>
+            <a:endParaRPr lang="en-US" sz="1150" dirty="0"/>
+          </a:p>
+        </p:txBody>
+      </p:sp>
+      <p:sp>
+        <p:nvSpPr>
+          <p:cNvPr id="46" name="Text 44"/>
           <p:cNvSpPr/>
           <p:nvPr/>
         </p:nvSpPr>
@@ -26217,7 +27042,7 @@
       </p:sp>
       <p:sp>
         <p:nvSpPr>
-          <p:cNvPr id="21" name="Text 17"/>
+          <p:cNvPr id="47" name="Text 45"/>
           <p:cNvSpPr/>
           <p:nvPr/>
         </p:nvSpPr>
@@ -26251,1036 +27076,6 @@
               <a:t>29</a:t>
             </a:r>
             <a:endParaRPr lang="en-US" sz="1050" dirty="0"/>
-          </a:p>
-        </p:txBody>
-      </p:sp>
-      <p:sp>
-        <p:nvSpPr>
-          <p:cNvPr id="22" name="TextBox 21"/>
-          <p:cNvSpPr txBox="1"/>
-          <p:nvPr/>
-        </p:nvSpPr>
-        <p:spPr>
-          <a:xfrm>
-            <a:off x="640080" y="1588293"/>
-            <a:ext cx="6537960" cy="801053"/>
-          </a:xfrm>
-          <a:prstGeom prst="rect">
-            <a:avLst/>
-          </a:prstGeom>
-          <a:noFill/>
-        </p:spPr>
-        <p:txBody>
-          <a:bodyPr wrap="none" anchor="ctr" lIns="0" rIns="0" tIns="0" bIns="0">
-            <a:spAutoFit/>
-          </a:bodyPr>
-          <a:lstStyle/>
-          <a:p xmlns:a14="http://schemas.microsoft.com/office/drawing/2010/main" xmlns:mc="http://schemas.openxmlformats.org/markup-compatibility/2006" xmlns:m="http://schemas.openxmlformats.org/officeDocument/2006/math">
-            <a:pPr algn="ctr">
-              <a:defRPr sz="2700"/>
-            </a:pPr>
-            <mc:AlternateContent>
-              <mc:Choice Requires="a14">
-                <a14:m>
-                  <m:oMathPara>
-                    <m:oMathParaPr>
-                      <m:jc m:val="center"/>
-                    </m:oMathParaPr>
-                    <m:oMath>
-                      <m:box>
-                        <m:e>
-                          <m:box>
-                            <m:e>
-                              <m:r>
-                                <a:rPr sz="2700">
-                                  <a:solidFill>
-                                    <a:srgbClr val="1F2937"/>
-                                  </a:solidFill>
-                                </a:rPr>
-                                <m:rPr>
-                                  <m:sty m:val="p"/>
-                                </m:rPr>
-                                <m:t>A</m:t>
-                              </m:r>
-                              <m:r>
-                                <a:rPr sz="2700">
-                                  <a:solidFill>
-                                    <a:srgbClr val="1F2937"/>
-                                  </a:solidFill>
-                                </a:rPr>
-                                <m:rPr>
-                                  <m:sty m:val="p"/>
-                                </m:rPr>
-                                <m:t>t</m:t>
-                              </m:r>
-                              <m:r>
-                                <a:rPr sz="2700">
-                                  <a:solidFill>
-                                    <a:srgbClr val="1F2937"/>
-                                  </a:solidFill>
-                                </a:rPr>
-                                <m:rPr>
-                                  <m:sty m:val="p"/>
-                                </m:rPr>
-                                <m:t>t</m:t>
-                              </m:r>
-                              <m:r>
-                                <a:rPr sz="2700">
-                                  <a:solidFill>
-                                    <a:srgbClr val="1F2937"/>
-                                  </a:solidFill>
-                                </a:rPr>
-                                <m:rPr>
-                                  <m:sty m:val="p"/>
-                                </m:rPr>
-                                <m:t>e</m:t>
-                              </m:r>
-                              <m:r>
-                                <a:rPr sz="2700">
-                                  <a:solidFill>
-                                    <a:srgbClr val="1F2937"/>
-                                  </a:solidFill>
-                                </a:rPr>
-                                <m:rPr>
-                                  <m:sty m:val="p"/>
-                                </m:rPr>
-                                <m:t>n</m:t>
-                              </m:r>
-                              <m:r>
-                                <a:rPr sz="2700">
-                                  <a:solidFill>
-                                    <a:srgbClr val="1F2937"/>
-                                  </a:solidFill>
-                                </a:rPr>
-                                <m:rPr>
-                                  <m:sty m:val="p"/>
-                                </m:rPr>
-                                <m:t>t</m:t>
-                              </m:r>
-                              <m:r>
-                                <a:rPr sz="2700">
-                                  <a:solidFill>
-                                    <a:srgbClr val="1F2937"/>
-                                  </a:solidFill>
-                                </a:rPr>
-                                <m:rPr>
-                                  <m:sty m:val="p"/>
-                                </m:rPr>
-                                <m:t>i</m:t>
-                              </m:r>
-                              <m:r>
-                                <a:rPr sz="2700">
-                                  <a:solidFill>
-                                    <a:srgbClr val="1F2937"/>
-                                  </a:solidFill>
-                                </a:rPr>
-                                <m:rPr>
-                                  <m:sty m:val="p"/>
-                                </m:rPr>
-                                <m:t>o</m:t>
-                              </m:r>
-                              <m:r>
-                                <a:rPr sz="2700">
-                                  <a:solidFill>
-                                    <a:srgbClr val="1F2937"/>
-                                  </a:solidFill>
-                                </a:rPr>
-                                <m:rPr>
-                                  <m:sty m:val="p"/>
-                                </m:rPr>
-                                <m:t>n</m:t>
-                              </m:r>
-                            </m:e>
-                          </m:box>
-                          <m:r>
-                            <a:rPr sz="2700">
-                              <a:solidFill>
-                                <a:srgbClr val="1F2937"/>
-                              </a:solidFill>
-                            </a:rPr>
-                            <m:rPr>
-                              <m:sty m:val="p"/>
-                            </m:rPr>
-                            <m:t>(</m:t>
-                          </m:r>
-                          <m:r>
-                            <a:rPr sz="2700">
-                              <a:solidFill>
-                                <a:srgbClr val="1F2937"/>
-                              </a:solidFill>
-                            </a:rPr>
-                            <m:rPr>
-                              <m:sty m:val="i"/>
-                            </m:rPr>
-                            <m:t>Q</m:t>
-                          </m:r>
-                          <m:r>
-                            <a:rPr sz="2700">
-                              <a:solidFill>
-                                <a:srgbClr val="1F2937"/>
-                              </a:solidFill>
-                            </a:rPr>
-                            <m:rPr>
-                              <m:sty m:val="p"/>
-                            </m:rPr>
-                            <m:t>,</m:t>
-                          </m:r>
-                          <m:r>
-                            <a:rPr sz="2700">
-                              <a:solidFill>
-                                <a:srgbClr val="1F2937"/>
-                              </a:solidFill>
-                            </a:rPr>
-                            <m:rPr>
-                              <m:sty m:val="i"/>
-                            </m:rPr>
-                            <m:t>K</m:t>
-                          </m:r>
-                          <m:r>
-                            <a:rPr sz="2700">
-                              <a:solidFill>
-                                <a:srgbClr val="1F2937"/>
-                              </a:solidFill>
-                            </a:rPr>
-                            <m:rPr>
-                              <m:sty m:val="p"/>
-                            </m:rPr>
-                            <m:t>,</m:t>
-                          </m:r>
-                          <m:r>
-                            <a:rPr sz="2700">
-                              <a:solidFill>
-                                <a:srgbClr val="1F2937"/>
-                              </a:solidFill>
-                            </a:rPr>
-                            <m:rPr>
-                              <m:sty m:val="i"/>
-                            </m:rPr>
-                            <m:t>V</m:t>
-                          </m:r>
-                          <m:r>
-                            <a:rPr sz="2700">
-                              <a:solidFill>
-                                <a:srgbClr val="1F2937"/>
-                              </a:solidFill>
-                            </a:rPr>
-                            <m:rPr>
-                              <m:sty m:val="p"/>
-                            </m:rPr>
-                            <m:t>)</m:t>
-                          </m:r>
-                          <m:r>
-                            <a:rPr sz="2700">
-                              <a:solidFill>
-                                <a:srgbClr val="1F2937"/>
-                              </a:solidFill>
-                            </a:rPr>
-                            <m:rPr>
-                              <m:sty m:val="p"/>
-                            </m:rPr>
-                            <m:t>=</m:t>
-                          </m:r>
-                          <m:box>
-                            <m:e>
-                              <m:r>
-                                <a:rPr sz="2700">
-                                  <a:solidFill>
-                                    <a:srgbClr val="1F2937"/>
-                                  </a:solidFill>
-                                </a:rPr>
-                                <m:rPr>
-                                  <m:sty m:val="p"/>
-                                </m:rPr>
-                                <m:t>s</m:t>
-                              </m:r>
-                              <m:r>
-                                <a:rPr sz="2700">
-                                  <a:solidFill>
-                                    <a:srgbClr val="1F2937"/>
-                                  </a:solidFill>
-                                </a:rPr>
-                                <m:rPr>
-                                  <m:sty m:val="p"/>
-                                </m:rPr>
-                                <m:t>o</m:t>
-                              </m:r>
-                              <m:r>
-                                <a:rPr sz="2700">
-                                  <a:solidFill>
-                                    <a:srgbClr val="1F2937"/>
-                                  </a:solidFill>
-                                </a:rPr>
-                                <m:rPr>
-                                  <m:sty m:val="p"/>
-                                </m:rPr>
-                                <m:t>f</m:t>
-                              </m:r>
-                              <m:r>
-                                <a:rPr sz="2700">
-                                  <a:solidFill>
-                                    <a:srgbClr val="1F2937"/>
-                                  </a:solidFill>
-                                </a:rPr>
-                                <m:rPr>
-                                  <m:sty m:val="p"/>
-                                </m:rPr>
-                                <m:t>t</m:t>
-                              </m:r>
-                              <m:r>
-                                <a:rPr sz="2700">
-                                  <a:solidFill>
-                                    <a:srgbClr val="1F2937"/>
-                                  </a:solidFill>
-                                </a:rPr>
-                                <m:rPr>
-                                  <m:sty m:val="p"/>
-                                </m:rPr>
-                                <m:t>m</m:t>
-                              </m:r>
-                              <m:r>
-                                <a:rPr sz="2700">
-                                  <a:solidFill>
-                                    <a:srgbClr val="1F2937"/>
-                                  </a:solidFill>
-                                </a:rPr>
-                                <m:rPr>
-                                  <m:sty m:val="p"/>
-                                </m:rPr>
-                                <m:t>a</m:t>
-                              </m:r>
-                              <m:r>
-                                <a:rPr sz="2700">
-                                  <a:solidFill>
-                                    <a:srgbClr val="1F2937"/>
-                                  </a:solidFill>
-                                </a:rPr>
-                                <m:rPr>
-                                  <m:sty m:val="p"/>
-                                </m:rPr>
-                                <m:t>x</m:t>
-                              </m:r>
-                            </m:e>
-                          </m:box>
-                          <m:box>
-                            <m:e>
-                              <m:d>
-                                <m:dPr>
-                                  <m:begChr m:val="("/>
-                                  <m:endChr m:val=")"/>
-                                </m:dPr>
-                                <m:e>
-                                  <m:box>
-                                    <m:e>
-                                      <m:f>
-                                        <m:num>
-                                          <m:box>
-                                            <m:e>
-                                              <m:r>
-                                                <a:rPr sz="2700">
-                                                  <a:solidFill>
-                                                    <a:srgbClr val="1F2937"/>
-                                                  </a:solidFill>
-                                                </a:rPr>
-                                                <m:rPr>
-                                                  <m:sty m:val="i"/>
-                                                </m:rPr>
-                                                <m:t>Q</m:t>
-                                              </m:r>
-                                              <m:sSup>
-                                                <m:e>
-                                                  <m:r>
-                                                    <a:rPr sz="2700">
-                                                      <a:solidFill>
-                                                        <a:srgbClr val="1F2937"/>
-                                                      </a:solidFill>
-                                                    </a:rPr>
-                                                    <m:rPr>
-                                                      <m:sty m:val="i"/>
-                                                    </m:rPr>
-                                                    <m:t>K</m:t>
-                                                  </m:r>
-                                                </m:e>
-                                                <m:sup>
-                                                  <m:box>
-                                                    <m:e>
-                                                      <m:r>
-                                                        <a:rPr sz="2700">
-                                                          <a:solidFill>
-                                                            <a:srgbClr val="1F2937"/>
-                                                          </a:solidFill>
-                                                        </a:rPr>
-                                                        <m:rPr>
-                                                          <m:sty m:val="p"/>
-                                                        </m:rPr>
-                                                        <m:t>⊤</m:t>
-                                                      </m:r>
-                                                    </m:e>
-                                                  </m:box>
-                                                </m:sup>
-                                              </m:sSup>
-                                            </m:e>
-                                          </m:box>
-                                        </m:num>
-                                        <m:den>
-                                          <m:box>
-                                            <m:e>
-                                              <m:rad>
-                                                <m:e>
-                                                  <m:box>
-                                                    <m:e>
-                                                      <m:box>
-                                                        <m:e>
-                                                          <m:r>
-                                                            <a:rPr sz="2700">
-                                                              <a:solidFill>
-                                                                <a:srgbClr val="1F2937"/>
-                                                              </a:solidFill>
-                                                            </a:rPr>
-                                                            <m:rPr>
-                                                              <m:sty m:val="i"/>
-                                                            </m:rPr>
-                                                            <m:t>d</m:t>
-                                                          </m:r>
-                                                        </m:e>
-                                                      </m:box>
-                                                    </m:e>
-                                                  </m:box>
-                                                </m:e>
-                                              </m:rad>
-                                            </m:e>
-                                          </m:box>
-                                        </m:den>
-                                      </m:f>
-                                    </m:e>
-                                  </m:box>
-                                </m:e>
-                              </m:d>
-                            </m:e>
-                          </m:box>
-                          <m:r>
-                            <a:rPr sz="2700">
-                              <a:solidFill>
-                                <a:srgbClr val="1F2937"/>
-                              </a:solidFill>
-                            </a:rPr>
-                            <m:rPr>
-                              <m:sty m:val="p"/>
-                            </m:rPr>
-                            <m:t>·</m:t>
-                          </m:r>
-                          <m:r>
-                            <a:rPr sz="2700">
-                              <a:solidFill>
-                                <a:srgbClr val="1F2937"/>
-                              </a:solidFill>
-                            </a:rPr>
-                            <m:rPr>
-                              <m:sty m:val="i"/>
-                            </m:rPr>
-                            <m:t>V</m:t>
-                          </m:r>
-                        </m:e>
-                      </m:box>
-                    </m:oMath>
-                  </m:oMathPara>
-                </a14:m>
-              </mc:Choice>
-              <mc:Fallback>
-                <a:r>
-                  <a:t>Attention(Q,K,V) = softmax(QK^T/sqrt(d)) V</a:t>
-                </a:r>
-              </mc:Fallback>
-            </mc:AlternateContent>
-            <a:endParaRPr lang="zh-CN"/>
-          </a:p>
-        </p:txBody>
-      </p:sp>
-      <p:sp>
-        <p:nvSpPr>
-          <p:cNvPr id="23" name="TextBox 22"/>
-          <p:cNvSpPr txBox="1"/>
-          <p:nvPr/>
-        </p:nvSpPr>
-        <p:spPr>
-          <a:xfrm>
-            <a:off x="640080" y="3128695"/>
-            <a:ext cx="6537960" cy="509170"/>
-          </a:xfrm>
-          <a:prstGeom prst="rect">
-            <a:avLst/>
-          </a:prstGeom>
-          <a:noFill/>
-        </p:spPr>
-        <p:txBody>
-          <a:bodyPr wrap="none" anchor="ctr" lIns="0" rIns="0" tIns="0" bIns="0">
-            <a:spAutoFit/>
-          </a:bodyPr>
-          <a:lstStyle/>
-          <a:p xmlns:a14="http://schemas.microsoft.com/office/drawing/2010/main" xmlns:mc="http://schemas.openxmlformats.org/markup-compatibility/2006" xmlns:m="http://schemas.openxmlformats.org/officeDocument/2006/math">
-            <a:pPr algn="ctr">
-              <a:defRPr sz="2150"/>
-            </a:pPr>
-            <mc:AlternateContent>
-              <mc:Choice Requires="a14">
-                <a14:m>
-                  <m:oMathPara>
-                    <m:oMathParaPr>
-                      <m:jc m:val="center"/>
-                    </m:oMathParaPr>
-                    <m:oMath>
-                      <m:box>
-                        <m:e>
-                          <m:r>
-                            <a:rPr sz="2150">
-                              <a:solidFill>
-                                <a:srgbClr val="1F2937"/>
-                              </a:solidFill>
-                            </a:rPr>
-                            <m:rPr>
-                              <m:sty m:val="i"/>
-                            </m:rPr>
-                            <m:t>Q</m:t>
-                          </m:r>
-                          <m:r>
-                            <a:rPr sz="2150">
-                              <a:solidFill>
-                                <a:srgbClr val="1F2937"/>
-                              </a:solidFill>
-                            </a:rPr>
-                            <m:rPr>
-                              <m:sty m:val="p"/>
-                            </m:rPr>
-                            <m:t>=</m:t>
-                          </m:r>
-                          <m:sSubSup>
-                            <m:e>
-                              <m:r>
-                                <a:rPr sz="2150">
-                                  <a:solidFill>
-                                    <a:srgbClr val="1F2937"/>
-                                  </a:solidFill>
-                                </a:rPr>
-                                <m:rPr>
-                                  <m:sty m:val="i"/>
-                                </m:rPr>
-                                <m:t>W</m:t>
-                              </m:r>
-                            </m:e>
-                            <m:sub>
-                              <m:r>
-                                <a:rPr sz="2150">
-                                  <a:solidFill>
-                                    <a:srgbClr val="1F2937"/>
-                                  </a:solidFill>
-                                </a:rPr>
-                                <m:rPr>
-                                  <m:sty m:val="i"/>
-                                </m:rPr>
-                                <m:t>Q</m:t>
-                              </m:r>
-                            </m:sub>
-                            <m:sup>
-                              <m:box>
-                                <m:e>
-                                  <m:r>
-                                    <a:rPr sz="2150">
-                                      <a:solidFill>
-                                        <a:srgbClr val="1F2937"/>
-                                      </a:solidFill>
-                                    </a:rPr>
-                                    <m:rPr>
-                                      <m:sty m:val="p"/>
-                                    </m:rPr>
-                                    <m:t>(</m:t>
-                                  </m:r>
-                                  <m:r>
-                                    <a:rPr sz="2150">
-                                      <a:solidFill>
-                                        <a:srgbClr val="1F2937"/>
-                                      </a:solidFill>
-                                    </a:rPr>
-                                    <m:rPr>
-                                      <m:sty m:val="i"/>
-                                    </m:rPr>
-                                    <m:t>i</m:t>
-                                  </m:r>
-                                  <m:r>
-                                    <a:rPr sz="2150">
-                                      <a:solidFill>
-                                        <a:srgbClr val="1F2937"/>
-                                      </a:solidFill>
-                                    </a:rPr>
-                                    <m:rPr>
-                                      <m:sty m:val="p"/>
-                                    </m:rPr>
-                                    <m:t>)</m:t>
-                                  </m:r>
-                                </m:e>
-                              </m:box>
-                            </m:sup>
-                          </m:sSubSup>
-                          <m:r>
-                            <a:rPr sz="2150">
-                              <a:solidFill>
-                                <a:srgbClr val="1F2937"/>
-                              </a:solidFill>
-                            </a:rPr>
-                            <m:rPr>
-                              <m:sty m:val="p"/>
-                            </m:rPr>
-                            <m:t>·</m:t>
-                          </m:r>
-                          <m:sSub>
-                            <m:e>
-                              <m:r>
-                                <a:rPr sz="2150">
-                                  <a:solidFill>
-                                    <a:srgbClr val="1F2937"/>
-                                  </a:solidFill>
-                                </a:rPr>
-                                <m:rPr>
-                                  <m:sty m:val="i"/>
-                                </m:rPr>
-                                <m:t>φ</m:t>
-                              </m:r>
-                            </m:e>
-                            <m:sub>
-                              <m:r>
-                                <a:rPr sz="2150">
-                                  <a:solidFill>
-                                    <a:srgbClr val="1F2937"/>
-                                  </a:solidFill>
-                                </a:rPr>
-                                <m:rPr>
-                                  <m:sty m:val="i"/>
-                                </m:rPr>
-                                <m:t>i</m:t>
-                              </m:r>
-                            </m:sub>
-                          </m:sSub>
-                          <m:r>
-                            <a:rPr sz="2150">
-                              <a:solidFill>
-                                <a:srgbClr val="1F2937"/>
-                              </a:solidFill>
-                            </a:rPr>
-                            <m:rPr>
-                              <m:sty m:val="p"/>
-                            </m:rPr>
-                            <m:t>(</m:t>
-                          </m:r>
-                          <m:sSub>
-                            <m:e>
-                              <m:r>
-                                <a:rPr sz="2150">
-                                  <a:solidFill>
-                                    <a:srgbClr val="1F2937"/>
-                                  </a:solidFill>
-                                </a:rPr>
-                                <m:rPr>
-                                  <m:sty m:val="i"/>
-                                </m:rPr>
-                                <m:t>z</m:t>
-                              </m:r>
-                            </m:e>
-                            <m:sub>
-                              <m:r>
-                                <a:rPr sz="2150">
-                                  <a:solidFill>
-                                    <a:srgbClr val="1F2937"/>
-                                  </a:solidFill>
-                                </a:rPr>
-                                <m:rPr>
-                                  <m:sty m:val="i"/>
-                                </m:rPr>
-                                <m:t>t</m:t>
-                              </m:r>
-                            </m:sub>
-                          </m:sSub>
-                          <m:r>
-                            <a:rPr sz="2150">
-                              <a:solidFill>
-                                <a:srgbClr val="1F2937"/>
-                              </a:solidFill>
-                            </a:rPr>
-                            <m:rPr>
-                              <m:sty m:val="p"/>
-                            </m:rPr>
-                            <m:t>)</m:t>
-                          </m:r>
-                          <m:r>
-                            <a:rPr sz="2150">
-                              <a:solidFill>
-                                <a:srgbClr val="1F2937"/>
-                              </a:solidFill>
-                            </a:rPr>
-                            <m:rPr>
-                              <m:sty m:val="p"/>
-                            </m:rPr>
-                            <m:t>,</m:t>
-                          </m:r>
-                          <m:r>
-                            <a:rPr sz="2150">
-                              <a:solidFill>
-                                <a:srgbClr val="1F2937"/>
-                              </a:solidFill>
-                            </a:rPr>
-                            <m:t/>
-                          </m:r>
-                          <m:r>
-                            <a:rPr sz="2150">
-                              <a:solidFill>
-                                <a:srgbClr val="1F2937"/>
-                              </a:solidFill>
-                            </a:rPr>
-                            <m:rPr>
-                              <m:sty m:val="i"/>
-                            </m:rPr>
-                            <m:t>K</m:t>
-                          </m:r>
-                          <m:r>
-                            <a:rPr sz="2150">
-                              <a:solidFill>
-                                <a:srgbClr val="1F2937"/>
-                              </a:solidFill>
-                            </a:rPr>
-                            <m:rPr>
-                              <m:sty m:val="p"/>
-                            </m:rPr>
-                            <m:t>=</m:t>
-                          </m:r>
-                          <m:sSubSup>
-                            <m:e>
-                              <m:r>
-                                <a:rPr sz="2150">
-                                  <a:solidFill>
-                                    <a:srgbClr val="1F2937"/>
-                                  </a:solidFill>
-                                </a:rPr>
-                                <m:rPr>
-                                  <m:sty m:val="i"/>
-                                </m:rPr>
-                                <m:t>W</m:t>
-                              </m:r>
-                            </m:e>
-                            <m:sub>
-                              <m:r>
-                                <a:rPr sz="2150">
-                                  <a:solidFill>
-                                    <a:srgbClr val="1F2937"/>
-                                  </a:solidFill>
-                                </a:rPr>
-                                <m:rPr>
-                                  <m:sty m:val="i"/>
-                                </m:rPr>
-                                <m:t>K</m:t>
-                              </m:r>
-                            </m:sub>
-                            <m:sup>
-                              <m:box>
-                                <m:e>
-                                  <m:r>
-                                    <a:rPr sz="2150">
-                                      <a:solidFill>
-                                        <a:srgbClr val="1F2937"/>
-                                      </a:solidFill>
-                                    </a:rPr>
-                                    <m:rPr>
-                                      <m:sty m:val="p"/>
-                                    </m:rPr>
-                                    <m:t>(</m:t>
-                                  </m:r>
-                                  <m:r>
-                                    <a:rPr sz="2150">
-                                      <a:solidFill>
-                                        <a:srgbClr val="1F2937"/>
-                                      </a:solidFill>
-                                    </a:rPr>
-                                    <m:rPr>
-                                      <m:sty m:val="i"/>
-                                    </m:rPr>
-                                    <m:t>i</m:t>
-                                  </m:r>
-                                  <m:r>
-                                    <a:rPr sz="2150">
-                                      <a:solidFill>
-                                        <a:srgbClr val="1F2937"/>
-                                      </a:solidFill>
-                                    </a:rPr>
-                                    <m:rPr>
-                                      <m:sty m:val="p"/>
-                                    </m:rPr>
-                                    <m:t>)</m:t>
-                                  </m:r>
-                                </m:e>
-                              </m:box>
-                            </m:sup>
-                          </m:sSubSup>
-                          <m:r>
-                            <a:rPr sz="2150">
-                              <a:solidFill>
-                                <a:srgbClr val="1F2937"/>
-                              </a:solidFill>
-                            </a:rPr>
-                            <m:rPr>
-                              <m:sty m:val="p"/>
-                            </m:rPr>
-                            <m:t>·</m:t>
-                          </m:r>
-                          <m:sSub>
-                            <m:e>
-                              <m:r>
-                                <a:rPr sz="2150">
-                                  <a:solidFill>
-                                    <a:srgbClr val="1F2937"/>
-                                  </a:solidFill>
-                                </a:rPr>
-                                <m:rPr>
-                                  <m:sty m:val="i"/>
-                                </m:rPr>
-                                <m:t>τ</m:t>
-                              </m:r>
-                            </m:e>
-                            <m:sub>
-                              <m:r>
-                                <a:rPr sz="2150">
-                                  <a:solidFill>
-                                    <a:srgbClr val="1F2937"/>
-                                  </a:solidFill>
-                                </a:rPr>
-                                <m:rPr>
-                                  <m:sty m:val="i"/>
-                                </m:rPr>
-                                <m:t>θ</m:t>
-                              </m:r>
-                            </m:sub>
-                          </m:sSub>
-                          <m:r>
-                            <a:rPr sz="2150">
-                              <a:solidFill>
-                                <a:srgbClr val="1F2937"/>
-                              </a:solidFill>
-                            </a:rPr>
-                            <m:rPr>
-                              <m:sty m:val="p"/>
-                            </m:rPr>
-                            <m:t>(</m:t>
-                          </m:r>
-                          <m:r>
-                            <a:rPr sz="2150">
-                              <a:solidFill>
-                                <a:srgbClr val="1F2937"/>
-                              </a:solidFill>
-                            </a:rPr>
-                            <m:rPr>
-                              <m:sty m:val="i"/>
-                            </m:rPr>
-                            <m:t>y</m:t>
-                          </m:r>
-                          <m:r>
-                            <a:rPr sz="2150">
-                              <a:solidFill>
-                                <a:srgbClr val="1F2937"/>
-                              </a:solidFill>
-                            </a:rPr>
-                            <m:rPr>
-                              <m:sty m:val="p"/>
-                            </m:rPr>
-                            <m:t>)</m:t>
-                          </m:r>
-                          <m:r>
-                            <a:rPr sz="2150">
-                              <a:solidFill>
-                                <a:srgbClr val="1F2937"/>
-                              </a:solidFill>
-                            </a:rPr>
-                            <m:rPr>
-                              <m:sty m:val="p"/>
-                            </m:rPr>
-                            <m:t>,</m:t>
-                          </m:r>
-                          <m:r>
-                            <a:rPr sz="2150">
-                              <a:solidFill>
-                                <a:srgbClr val="1F2937"/>
-                              </a:solidFill>
-                            </a:rPr>
-                            <m:t/>
-                          </m:r>
-                          <m:r>
-                            <a:rPr sz="2150">
-                              <a:solidFill>
-                                <a:srgbClr val="1F2937"/>
-                              </a:solidFill>
-                            </a:rPr>
-                            <m:rPr>
-                              <m:sty m:val="i"/>
-                            </m:rPr>
-                            <m:t>V</m:t>
-                          </m:r>
-                          <m:r>
-                            <a:rPr sz="2150">
-                              <a:solidFill>
-                                <a:srgbClr val="1F2937"/>
-                              </a:solidFill>
-                            </a:rPr>
-                            <m:rPr>
-                              <m:sty m:val="p"/>
-                            </m:rPr>
-                            <m:t>=</m:t>
-                          </m:r>
-                          <m:sSubSup>
-                            <m:e>
-                              <m:r>
-                                <a:rPr sz="2150">
-                                  <a:solidFill>
-                                    <a:srgbClr val="1F2937"/>
-                                  </a:solidFill>
-                                </a:rPr>
-                                <m:rPr>
-                                  <m:sty m:val="i"/>
-                                </m:rPr>
-                                <m:t>W</m:t>
-                              </m:r>
-                            </m:e>
-                            <m:sub>
-                              <m:r>
-                                <a:rPr sz="2150">
-                                  <a:solidFill>
-                                    <a:srgbClr val="1F2937"/>
-                                  </a:solidFill>
-                                </a:rPr>
-                                <m:rPr>
-                                  <m:sty m:val="i"/>
-                                </m:rPr>
-                                <m:t>V</m:t>
-                              </m:r>
-                            </m:sub>
-                            <m:sup>
-                              <m:box>
-                                <m:e>
-                                  <m:r>
-                                    <a:rPr sz="2150">
-                                      <a:solidFill>
-                                        <a:srgbClr val="1F2937"/>
-                                      </a:solidFill>
-                                    </a:rPr>
-                                    <m:rPr>
-                                      <m:sty m:val="p"/>
-                                    </m:rPr>
-                                    <m:t>(</m:t>
-                                  </m:r>
-                                  <m:r>
-                                    <a:rPr sz="2150">
-                                      <a:solidFill>
-                                        <a:srgbClr val="1F2937"/>
-                                      </a:solidFill>
-                                    </a:rPr>
-                                    <m:rPr>
-                                      <m:sty m:val="i"/>
-                                    </m:rPr>
-                                    <m:t>i</m:t>
-                                  </m:r>
-                                  <m:r>
-                                    <a:rPr sz="2150">
-                                      <a:solidFill>
-                                        <a:srgbClr val="1F2937"/>
-                                      </a:solidFill>
-                                    </a:rPr>
-                                    <m:rPr>
-                                      <m:sty m:val="p"/>
-                                    </m:rPr>
-                                    <m:t>)</m:t>
-                                  </m:r>
-                                </m:e>
-                              </m:box>
-                            </m:sup>
-                          </m:sSubSup>
-                          <m:r>
-                            <a:rPr sz="2150">
-                              <a:solidFill>
-                                <a:srgbClr val="1F2937"/>
-                              </a:solidFill>
-                            </a:rPr>
-                            <m:rPr>
-                              <m:sty m:val="p"/>
-                            </m:rPr>
-                            <m:t>·</m:t>
-                          </m:r>
-                          <m:sSub>
-                            <m:e>
-                              <m:r>
-                                <a:rPr sz="2150">
-                                  <a:solidFill>
-                                    <a:srgbClr val="1F2937"/>
-                                  </a:solidFill>
-                                </a:rPr>
-                                <m:rPr>
-                                  <m:sty m:val="i"/>
-                                </m:rPr>
-                                <m:t>τ</m:t>
-                              </m:r>
-                            </m:e>
-                            <m:sub>
-                              <m:r>
-                                <a:rPr sz="2150">
-                                  <a:solidFill>
-                                    <a:srgbClr val="1F2937"/>
-                                  </a:solidFill>
-                                </a:rPr>
-                                <m:rPr>
-                                  <m:sty m:val="i"/>
-                                </m:rPr>
-                                <m:t>θ</m:t>
-                              </m:r>
-                            </m:sub>
-                          </m:sSub>
-                          <m:r>
-                            <a:rPr sz="2150">
-                              <a:solidFill>
-                                <a:srgbClr val="1F2937"/>
-                              </a:solidFill>
-                            </a:rPr>
-                            <m:rPr>
-                              <m:sty m:val="p"/>
-                            </m:rPr>
-                            <m:t>(</m:t>
-                          </m:r>
-                          <m:r>
-                            <a:rPr sz="2150">
-                              <a:solidFill>
-                                <a:srgbClr val="1F2937"/>
-                              </a:solidFill>
-                            </a:rPr>
-                            <m:rPr>
-                              <m:sty m:val="i"/>
-                            </m:rPr>
-                            <m:t>y</m:t>
-                          </m:r>
-                          <m:r>
-                            <a:rPr sz="2150">
-                              <a:solidFill>
-                                <a:srgbClr val="1F2937"/>
-                              </a:solidFill>
-                            </a:rPr>
-                            <m:rPr>
-                              <m:sty m:val="p"/>
-                            </m:rPr>
-                            <m:t>)</m:t>
-                          </m:r>
-                        </m:e>
-                      </m:box>
-                    </m:oMath>
-                  </m:oMathPara>
-                </a14:m>
-              </mc:Choice>
-              <mc:Fallback>
-                <a:r>
-                  <a:t>Q = W_Q phi_i(z_t), K = W_K tau_theta(y), V = W_V tau_theta(y)</a:t>
-                </a:r>
-              </mc:Fallback>
-            </mc:AlternateContent>
-            <a:endParaRPr lang="zh-CN"/>
           </a:p>
         </p:txBody>
       </p:sp>

--- a/项目/学习项目/研究生阶段/多任务成像/组会汇报/LDM论文组会汇报-2026-09-20.pptx
+++ b/项目/学习项目/研究生阶段/多任务成像/组会汇报/LDM论文组会汇报-2026-09-20.pptx
@@ -1519,7 +1519,7 @@
           <a:p>
             <a:r>
               <a:rPr lang="en-US" dirty="0"/>
-              <a:t>对着图讲：左边下采样提语义，右边上采样还分辨率，橙色虚线是跳跃连接——把编码端未压缩的细节直接接到解码端同级，这是 U 字形精髓。t 的正弦嵌入让同一网络处理 1000 种噪声水平，而不是训 1000 个网络。LDM 的 ε_θ 就是这个 U-Net 加条件注入。</a:t>
+              <a:t>对着图从左往右讲：输入 x_t 和 t 进来，先走编码器三级（分辨率 512→256→128，通道 32→64→128 翻倍，语义逐级抽象），到瓶颈层（64²、256 通道、加 self-attention），再走解码器三级反过来，输出与输入同尺寸的 ε̂。两条要重点讲：橙色虚线是跳跃连接——同级特征绕过瓶颈直通解码端，细节不用挤过 64² 的窄口，梯度也顺着短路回流；t 的嵌入逐块注入——同一个网络靠 t 区分 1000 种噪声水平，而不是训 1000 个网络。self-attention 只放在低分辨率层的原因：那里 token 少、注意力的平方开销付得起，而长程依赖恰好在最深处最需要。右侧四张卡各一句带过即可。</a:t>
             </a:r>
             <a:endParaRPr lang="en-US" dirty="0"/>
           </a:p>
@@ -4599,7 +4599,7 @@
           <a:p>
             <a:r>
               <a:rPr lang="en-US" dirty="0"/>
-              <a:t>一页总结五点。如果时间不够，这页就是压缩版汇报。</a:t>
+              <a:t>总结页讲法（约 2 分钟）：先念深色带里的核心论断（30 秒，这是全场唯一必须记住的一句话）；然后五行各 15–20 秒——每行都是「要点名 + 一句直述 + 右侧关键数字」，数字是前面实验部分出现过的，这里只做回收不重新论证；最后念遗产条收束，直接翻到启发部分。若时间不够，只讲核心论断 + 第 1、3 两行 + 遗产条即可（约 1 分钟压缩版）。</a:t>
             </a:r>
             <a:endParaRPr lang="en-US" dirty="0"/>
           </a:p>
@@ -10291,7 +10291,7 @@
                 <a:ea typeface="微软雅黑" pitchFamily="34" charset="-122"/>
                 <a:cs typeface="微软雅黑" pitchFamily="34" charset="-120"/>
               </a:rPr>
-              <a:t>去噪网络 U-Net：细节与语义的立交桥</a:t>
+              <a:t>去噪网络 U-Net：结构与数据流</a:t>
             </a:r>
             <a:endParaRPr lang="en-US" sz="2800" dirty="0"/>
           </a:p>
@@ -10299,18 +10299,213 @@
       </p:sp>
       <p:sp>
         <p:nvSpPr>
-          <p:cNvPr id="4" name="Shape 2"/>
-          <p:cNvSpPr/>
-          <p:nvPr/>
-        </p:nvSpPr>
-        <p:spPr>
-          <a:xfrm>
-            <a:off x="868680" y="1508760"/>
-            <a:ext cx="1463040" cy="658368"/>
+          <p:cNvPr id="4" name="Text 2"/>
+          <p:cNvSpPr/>
+          <p:nvPr/>
+        </p:nvSpPr>
+        <p:spPr>
+          <a:xfrm>
+            <a:off x="365760" y="2276856"/>
+            <a:ext cx="603504" cy="256032"/>
+          </a:xfrm>
+          <a:prstGeom prst="rect">
+            <a:avLst/>
+          </a:prstGeom>
+          <a:noFill/>
+          <a:ln/>
+        </p:spPr>
+        <p:txBody>
+          <a:bodyPr wrap="square" lIns="0" tIns="0" rIns="0" bIns="0" rtlCol="0" anchor="ctr"/>
+          <a:lstStyle/>
+          <a:p>
+            <a:pPr algn="r" indent="0" marL="0">
+              <a:buNone/>
+            </a:pPr>
+            <a:r>
+              <a:rPr lang="en-US" sz="1050" dirty="0">
+                <a:solidFill>
+                  <a:srgbClr val="6B7280"/>
+                </a:solidFill>
+                <a:latin typeface="微软雅黑" pitchFamily="34" charset="0"/>
+                <a:ea typeface="微软雅黑" pitchFamily="34" charset="-122"/>
+                <a:cs typeface="微软雅黑" pitchFamily="34" charset="-120"/>
+              </a:rPr>
+              <a:t>512²</a:t>
+            </a:r>
+            <a:endParaRPr lang="en-US" sz="1050" dirty="0"/>
+          </a:p>
+        </p:txBody>
+      </p:sp>
+      <p:sp>
+        <p:nvSpPr>
+          <p:cNvPr id="5" name="Text 3"/>
+          <p:cNvSpPr/>
+          <p:nvPr/>
+        </p:nvSpPr>
+        <p:spPr>
+          <a:xfrm>
+            <a:off x="365760" y="3008376"/>
+            <a:ext cx="603504" cy="256032"/>
+          </a:xfrm>
+          <a:prstGeom prst="rect">
+            <a:avLst/>
+          </a:prstGeom>
+          <a:noFill/>
+          <a:ln/>
+        </p:spPr>
+        <p:txBody>
+          <a:bodyPr wrap="square" lIns="0" tIns="0" rIns="0" bIns="0" rtlCol="0" anchor="ctr"/>
+          <a:lstStyle/>
+          <a:p>
+            <a:pPr algn="r" indent="0" marL="0">
+              <a:buNone/>
+            </a:pPr>
+            <a:r>
+              <a:rPr lang="en-US" sz="1050" dirty="0">
+                <a:solidFill>
+                  <a:srgbClr val="6B7280"/>
+                </a:solidFill>
+                <a:latin typeface="微软雅黑" pitchFamily="34" charset="0"/>
+                <a:ea typeface="微软雅黑" pitchFamily="34" charset="-122"/>
+                <a:cs typeface="微软雅黑" pitchFamily="34" charset="-120"/>
+              </a:rPr>
+              <a:t>256²</a:t>
+            </a:r>
+            <a:endParaRPr lang="en-US" sz="1050" dirty="0"/>
+          </a:p>
+        </p:txBody>
+      </p:sp>
+      <p:sp>
+        <p:nvSpPr>
+          <p:cNvPr id="6" name="Text 4"/>
+          <p:cNvSpPr/>
+          <p:nvPr/>
+        </p:nvSpPr>
+        <p:spPr>
+          <a:xfrm>
+            <a:off x="365760" y="3739896"/>
+            <a:ext cx="603504" cy="256032"/>
+          </a:xfrm>
+          <a:prstGeom prst="rect">
+            <a:avLst/>
+          </a:prstGeom>
+          <a:noFill/>
+          <a:ln/>
+        </p:spPr>
+        <p:txBody>
+          <a:bodyPr wrap="square" lIns="0" tIns="0" rIns="0" bIns="0" rtlCol="0" anchor="ctr"/>
+          <a:lstStyle/>
+          <a:p>
+            <a:pPr algn="r" indent="0" marL="0">
+              <a:buNone/>
+            </a:pPr>
+            <a:r>
+              <a:rPr lang="en-US" sz="1050" dirty="0">
+                <a:solidFill>
+                  <a:srgbClr val="6B7280"/>
+                </a:solidFill>
+                <a:latin typeface="微软雅黑" pitchFamily="34" charset="0"/>
+                <a:ea typeface="微软雅黑" pitchFamily="34" charset="-122"/>
+                <a:cs typeface="微软雅黑" pitchFamily="34" charset="-120"/>
+              </a:rPr>
+              <a:t>128²</a:t>
+            </a:r>
+            <a:endParaRPr lang="en-US" sz="1050" dirty="0"/>
+          </a:p>
+        </p:txBody>
+      </p:sp>
+      <p:sp>
+        <p:nvSpPr>
+          <p:cNvPr id="7" name="Text 5"/>
+          <p:cNvSpPr/>
+          <p:nvPr/>
+        </p:nvSpPr>
+        <p:spPr>
+          <a:xfrm>
+            <a:off x="365760" y="4700016"/>
+            <a:ext cx="603504" cy="256032"/>
+          </a:xfrm>
+          <a:prstGeom prst="rect">
+            <a:avLst/>
+          </a:prstGeom>
+          <a:noFill/>
+          <a:ln/>
+        </p:spPr>
+        <p:txBody>
+          <a:bodyPr wrap="square" lIns="0" tIns="0" rIns="0" bIns="0" rtlCol="0" anchor="ctr"/>
+          <a:lstStyle/>
+          <a:p>
+            <a:pPr algn="r" indent="0" marL="0">
+              <a:buNone/>
+            </a:pPr>
+            <a:r>
+              <a:rPr lang="en-US" sz="1050" dirty="0">
+                <a:solidFill>
+                  <a:srgbClr val="6B7280"/>
+                </a:solidFill>
+                <a:latin typeface="微软雅黑" pitchFamily="34" charset="0"/>
+                <a:ea typeface="微软雅黑" pitchFamily="34" charset="-122"/>
+                <a:cs typeface="微软雅黑" pitchFamily="34" charset="-120"/>
+              </a:rPr>
+              <a:t>64²</a:t>
+            </a:r>
+            <a:endParaRPr lang="en-US" sz="1050" dirty="0"/>
+          </a:p>
+        </p:txBody>
+      </p:sp>
+      <p:sp>
+        <p:nvSpPr>
+          <p:cNvPr id="8" name="Text 6"/>
+          <p:cNvSpPr/>
+          <p:nvPr/>
+        </p:nvSpPr>
+        <p:spPr>
+          <a:xfrm>
+            <a:off x="274320" y="1874520"/>
+            <a:ext cx="713232" cy="256032"/>
+          </a:xfrm>
+          <a:prstGeom prst="rect">
+            <a:avLst/>
+          </a:prstGeom>
+          <a:noFill/>
+          <a:ln/>
+        </p:spPr>
+        <p:txBody>
+          <a:bodyPr wrap="square" lIns="0" tIns="0" rIns="0" bIns="0" rtlCol="0" anchor="ctr"/>
+          <a:lstStyle/>
+          <a:p>
+            <a:pPr algn="r" indent="0" marL="0">
+              <a:buNone/>
+            </a:pPr>
+            <a:r>
+              <a:rPr lang="en-US" sz="1050" b="1" dirty="0">
+                <a:solidFill>
+                  <a:srgbClr val="6B7280"/>
+                </a:solidFill>
+                <a:latin typeface="微软雅黑" pitchFamily="34" charset="0"/>
+                <a:ea typeface="微软雅黑" pitchFamily="34" charset="-122"/>
+                <a:cs typeface="微软雅黑" pitchFamily="34" charset="-120"/>
+              </a:rPr>
+              <a:t>分辨率</a:t>
+            </a:r>
+            <a:endParaRPr lang="en-US" sz="1050" dirty="0"/>
+          </a:p>
+        </p:txBody>
+      </p:sp>
+      <p:sp>
+        <p:nvSpPr>
+          <p:cNvPr id="9" name="Shape 7"/>
+          <p:cNvSpPr/>
+          <p:nvPr/>
+        </p:nvSpPr>
+        <p:spPr>
+          <a:xfrm>
+            <a:off x="1188720" y="1389888"/>
+            <a:ext cx="1600200" cy="457200"/>
           </a:xfrm>
           <a:prstGeom prst="roundRect">
             <a:avLst>
-              <a:gd name="adj" fmla="val 6944"/>
+              <a:gd name="adj" fmla="val 10000"/>
             </a:avLst>
           </a:prstGeom>
           <a:solidFill>
@@ -10326,14 +10521,14 @@
       </p:sp>
       <p:sp>
         <p:nvSpPr>
-          <p:cNvPr id="5" name="Text 3"/>
-          <p:cNvSpPr/>
-          <p:nvPr/>
-        </p:nvSpPr>
-        <p:spPr>
-          <a:xfrm>
-            <a:off x="923544" y="1508760"/>
-            <a:ext cx="1353312" cy="658368"/>
+          <p:cNvPr id="10" name="Text 8"/>
+          <p:cNvSpPr/>
+          <p:nvPr/>
+        </p:nvSpPr>
+        <p:spPr>
+          <a:xfrm>
+            <a:off x="1243584" y="1389888"/>
+            <a:ext cx="1490472" cy="457200"/>
           </a:xfrm>
           <a:prstGeom prst="rect">
             <a:avLst/>
@@ -10349,7 +10544,7 @@
               <a:buNone/>
             </a:pPr>
             <a:r>
-              <a:rPr lang="en-US" sz="1150" b="1" dirty="0">
+              <a:rPr lang="en-US" sz="1200" b="1" dirty="0">
                 <a:solidFill>
                   <a:srgbClr val="1F2937"/>
                 </a:solidFill>
@@ -10357,26 +10552,92 @@
                 <a:ea typeface="微软雅黑" pitchFamily="34" charset="-122"/>
                 <a:cs typeface="微软雅黑" pitchFamily="34" charset="-120"/>
               </a:rPr>
-              <a:t>输入 x_t, t</a:t>
-            </a:r>
-            <a:endParaRPr lang="en-US" sz="1150" dirty="0"/>
-          </a:p>
-        </p:txBody>
-      </p:sp>
-      <p:sp>
-        <p:nvSpPr>
-          <p:cNvPr id="6" name="Shape 4"/>
-          <p:cNvSpPr/>
-          <p:nvPr/>
-        </p:nvSpPr>
-        <p:spPr>
-          <a:xfrm>
-            <a:off x="868680" y="2395728"/>
-            <a:ext cx="1463040" cy="658368"/>
+              <a:t>输入  x_t, t</a:t>
+            </a:r>
+            <a:endParaRPr lang="en-US" sz="1200" dirty="0"/>
+          </a:p>
+        </p:txBody>
+      </p:sp>
+      <p:sp>
+        <p:nvSpPr>
+          <p:cNvPr id="11" name="Shape 9"/>
+          <p:cNvSpPr/>
+          <p:nvPr/>
+        </p:nvSpPr>
+        <p:spPr>
+          <a:xfrm>
+            <a:off x="5138928" y="1389888"/>
+            <a:ext cx="1737360" cy="457200"/>
           </a:xfrm>
           <a:prstGeom prst="roundRect">
             <a:avLst>
-              <a:gd name="adj" fmla="val 6944"/>
+              <a:gd name="adj" fmla="val 10000"/>
+            </a:avLst>
+          </a:prstGeom>
+          <a:solidFill>
+            <a:srgbClr val="EFEDF9"/>
+          </a:solidFill>
+          <a:ln w="15875">
+            <a:solidFill>
+              <a:srgbClr val="F59E0B"/>
+            </a:solidFill>
+            <a:prstDash val="solid"/>
+          </a:ln>
+        </p:spPr>
+      </p:sp>
+      <p:sp>
+        <p:nvSpPr>
+          <p:cNvPr id="12" name="Text 10"/>
+          <p:cNvSpPr/>
+          <p:nvPr/>
+        </p:nvSpPr>
+        <p:spPr>
+          <a:xfrm>
+            <a:off x="5193792" y="1389888"/>
+            <a:ext cx="1627632" cy="457200"/>
+          </a:xfrm>
+          <a:prstGeom prst="rect">
+            <a:avLst/>
+          </a:prstGeom>
+          <a:noFill/>
+          <a:ln/>
+        </p:spPr>
+        <p:txBody>
+          <a:bodyPr wrap="square" lIns="0" tIns="0" rIns="0" bIns="0" rtlCol="0" anchor="ctr"/>
+          <a:lstStyle/>
+          <a:p>
+            <a:pPr algn="ctr" indent="0" marL="0">
+              <a:buNone/>
+            </a:pPr>
+            <a:r>
+              <a:rPr lang="en-US" sz="1150" b="1" dirty="0">
+                <a:solidFill>
+                  <a:srgbClr val="1F2937"/>
+                </a:solidFill>
+                <a:latin typeface="微软雅黑" pitchFamily="34" charset="0"/>
+                <a:ea typeface="微软雅黑" pitchFamily="34" charset="-122"/>
+                <a:cs typeface="微软雅黑" pitchFamily="34" charset="-120"/>
+              </a:rPr>
+              <a:t>输出  ε̂（同尺寸）</a:t>
+            </a:r>
+            <a:endParaRPr lang="en-US" sz="1150" dirty="0"/>
+          </a:p>
+        </p:txBody>
+      </p:sp>
+      <p:sp>
+        <p:nvSpPr>
+          <p:cNvPr id="13" name="Shape 11"/>
+          <p:cNvSpPr/>
+          <p:nvPr/>
+        </p:nvSpPr>
+        <p:spPr>
+          <a:xfrm>
+            <a:off x="1188720" y="2121408"/>
+            <a:ext cx="1600200" cy="566928"/>
+          </a:xfrm>
+          <a:prstGeom prst="roundRect">
+            <a:avLst>
+              <a:gd name="adj" fmla="val 8065"/>
             </a:avLst>
           </a:prstGeom>
           <a:solidFill>
@@ -10384,7 +10645,7 @@
           </a:solidFill>
           <a:ln w="15875">
             <a:solidFill>
-              <a:srgbClr val="4C3FB1"/>
+              <a:srgbClr val="D9D5EF"/>
             </a:solidFill>
             <a:prstDash val="solid"/>
           </a:ln>
@@ -10392,14 +10653,14 @@
       </p:sp>
       <p:sp>
         <p:nvSpPr>
-          <p:cNvPr id="7" name="Text 5"/>
-          <p:cNvSpPr/>
-          <p:nvPr/>
-        </p:nvSpPr>
-        <p:spPr>
-          <a:xfrm>
-            <a:off x="923544" y="2395728"/>
-            <a:ext cx="1353312" cy="658368"/>
+          <p:cNvPr id="14" name="Text 12"/>
+          <p:cNvSpPr/>
+          <p:nvPr/>
+        </p:nvSpPr>
+        <p:spPr>
+          <a:xfrm>
+            <a:off x="1243584" y="2121408"/>
+            <a:ext cx="1490472" cy="566928"/>
           </a:xfrm>
           <a:prstGeom prst="rect">
             <a:avLst/>
@@ -10415,7 +10676,7 @@
               <a:buNone/>
             </a:pPr>
             <a:r>
-              <a:rPr lang="en-US" sz="1050" dirty="0">
+              <a:rPr lang="en-US" sz="1100" dirty="0">
                 <a:solidFill>
                   <a:srgbClr val="1F2937"/>
                 </a:solidFill>
@@ -10423,26 +10684,26 @@
                 <a:ea typeface="微软雅黑" pitchFamily="34" charset="-122"/>
                 <a:cs typeface="微软雅黑" pitchFamily="34" charset="-120"/>
               </a:rPr>
-              <a:t>编码器 · 降采样</a:t>
-            </a:r>
-            <a:endParaRPr lang="en-US" sz="1050" dirty="0"/>
-          </a:p>
-        </p:txBody>
-      </p:sp>
-      <p:sp>
-        <p:nvSpPr>
-          <p:cNvPr id="8" name="Shape 6"/>
-          <p:cNvSpPr/>
-          <p:nvPr/>
-        </p:nvSpPr>
-        <p:spPr>
-          <a:xfrm>
-            <a:off x="1143000" y="3246120"/>
-            <a:ext cx="1234440" cy="621792"/>
+              <a:t>残差块  32ch</a:t>
+            </a:r>
+            <a:endParaRPr lang="en-US" sz="1100" dirty="0"/>
+          </a:p>
+        </p:txBody>
+      </p:sp>
+      <p:sp>
+        <p:nvSpPr>
+          <p:cNvPr id="15" name="Shape 13"/>
+          <p:cNvSpPr/>
+          <p:nvPr/>
+        </p:nvSpPr>
+        <p:spPr>
+          <a:xfrm>
+            <a:off x="1463040" y="2852928"/>
+            <a:ext cx="1600200" cy="566928"/>
           </a:xfrm>
           <a:prstGeom prst="roundRect">
             <a:avLst>
-              <a:gd name="adj" fmla="val 7353"/>
+              <a:gd name="adj" fmla="val 8065"/>
             </a:avLst>
           </a:prstGeom>
           <a:solidFill>
@@ -10450,7 +10711,7 @@
           </a:solidFill>
           <a:ln w="15875">
             <a:solidFill>
-              <a:srgbClr val="4C3FB1"/>
+              <a:srgbClr val="D9D5EF"/>
             </a:solidFill>
             <a:prstDash val="solid"/>
           </a:ln>
@@ -10458,14 +10719,14 @@
       </p:sp>
       <p:sp>
         <p:nvSpPr>
-          <p:cNvPr id="9" name="Text 7"/>
-          <p:cNvSpPr/>
-          <p:nvPr/>
-        </p:nvSpPr>
-        <p:spPr>
-          <a:xfrm>
-            <a:off x="1197864" y="3246120"/>
-            <a:ext cx="1124712" cy="621792"/>
+          <p:cNvPr id="16" name="Text 14"/>
+          <p:cNvSpPr/>
+          <p:nvPr/>
+        </p:nvSpPr>
+        <p:spPr>
+          <a:xfrm>
+            <a:off x="1517904" y="2852928"/>
+            <a:ext cx="1490472" cy="566928"/>
           </a:xfrm>
           <a:prstGeom prst="rect">
             <a:avLst/>
@@ -10480,20 +10741,31 @@
             <a:pPr algn="ctr" indent="0" marL="0">
               <a:buNone/>
             </a:pPr>
-            <a:endParaRPr lang="en-US" sz="1050" dirty="0"/>
-          </a:p>
-        </p:txBody>
-      </p:sp>
-      <p:sp>
-        <p:nvSpPr>
-          <p:cNvPr id="10" name="Shape 8"/>
-          <p:cNvSpPr/>
-          <p:nvPr/>
-        </p:nvSpPr>
-        <p:spPr>
-          <a:xfrm>
-            <a:off x="1417320" y="4041648"/>
-            <a:ext cx="1024128" cy="566928"/>
+            <a:r>
+              <a:rPr lang="en-US" sz="1100" dirty="0">
+                <a:solidFill>
+                  <a:srgbClr val="1F2937"/>
+                </a:solidFill>
+                <a:latin typeface="微软雅黑" pitchFamily="34" charset="0"/>
+                <a:ea typeface="微软雅黑" pitchFamily="34" charset="-122"/>
+                <a:cs typeface="微软雅黑" pitchFamily="34" charset="-120"/>
+              </a:rPr>
+              <a:t>残差块  64ch</a:t>
+            </a:r>
+            <a:endParaRPr lang="en-US" sz="1100" dirty="0"/>
+          </a:p>
+        </p:txBody>
+      </p:sp>
+      <p:sp>
+        <p:nvSpPr>
+          <p:cNvPr id="17" name="Shape 15"/>
+          <p:cNvSpPr/>
+          <p:nvPr/>
+        </p:nvSpPr>
+        <p:spPr>
+          <a:xfrm>
+            <a:off x="1737360" y="3584448"/>
+            <a:ext cx="1600200" cy="566928"/>
           </a:xfrm>
           <a:prstGeom prst="roundRect">
             <a:avLst>
@@ -10505,7 +10777,7 @@
           </a:solidFill>
           <a:ln w="15875">
             <a:solidFill>
-              <a:srgbClr val="4C3FB1"/>
+              <a:srgbClr val="D9D5EF"/>
             </a:solidFill>
             <a:prstDash val="solid"/>
           </a:ln>
@@ -10513,14 +10785,14 @@
       </p:sp>
       <p:sp>
         <p:nvSpPr>
-          <p:cNvPr id="11" name="Text 9"/>
-          <p:cNvSpPr/>
-          <p:nvPr/>
-        </p:nvSpPr>
-        <p:spPr>
-          <a:xfrm>
-            <a:off x="1472184" y="4041648"/>
-            <a:ext cx="914400" cy="566928"/>
+          <p:cNvPr id="18" name="Text 16"/>
+          <p:cNvSpPr/>
+          <p:nvPr/>
+        </p:nvSpPr>
+        <p:spPr>
+          <a:xfrm>
+            <a:off x="1792224" y="3584448"/>
+            <a:ext cx="1490472" cy="566928"/>
           </a:xfrm>
           <a:prstGeom prst="rect">
             <a:avLst/>
@@ -10535,24 +10807,35 @@
             <a:pPr algn="ctr" indent="0" marL="0">
               <a:buNone/>
             </a:pPr>
-            <a:endParaRPr lang="en-US" sz="1050" dirty="0"/>
-          </a:p>
-        </p:txBody>
-      </p:sp>
-      <p:sp>
-        <p:nvSpPr>
-          <p:cNvPr id="12" name="Shape 10"/>
-          <p:cNvSpPr/>
-          <p:nvPr/>
-        </p:nvSpPr>
-        <p:spPr>
-          <a:xfrm>
-            <a:off x="5532120" y="2395728"/>
-            <a:ext cx="1463040" cy="658368"/>
+            <a:r>
+              <a:rPr lang="en-US" sz="1100" dirty="0">
+                <a:solidFill>
+                  <a:srgbClr val="1F2937"/>
+                </a:solidFill>
+                <a:latin typeface="微软雅黑" pitchFamily="34" charset="0"/>
+                <a:ea typeface="微软雅黑" pitchFamily="34" charset="-122"/>
+                <a:cs typeface="微软雅黑" pitchFamily="34" charset="-120"/>
+              </a:rPr>
+              <a:t>残差块  128ch</a:t>
+            </a:r>
+            <a:endParaRPr lang="en-US" sz="1100" dirty="0"/>
+          </a:p>
+        </p:txBody>
+      </p:sp>
+      <p:sp>
+        <p:nvSpPr>
+          <p:cNvPr id="19" name="Shape 17"/>
+          <p:cNvSpPr/>
+          <p:nvPr/>
+        </p:nvSpPr>
+        <p:spPr>
+          <a:xfrm>
+            <a:off x="5138928" y="2121408"/>
+            <a:ext cx="1737360" cy="566928"/>
           </a:xfrm>
           <a:prstGeom prst="roundRect">
             <a:avLst>
-              <a:gd name="adj" fmla="val 6944"/>
+              <a:gd name="adj" fmla="val 8065"/>
             </a:avLst>
           </a:prstGeom>
           <a:solidFill>
@@ -10568,14 +10851,14 @@
       </p:sp>
       <p:sp>
         <p:nvSpPr>
-          <p:cNvPr id="13" name="Text 11"/>
-          <p:cNvSpPr/>
-          <p:nvPr/>
-        </p:nvSpPr>
-        <p:spPr>
-          <a:xfrm>
-            <a:off x="5586984" y="2395728"/>
-            <a:ext cx="1353312" cy="658368"/>
+          <p:cNvPr id="20" name="Text 18"/>
+          <p:cNvSpPr/>
+          <p:nvPr/>
+        </p:nvSpPr>
+        <p:spPr>
+          <a:xfrm>
+            <a:off x="5193792" y="2121408"/>
+            <a:ext cx="1627632" cy="566928"/>
           </a:xfrm>
           <a:prstGeom prst="rect">
             <a:avLst/>
@@ -10591,7 +10874,7 @@
               <a:buNone/>
             </a:pPr>
             <a:r>
-              <a:rPr lang="en-US" sz="1050" dirty="0">
+              <a:rPr lang="en-US" sz="1100" dirty="0">
                 <a:solidFill>
                   <a:srgbClr val="1F2937"/>
                 </a:solidFill>
@@ -10599,26 +10882,26 @@
                 <a:ea typeface="微软雅黑" pitchFamily="34" charset="-122"/>
                 <a:cs typeface="微软雅黑" pitchFamily="34" charset="-120"/>
               </a:rPr>
-              <a:t>解码器 · 升采样</a:t>
-            </a:r>
-            <a:endParaRPr lang="en-US" sz="1050" dirty="0"/>
-          </a:p>
-        </p:txBody>
-      </p:sp>
-      <p:sp>
-        <p:nvSpPr>
-          <p:cNvPr id="14" name="Shape 12"/>
-          <p:cNvSpPr/>
-          <p:nvPr/>
-        </p:nvSpPr>
-        <p:spPr>
-          <a:xfrm>
-            <a:off x="5440680" y="3246120"/>
-            <a:ext cx="1234440" cy="621792"/>
+              <a:t>残差块  32ch</a:t>
+            </a:r>
+            <a:endParaRPr lang="en-US" sz="1100" dirty="0"/>
+          </a:p>
+        </p:txBody>
+      </p:sp>
+      <p:sp>
+        <p:nvSpPr>
+          <p:cNvPr id="21" name="Shape 19"/>
+          <p:cNvSpPr/>
+          <p:nvPr/>
+        </p:nvSpPr>
+        <p:spPr>
+          <a:xfrm>
+            <a:off x="4956048" y="2852928"/>
+            <a:ext cx="1737360" cy="566928"/>
           </a:xfrm>
           <a:prstGeom prst="roundRect">
             <a:avLst>
-              <a:gd name="adj" fmla="val 7353"/>
+              <a:gd name="adj" fmla="val 8065"/>
             </a:avLst>
           </a:prstGeom>
           <a:solidFill>
@@ -10634,14 +10917,14 @@
       </p:sp>
       <p:sp>
         <p:nvSpPr>
-          <p:cNvPr id="15" name="Text 13"/>
-          <p:cNvSpPr/>
-          <p:nvPr/>
-        </p:nvSpPr>
-        <p:spPr>
-          <a:xfrm>
-            <a:off x="5495544" y="3246120"/>
-            <a:ext cx="1124712" cy="621792"/>
+          <p:cNvPr id="22" name="Text 20"/>
+          <p:cNvSpPr/>
+          <p:nvPr/>
+        </p:nvSpPr>
+        <p:spPr>
+          <a:xfrm>
+            <a:off x="5010912" y="2852928"/>
+            <a:ext cx="1627632" cy="566928"/>
           </a:xfrm>
           <a:prstGeom prst="rect">
             <a:avLst/>
@@ -10656,20 +10939,31 @@
             <a:pPr algn="ctr" indent="0" marL="0">
               <a:buNone/>
             </a:pPr>
-            <a:endParaRPr lang="en-US" sz="1050" dirty="0"/>
-          </a:p>
-        </p:txBody>
-      </p:sp>
-      <p:sp>
-        <p:nvSpPr>
-          <p:cNvPr id="16" name="Shape 14"/>
-          <p:cNvSpPr/>
-          <p:nvPr/>
-        </p:nvSpPr>
-        <p:spPr>
-          <a:xfrm>
-            <a:off x="5422392" y="4041648"/>
-            <a:ext cx="1024128" cy="566928"/>
+            <a:r>
+              <a:rPr lang="en-US" sz="1100" dirty="0">
+                <a:solidFill>
+                  <a:srgbClr val="1F2937"/>
+                </a:solidFill>
+                <a:latin typeface="微软雅黑" pitchFamily="34" charset="0"/>
+                <a:ea typeface="微软雅黑" pitchFamily="34" charset="-122"/>
+                <a:cs typeface="微软雅黑" pitchFamily="34" charset="-120"/>
+              </a:rPr>
+              <a:t>残差块  64ch</a:t>
+            </a:r>
+            <a:endParaRPr lang="en-US" sz="1100" dirty="0"/>
+          </a:p>
+        </p:txBody>
+      </p:sp>
+      <p:sp>
+        <p:nvSpPr>
+          <p:cNvPr id="23" name="Shape 21"/>
+          <p:cNvSpPr/>
+          <p:nvPr/>
+        </p:nvSpPr>
+        <p:spPr>
+          <a:xfrm>
+            <a:off x="4681728" y="3584448"/>
+            <a:ext cx="1737360" cy="566928"/>
           </a:xfrm>
           <a:prstGeom prst="roundRect">
             <a:avLst>
@@ -10689,14 +10983,14 @@
       </p:sp>
       <p:sp>
         <p:nvSpPr>
-          <p:cNvPr id="17" name="Text 15"/>
-          <p:cNvSpPr/>
-          <p:nvPr/>
-        </p:nvSpPr>
-        <p:spPr>
-          <a:xfrm>
-            <a:off x="5477256" y="4041648"/>
-            <a:ext cx="914400" cy="566928"/>
+          <p:cNvPr id="24" name="Text 22"/>
+          <p:cNvSpPr/>
+          <p:nvPr/>
+        </p:nvSpPr>
+        <p:spPr>
+          <a:xfrm>
+            <a:off x="4736592" y="3584448"/>
+            <a:ext cx="1627632" cy="566928"/>
           </a:xfrm>
           <a:prstGeom prst="rect">
             <a:avLst/>
@@ -10711,24 +11005,35 @@
             <a:pPr algn="ctr" indent="0" marL="0">
               <a:buNone/>
             </a:pPr>
-            <a:endParaRPr lang="en-US" sz="1050" dirty="0"/>
-          </a:p>
-        </p:txBody>
-      </p:sp>
-      <p:sp>
-        <p:nvSpPr>
-          <p:cNvPr id="18" name="Shape 16"/>
-          <p:cNvSpPr/>
-          <p:nvPr/>
-        </p:nvSpPr>
-        <p:spPr>
-          <a:xfrm>
-            <a:off x="2880360" y="4041648"/>
-            <a:ext cx="2103120" cy="566928"/>
+            <a:r>
+              <a:rPr lang="en-US" sz="1100" dirty="0">
+                <a:solidFill>
+                  <a:srgbClr val="1F2937"/>
+                </a:solidFill>
+                <a:latin typeface="微软雅黑" pitchFamily="34" charset="0"/>
+                <a:ea typeface="微软雅黑" pitchFamily="34" charset="-122"/>
+                <a:cs typeface="微软雅黑" pitchFamily="34" charset="-120"/>
+              </a:rPr>
+              <a:t>残差块  128ch</a:t>
+            </a:r>
+            <a:endParaRPr lang="en-US" sz="1100" dirty="0"/>
+          </a:p>
+        </p:txBody>
+      </p:sp>
+      <p:sp>
+        <p:nvSpPr>
+          <p:cNvPr id="25" name="Shape 23"/>
+          <p:cNvSpPr/>
+          <p:nvPr/>
+        </p:nvSpPr>
+        <p:spPr>
+          <a:xfrm>
+            <a:off x="2999232" y="4370832"/>
+            <a:ext cx="2103120" cy="621792"/>
           </a:xfrm>
           <a:prstGeom prst="roundRect">
             <a:avLst>
-              <a:gd name="adj" fmla="val 8065"/>
+              <a:gd name="adj" fmla="val 7353"/>
             </a:avLst>
           </a:prstGeom>
           <a:solidFill>
@@ -10744,14 +11049,14 @@
       </p:sp>
       <p:sp>
         <p:nvSpPr>
-          <p:cNvPr id="19" name="Text 17"/>
-          <p:cNvSpPr/>
-          <p:nvPr/>
-        </p:nvSpPr>
-        <p:spPr>
-          <a:xfrm>
-            <a:off x="2935224" y="4041648"/>
-            <a:ext cx="1993392" cy="566928"/>
+          <p:cNvPr id="26" name="Text 24"/>
+          <p:cNvSpPr/>
+          <p:nvPr/>
+        </p:nvSpPr>
+        <p:spPr>
+          <a:xfrm>
+            <a:off x="3054096" y="4370832"/>
+            <a:ext cx="1993392" cy="621792"/>
           </a:xfrm>
           <a:prstGeom prst="rect">
             <a:avLst/>
@@ -10775,7 +11080,7 @@
                 <a:ea typeface="微软雅黑" pitchFamily="34" charset="-122"/>
                 <a:cs typeface="微软雅黑" pitchFamily="34" charset="-120"/>
               </a:rPr>
-              <a:t>瓶颈层（分辨率最低）</a:t>
+              <a:t>瓶颈层  256ch ＋ self-attn</a:t>
             </a:r>
             <a:endParaRPr lang="en-US" sz="1100" dirty="0"/>
           </a:p>
@@ -10783,14 +11088,14 @@
       </p:sp>
       <p:sp>
         <p:nvSpPr>
-          <p:cNvPr id="20" name="Shape 18"/>
-          <p:cNvSpPr/>
-          <p:nvPr/>
-        </p:nvSpPr>
-        <p:spPr>
-          <a:xfrm>
-            <a:off x="1600200" y="2194560"/>
-            <a:ext cx="0" cy="173736"/>
+          <p:cNvPr id="27" name="Shape 25"/>
+          <p:cNvSpPr/>
+          <p:nvPr/>
+        </p:nvSpPr>
+        <p:spPr>
+          <a:xfrm>
+            <a:off x="1993392" y="1865376"/>
+            <a:ext cx="0" cy="228600"/>
           </a:xfrm>
           <a:prstGeom prst="line">
             <a:avLst/>
@@ -10798,7 +11103,7 @@
           <a:noFill/>
           <a:ln w="27940">
             <a:solidFill>
-              <a:srgbClr val="9D97C9"/>
+              <a:srgbClr val="6B7280"/>
             </a:solidFill>
             <a:prstDash val="solid"/>
             <a:tailEnd type="triangle"/>
@@ -10807,14 +11112,14 @@
       </p:sp>
       <p:sp>
         <p:nvSpPr>
-          <p:cNvPr id="21" name="Shape 19"/>
-          <p:cNvSpPr/>
-          <p:nvPr/>
-        </p:nvSpPr>
-        <p:spPr>
-          <a:xfrm>
-            <a:off x="1691640" y="3081528"/>
-            <a:ext cx="0" cy="146304"/>
+          <p:cNvPr id="28" name="Shape 26"/>
+          <p:cNvSpPr/>
+          <p:nvPr/>
+        </p:nvSpPr>
+        <p:spPr>
+          <a:xfrm>
+            <a:off x="2011680" y="2706624"/>
+            <a:ext cx="0" cy="118872"/>
           </a:xfrm>
           <a:prstGeom prst="line">
             <a:avLst/>
@@ -10822,7 +11127,7 @@
           <a:noFill/>
           <a:ln w="27940">
             <a:solidFill>
-              <a:srgbClr val="9D97C9"/>
+              <a:srgbClr val="6B7280"/>
             </a:solidFill>
             <a:prstDash val="solid"/>
             <a:tailEnd type="triangle"/>
@@ -10831,14 +11136,14 @@
       </p:sp>
       <p:sp>
         <p:nvSpPr>
-          <p:cNvPr id="22" name="Shape 20"/>
-          <p:cNvSpPr/>
-          <p:nvPr/>
-        </p:nvSpPr>
-        <p:spPr>
-          <a:xfrm>
-            <a:off x="1810512" y="3895344"/>
-            <a:ext cx="0" cy="128016"/>
+          <p:cNvPr id="29" name="Shape 27"/>
+          <p:cNvSpPr/>
+          <p:nvPr/>
+        </p:nvSpPr>
+        <p:spPr>
+          <a:xfrm>
+            <a:off x="2286000" y="3438144"/>
+            <a:ext cx="0" cy="118872"/>
           </a:xfrm>
           <a:prstGeom prst="line">
             <a:avLst/>
@@ -10846,7 +11151,7 @@
           <a:noFill/>
           <a:ln w="27940">
             <a:solidFill>
-              <a:srgbClr val="9D97C9"/>
+              <a:srgbClr val="6B7280"/>
             </a:solidFill>
             <a:prstDash val="solid"/>
             <a:tailEnd type="triangle"/>
@@ -10855,14 +11160,14 @@
       </p:sp>
       <p:sp>
         <p:nvSpPr>
-          <p:cNvPr id="23" name="Shape 21"/>
-          <p:cNvSpPr/>
-          <p:nvPr/>
-        </p:nvSpPr>
-        <p:spPr>
-          <a:xfrm>
-            <a:off x="2468880" y="4325112"/>
-            <a:ext cx="384048" cy="0"/>
+          <p:cNvPr id="30" name="Shape 28"/>
+          <p:cNvSpPr/>
+          <p:nvPr/>
+        </p:nvSpPr>
+        <p:spPr>
+          <a:xfrm>
+            <a:off x="2697480" y="4178808"/>
+            <a:ext cx="365760" cy="164592"/>
           </a:xfrm>
           <a:prstGeom prst="line">
             <a:avLst/>
@@ -10870,7 +11175,7 @@
           <a:noFill/>
           <a:ln w="27940">
             <a:solidFill>
-              <a:srgbClr val="9D97C9"/>
+              <a:srgbClr val="6B7280"/>
             </a:solidFill>
             <a:prstDash val="solid"/>
             <a:tailEnd type="triangle"/>
@@ -10879,14 +11184,14 @@
       </p:sp>
       <p:sp>
         <p:nvSpPr>
-          <p:cNvPr id="24" name="Shape 22"/>
-          <p:cNvSpPr/>
-          <p:nvPr/>
-        </p:nvSpPr>
-        <p:spPr>
-          <a:xfrm>
-            <a:off x="5010912" y="4325112"/>
-            <a:ext cx="384048" cy="0"/>
+          <p:cNvPr id="31" name="Shape 29"/>
+          <p:cNvSpPr/>
+          <p:nvPr/>
+        </p:nvSpPr>
+        <p:spPr>
+          <a:xfrm flipV="1">
+            <a:off x="4956048" y="4160520"/>
+            <a:ext cx="320040" cy="182880"/>
           </a:xfrm>
           <a:prstGeom prst="line">
             <a:avLst/>
@@ -10894,7 +11199,7 @@
           <a:noFill/>
           <a:ln w="27940">
             <a:solidFill>
-              <a:srgbClr val="4C3FB1"/>
+              <a:srgbClr val="6B7280"/>
             </a:solidFill>
             <a:prstDash val="solid"/>
             <a:tailEnd type="triangle"/>
@@ -10903,14 +11208,14 @@
       </p:sp>
       <p:sp>
         <p:nvSpPr>
-          <p:cNvPr id="25" name="Shape 23"/>
+          <p:cNvPr id="32" name="Shape 30"/>
           <p:cNvSpPr/>
           <p:nvPr/>
         </p:nvSpPr>
         <p:spPr>
           <a:xfrm flipV="1">
-            <a:off x="5934456" y="3886200"/>
-            <a:ext cx="0" cy="137160"/>
+            <a:off x="5532120" y="3447288"/>
+            <a:ext cx="0" cy="118872"/>
           </a:xfrm>
           <a:prstGeom prst="line">
             <a:avLst/>
@@ -10918,7 +11223,7 @@
           <a:noFill/>
           <a:ln w="27940">
             <a:solidFill>
-              <a:srgbClr val="4C3FB1"/>
+              <a:srgbClr val="6B7280"/>
             </a:solidFill>
             <a:prstDash val="solid"/>
             <a:tailEnd type="triangle"/>
@@ -10927,14 +11232,14 @@
       </p:sp>
       <p:sp>
         <p:nvSpPr>
-          <p:cNvPr id="26" name="Shape 24"/>
+          <p:cNvPr id="33" name="Shape 31"/>
           <p:cNvSpPr/>
           <p:nvPr/>
         </p:nvSpPr>
         <p:spPr>
           <a:xfrm flipV="1">
-            <a:off x="6062472" y="3081528"/>
-            <a:ext cx="0" cy="146304"/>
+            <a:off x="5806440" y="2715768"/>
+            <a:ext cx="0" cy="118872"/>
           </a:xfrm>
           <a:prstGeom prst="line">
             <a:avLst/>
@@ -10942,7 +11247,7 @@
           <a:noFill/>
           <a:ln w="27940">
             <a:solidFill>
-              <a:srgbClr val="4C3FB1"/>
+              <a:srgbClr val="6B7280"/>
             </a:solidFill>
             <a:prstDash val="solid"/>
             <a:tailEnd type="triangle"/>
@@ -10951,14 +11256,14 @@
       </p:sp>
       <p:sp>
         <p:nvSpPr>
-          <p:cNvPr id="27" name="Shape 25"/>
+          <p:cNvPr id="34" name="Shape 32"/>
           <p:cNvSpPr/>
           <p:nvPr/>
         </p:nvSpPr>
         <p:spPr>
           <a:xfrm flipV="1">
-            <a:off x="6263640" y="2194560"/>
-            <a:ext cx="0" cy="182880"/>
+            <a:off x="6007608" y="1874520"/>
+            <a:ext cx="0" cy="228600"/>
           </a:xfrm>
           <a:prstGeom prst="line">
             <a:avLst/>
@@ -10966,7 +11271,7 @@
           <a:noFill/>
           <a:ln w="27940">
             <a:solidFill>
-              <a:srgbClr val="4C3FB1"/>
+              <a:srgbClr val="6B7280"/>
             </a:solidFill>
             <a:prstDash val="solid"/>
             <a:tailEnd type="triangle"/>
@@ -10975,14 +11280,14 @@
       </p:sp>
       <p:sp>
         <p:nvSpPr>
-          <p:cNvPr id="28" name="Shape 26"/>
-          <p:cNvSpPr/>
-          <p:nvPr/>
-        </p:nvSpPr>
-        <p:spPr>
-          <a:xfrm>
-            <a:off x="2331720" y="2724912"/>
-            <a:ext cx="3200400" cy="0"/>
+          <p:cNvPr id="35" name="Shape 33"/>
+          <p:cNvSpPr/>
+          <p:nvPr/>
+        </p:nvSpPr>
+        <p:spPr>
+          <a:xfrm>
+            <a:off x="2788920" y="2404872"/>
+            <a:ext cx="2350008" cy="0"/>
           </a:xfrm>
           <a:prstGeom prst="line">
             <a:avLst/>
@@ -10998,14 +11303,14 @@
       </p:sp>
       <p:sp>
         <p:nvSpPr>
-          <p:cNvPr id="29" name="Shape 27"/>
-          <p:cNvSpPr/>
-          <p:nvPr/>
-        </p:nvSpPr>
-        <p:spPr>
-          <a:xfrm>
-            <a:off x="2377440" y="3557016"/>
-            <a:ext cx="3063240" cy="0"/>
+          <p:cNvPr id="36" name="Shape 34"/>
+          <p:cNvSpPr/>
+          <p:nvPr/>
+        </p:nvSpPr>
+        <p:spPr>
+          <a:xfrm>
+            <a:off x="3063240" y="3136392"/>
+            <a:ext cx="1892808" cy="0"/>
           </a:xfrm>
           <a:prstGeom prst="line">
             <a:avLst/>
@@ -11021,14 +11326,14 @@
       </p:sp>
       <p:sp>
         <p:nvSpPr>
-          <p:cNvPr id="30" name="Shape 28"/>
-          <p:cNvSpPr/>
-          <p:nvPr/>
-        </p:nvSpPr>
-        <p:spPr>
-          <a:xfrm>
-            <a:off x="2441448" y="3977640"/>
-            <a:ext cx="2980944" cy="0"/>
+          <p:cNvPr id="37" name="Shape 35"/>
+          <p:cNvSpPr/>
+          <p:nvPr/>
+        </p:nvSpPr>
+        <p:spPr>
+          <a:xfrm>
+            <a:off x="3337560" y="3867912"/>
+            <a:ext cx="1344168" cy="0"/>
           </a:xfrm>
           <a:prstGeom prst="line">
             <a:avLst/>
@@ -11044,14 +11349,14 @@
       </p:sp>
       <p:sp>
         <p:nvSpPr>
-          <p:cNvPr id="31" name="Text 29"/>
-          <p:cNvSpPr/>
-          <p:nvPr/>
-        </p:nvSpPr>
-        <p:spPr>
-          <a:xfrm>
-            <a:off x="2926080" y="1847088"/>
-            <a:ext cx="2377440" cy="274320"/>
+          <p:cNvPr id="38" name="Text 36"/>
+          <p:cNvSpPr/>
+          <p:nvPr/>
+        </p:nvSpPr>
+        <p:spPr>
+          <a:xfrm>
+            <a:off x="3566160" y="2121408"/>
+            <a:ext cx="1188720" cy="256032"/>
           </a:xfrm>
           <a:prstGeom prst="rect">
             <a:avLst/>
@@ -11063,11 +11368,11 @@
           <a:bodyPr wrap="square" lIns="0" tIns="0" rIns="0" bIns="0" rtlCol="0" anchor="ctr"/>
           <a:lstStyle/>
           <a:p>
-            <a:pPr algn="ctr" indent="0" marL="0">
+            <a:pPr indent="0" marL="0">
               <a:buNone/>
             </a:pPr>
             <a:r>
-              <a:rPr lang="en-US" sz="1150" b="1" dirty="0">
+              <a:rPr lang="en-US" sz="1100" b="1" dirty="0">
                 <a:solidFill>
                   <a:srgbClr val="F59E0B"/>
                 </a:solidFill>
@@ -11075,7 +11380,158 @@
                 <a:ea typeface="微软雅黑" pitchFamily="34" charset="-122"/>
                 <a:cs typeface="微软雅黑" pitchFamily="34" charset="-120"/>
               </a:rPr>
-              <a:t>跳跃连接（skip）</a:t>
+              <a:t>跳跃连接</a:t>
+            </a:r>
+            <a:endParaRPr lang="en-US" sz="1100" dirty="0"/>
+          </a:p>
+        </p:txBody>
+      </p:sp>
+      <p:sp>
+        <p:nvSpPr>
+          <p:cNvPr id="39" name="Text 37"/>
+          <p:cNvSpPr/>
+          <p:nvPr/>
+        </p:nvSpPr>
+        <p:spPr>
+          <a:xfrm>
+            <a:off x="1188720" y="5138928"/>
+            <a:ext cx="2194560" cy="502920"/>
+          </a:xfrm>
+          <a:prstGeom prst="rect">
+            <a:avLst/>
+          </a:prstGeom>
+          <a:noFill/>
+          <a:ln/>
+        </p:spPr>
+        <p:txBody>
+          <a:bodyPr wrap="square" lIns="0" tIns="0" rIns="0" bIns="0" rtlCol="0" anchor="ctr"/>
+          <a:lstStyle/>
+          <a:p>
+            <a:pPr indent="0" marL="0">
+              <a:buNone/>
+            </a:pPr>
+            <a:r>
+              <a:rPr lang="en-US" sz="1050" dirty="0">
+                <a:solidFill>
+                  <a:srgbClr val="6B7280"/>
+                </a:solidFill>
+                <a:latin typeface="微软雅黑" pitchFamily="34" charset="0"/>
+                <a:ea typeface="微软雅黑" pitchFamily="34" charset="-122"/>
+                <a:cs typeface="微软雅黑" pitchFamily="34" charset="-120"/>
+              </a:rPr>
+              <a:t>编码器：降采样，通道翻倍</a:t>
+            </a:r>
+            <a:endParaRPr lang="en-US" sz="1050" dirty="0"/>
+          </a:p>
+          <a:p>
+            <a:pPr indent="0" marL="0">
+              <a:buNone/>
+            </a:pPr>
+            <a:r>
+              <a:rPr lang="en-US" sz="1050" dirty="0">
+                <a:solidFill>
+                  <a:srgbClr val="6B7280"/>
+                </a:solidFill>
+                <a:latin typeface="微软雅黑" pitchFamily="34" charset="0"/>
+                <a:ea typeface="微软雅黑" pitchFamily="34" charset="-122"/>
+                <a:cs typeface="微软雅黑" pitchFamily="34" charset="-120"/>
+              </a:rPr>
+              <a:t>逐级提取语义</a:t>
+            </a:r>
+            <a:endParaRPr lang="en-US" sz="1050" dirty="0"/>
+          </a:p>
+        </p:txBody>
+      </p:sp>
+      <p:sp>
+        <p:nvSpPr>
+          <p:cNvPr id="40" name="Text 38"/>
+          <p:cNvSpPr/>
+          <p:nvPr/>
+        </p:nvSpPr>
+        <p:spPr>
+          <a:xfrm>
+            <a:off x="4681728" y="5138928"/>
+            <a:ext cx="2194560" cy="502920"/>
+          </a:xfrm>
+          <a:prstGeom prst="rect">
+            <a:avLst/>
+          </a:prstGeom>
+          <a:noFill/>
+          <a:ln/>
+        </p:spPr>
+        <p:txBody>
+          <a:bodyPr wrap="square" lIns="0" tIns="0" rIns="0" bIns="0" rtlCol="0" anchor="ctr"/>
+          <a:lstStyle/>
+          <a:p>
+            <a:pPr indent="0" marL="0">
+              <a:buNone/>
+            </a:pPr>
+            <a:r>
+              <a:rPr lang="en-US" sz="1050" dirty="0">
+                <a:solidFill>
+                  <a:srgbClr val="6B7280"/>
+                </a:solidFill>
+                <a:latin typeface="微软雅黑" pitchFamily="34" charset="0"/>
+                <a:ea typeface="微软雅黑" pitchFamily="34" charset="-122"/>
+                <a:cs typeface="微软雅黑" pitchFamily="34" charset="-120"/>
+              </a:rPr>
+              <a:t>解码器：上采样</a:t>
+            </a:r>
+            <a:endParaRPr lang="en-US" sz="1050" dirty="0"/>
+          </a:p>
+          <a:p>
+            <a:pPr indent="0" marL="0">
+              <a:buNone/>
+            </a:pPr>
+            <a:r>
+              <a:rPr lang="en-US" sz="1050" dirty="0">
+                <a:solidFill>
+                  <a:srgbClr val="6B7280"/>
+                </a:solidFill>
+                <a:latin typeface="微软雅黑" pitchFamily="34" charset="0"/>
+                <a:ea typeface="微软雅黑" pitchFamily="34" charset="-122"/>
+                <a:cs typeface="微软雅黑" pitchFamily="34" charset="-120"/>
+              </a:rPr>
+              <a:t>逐级恢复空间细节</a:t>
+            </a:r>
+            <a:endParaRPr lang="en-US" sz="1050" dirty="0"/>
+          </a:p>
+        </p:txBody>
+      </p:sp>
+      <p:sp>
+        <p:nvSpPr>
+          <p:cNvPr id="41" name="Text 39"/>
+          <p:cNvSpPr/>
+          <p:nvPr/>
+        </p:nvSpPr>
+        <p:spPr>
+          <a:xfrm>
+            <a:off x="1188720" y="5742432"/>
+            <a:ext cx="5943600" cy="274320"/>
+          </a:xfrm>
+          <a:prstGeom prst="rect">
+            <a:avLst/>
+          </a:prstGeom>
+          <a:noFill/>
+          <a:ln/>
+        </p:spPr>
+        <p:txBody>
+          <a:bodyPr wrap="square" lIns="0" tIns="0" rIns="0" bIns="0" rtlCol="0" anchor="ctr"/>
+          <a:lstStyle/>
+          <a:p>
+            <a:pPr indent="0" marL="0">
+              <a:buNone/>
+            </a:pPr>
+            <a:r>
+              <a:rPr lang="en-US" sz="1150" dirty="0">
+                <a:solidFill>
+                  <a:srgbClr val="6B7280"/>
+                </a:solidFill>
+                <a:latin typeface="微软雅黑" pitchFamily="34" charset="0"/>
+                <a:ea typeface="微软雅黑" pitchFamily="34" charset="-122"/>
+                <a:cs typeface="微软雅黑" pitchFamily="34" charset="-120"/>
+              </a:rPr>
+              <a:t>t：正弦位置编码 → MLP → 逐块注入残差块；以 512² 输入为例，通道数为示意</a:t>
             </a:r>
             <a:endParaRPr lang="en-US" sz="1150" dirty="0"/>
           </a:p>
@@ -11083,26 +11539,26 @@
       </p:sp>
       <p:sp>
         <p:nvSpPr>
-          <p:cNvPr id="32" name="Shape 30"/>
-          <p:cNvSpPr/>
-          <p:nvPr/>
-        </p:nvSpPr>
-        <p:spPr>
-          <a:xfrm>
-            <a:off x="5532120" y="1508760"/>
-            <a:ext cx="1463040" cy="658368"/>
+          <p:cNvPr id="42" name="Shape 40"/>
+          <p:cNvSpPr/>
+          <p:nvPr/>
+        </p:nvSpPr>
+        <p:spPr>
+          <a:xfrm>
+            <a:off x="7360920" y="1389888"/>
+            <a:ext cx="4389120" cy="969264"/>
           </a:xfrm>
           <a:prstGeom prst="roundRect">
             <a:avLst>
-              <a:gd name="adj" fmla="val 6944"/>
+              <a:gd name="adj" fmla="val 5660"/>
             </a:avLst>
           </a:prstGeom>
           <a:solidFill>
             <a:srgbClr val="EFEDF9"/>
           </a:solidFill>
-          <a:ln w="15875">
+          <a:ln w="9525">
             <a:solidFill>
-              <a:srgbClr val="F59E0B"/>
+              <a:srgbClr val="D9D5EF"/>
             </a:solidFill>
             <a:prstDash val="solid"/>
           </a:ln>
@@ -11110,14 +11566,14 @@
       </p:sp>
       <p:sp>
         <p:nvSpPr>
-          <p:cNvPr id="33" name="Text 31"/>
-          <p:cNvSpPr/>
-          <p:nvPr/>
-        </p:nvSpPr>
-        <p:spPr>
-          <a:xfrm>
-            <a:off x="5586984" y="1508760"/>
-            <a:ext cx="1353312" cy="658368"/>
+          <p:cNvPr id="43" name="Text 41"/>
+          <p:cNvSpPr/>
+          <p:nvPr/>
+        </p:nvSpPr>
+        <p:spPr>
+          <a:xfrm>
+            <a:off x="7543800" y="1463040"/>
+            <a:ext cx="4023360" cy="292608"/>
           </a:xfrm>
           <a:prstGeom prst="rect">
             <a:avLst/>
@@ -11129,11 +11585,50 @@
           <a:bodyPr wrap="square" lIns="0" tIns="0" rIns="0" bIns="0" rtlCol="0" anchor="ctr"/>
           <a:lstStyle/>
           <a:p>
-            <a:pPr algn="ctr" indent="0" marL="0">
+            <a:pPr indent="0" marL="0">
               <a:buNone/>
             </a:pPr>
             <a:r>
-              <a:rPr lang="en-US" sz="1150" b="1" dirty="0">
+              <a:rPr lang="en-US" sz="1250" b="1" dirty="0">
+                <a:solidFill>
+                  <a:srgbClr val="372E8A"/>
+                </a:solidFill>
+                <a:latin typeface="微软雅黑" pitchFamily="34" charset="0"/>
+                <a:ea typeface="微软雅黑" pitchFamily="34" charset="-122"/>
+                <a:cs typeface="微软雅黑" pitchFamily="34" charset="-120"/>
+              </a:rPr>
+              <a:t>数据通路</a:t>
+            </a:r>
+            <a:endParaRPr lang="en-US" sz="1250" dirty="0"/>
+          </a:p>
+        </p:txBody>
+      </p:sp>
+      <p:sp>
+        <p:nvSpPr>
+          <p:cNvPr id="44" name="Text 42"/>
+          <p:cNvSpPr/>
+          <p:nvPr/>
+        </p:nvSpPr>
+        <p:spPr>
+          <a:xfrm>
+            <a:off x="7543800" y="1773936"/>
+            <a:ext cx="4023360" cy="530352"/>
+          </a:xfrm>
+          <a:prstGeom prst="rect">
+            <a:avLst/>
+          </a:prstGeom>
+          <a:noFill/>
+          <a:ln/>
+        </p:spPr>
+        <p:txBody>
+          <a:bodyPr wrap="square" lIns="0" tIns="0" rIns="0" bIns="0" rtlCol="0" anchor="t"/>
+          <a:lstStyle/>
+          <a:p>
+            <a:pPr indent="0" marL="0">
+              <a:buNone/>
+            </a:pPr>
+            <a:r>
+              <a:rPr lang="en-US" sz="1100" dirty="0">
                 <a:solidFill>
                   <a:srgbClr val="1F2937"/>
                 </a:solidFill>
@@ -11141,7 +11636,361 @@
                 <a:ea typeface="微软雅黑" pitchFamily="34" charset="-122"/>
                 <a:cs typeface="微软雅黑" pitchFamily="34" charset="-120"/>
               </a:rPr>
-              <a:t>输出 ε̂</a:t>
+              <a:t>编码器逐级降分辨率提取语义，瓶颈层最抽象；解码器逐级上采样恢复空间细节</a:t>
+            </a:r>
+            <a:endParaRPr lang="en-US" sz="1100" dirty="0"/>
+          </a:p>
+        </p:txBody>
+      </p:sp>
+      <p:sp>
+        <p:nvSpPr>
+          <p:cNvPr id="45" name="Shape 43"/>
+          <p:cNvSpPr/>
+          <p:nvPr/>
+        </p:nvSpPr>
+        <p:spPr>
+          <a:xfrm>
+            <a:off x="7360920" y="2487168"/>
+            <a:ext cx="4389120" cy="969264"/>
+          </a:xfrm>
+          <a:prstGeom prst="roundRect">
+            <a:avLst>
+              <a:gd name="adj" fmla="val 5660"/>
+            </a:avLst>
+          </a:prstGeom>
+          <a:solidFill>
+            <a:srgbClr val="EFEDF9"/>
+          </a:solidFill>
+          <a:ln w="9525">
+            <a:solidFill>
+              <a:srgbClr val="D9D5EF"/>
+            </a:solidFill>
+            <a:prstDash val="solid"/>
+          </a:ln>
+        </p:spPr>
+      </p:sp>
+      <p:sp>
+        <p:nvSpPr>
+          <p:cNvPr id="46" name="Text 44"/>
+          <p:cNvSpPr/>
+          <p:nvPr/>
+        </p:nvSpPr>
+        <p:spPr>
+          <a:xfrm>
+            <a:off x="7543800" y="2560320"/>
+            <a:ext cx="4023360" cy="292608"/>
+          </a:xfrm>
+          <a:prstGeom prst="rect">
+            <a:avLst/>
+          </a:prstGeom>
+          <a:noFill/>
+          <a:ln/>
+        </p:spPr>
+        <p:txBody>
+          <a:bodyPr wrap="square" lIns="0" tIns="0" rIns="0" bIns="0" rtlCol="0" anchor="ctr"/>
+          <a:lstStyle/>
+          <a:p>
+            <a:pPr indent="0" marL="0">
+              <a:buNone/>
+            </a:pPr>
+            <a:r>
+              <a:rPr lang="en-US" sz="1250" b="1" dirty="0">
+                <a:solidFill>
+                  <a:srgbClr val="372E8A"/>
+                </a:solidFill>
+                <a:latin typeface="微软雅黑" pitchFamily="34" charset="0"/>
+                <a:ea typeface="微软雅黑" pitchFamily="34" charset="-122"/>
+                <a:cs typeface="微软雅黑" pitchFamily="34" charset="-120"/>
+              </a:rPr>
+              <a:t>跳跃连接（橙色虚线）</a:t>
+            </a:r>
+            <a:endParaRPr lang="en-US" sz="1250" dirty="0"/>
+          </a:p>
+        </p:txBody>
+      </p:sp>
+      <p:sp>
+        <p:nvSpPr>
+          <p:cNvPr id="47" name="Text 45"/>
+          <p:cNvSpPr/>
+          <p:nvPr/>
+        </p:nvSpPr>
+        <p:spPr>
+          <a:xfrm>
+            <a:off x="7543800" y="2871216"/>
+            <a:ext cx="4023360" cy="530352"/>
+          </a:xfrm>
+          <a:prstGeom prst="rect">
+            <a:avLst/>
+          </a:prstGeom>
+          <a:noFill/>
+          <a:ln/>
+        </p:spPr>
+        <p:txBody>
+          <a:bodyPr wrap="square" lIns="0" tIns="0" rIns="0" bIns="0" rtlCol="0" anchor="t"/>
+          <a:lstStyle/>
+          <a:p>
+            <a:pPr indent="0" marL="0">
+              <a:buNone/>
+            </a:pPr>
+            <a:r>
+              <a:rPr lang="en-US" sz="1100" dirty="0">
+                <a:solidFill>
+                  <a:srgbClr val="1F2937"/>
+                </a:solidFill>
+                <a:latin typeface="微软雅黑" pitchFamily="34" charset="0"/>
+                <a:ea typeface="微软雅黑" pitchFamily="34" charset="-122"/>
+                <a:cs typeface="微软雅黑" pitchFamily="34" charset="-120"/>
+              </a:rPr>
+              <a:t>同级编码特征直通解码端：高频细节绕过瓶颈得以保留，并缓解深层梯度消失</a:t>
+            </a:r>
+            <a:endParaRPr lang="en-US" sz="1100" dirty="0"/>
+          </a:p>
+        </p:txBody>
+      </p:sp>
+      <p:sp>
+        <p:nvSpPr>
+          <p:cNvPr id="48" name="Shape 46"/>
+          <p:cNvSpPr/>
+          <p:nvPr/>
+        </p:nvSpPr>
+        <p:spPr>
+          <a:xfrm>
+            <a:off x="7360920" y="3584448"/>
+            <a:ext cx="4389120" cy="969264"/>
+          </a:xfrm>
+          <a:prstGeom prst="roundRect">
+            <a:avLst>
+              <a:gd name="adj" fmla="val 5660"/>
+            </a:avLst>
+          </a:prstGeom>
+          <a:solidFill>
+            <a:srgbClr val="EFEDF9"/>
+          </a:solidFill>
+          <a:ln w="9525">
+            <a:solidFill>
+              <a:srgbClr val="D9D5EF"/>
+            </a:solidFill>
+            <a:prstDash val="solid"/>
+          </a:ln>
+        </p:spPr>
+      </p:sp>
+      <p:sp>
+        <p:nvSpPr>
+          <p:cNvPr id="49" name="Text 47"/>
+          <p:cNvSpPr/>
+          <p:nvPr/>
+        </p:nvSpPr>
+        <p:spPr>
+          <a:xfrm>
+            <a:off x="7543800" y="3657600"/>
+            <a:ext cx="4023360" cy="292608"/>
+          </a:xfrm>
+          <a:prstGeom prst="rect">
+            <a:avLst/>
+          </a:prstGeom>
+          <a:noFill/>
+          <a:ln/>
+        </p:spPr>
+        <p:txBody>
+          <a:bodyPr wrap="square" lIns="0" tIns="0" rIns="0" bIns="0" rtlCol="0" anchor="ctr"/>
+          <a:lstStyle/>
+          <a:p>
+            <a:pPr indent="0" marL="0">
+              <a:buNone/>
+            </a:pPr>
+            <a:r>
+              <a:rPr lang="en-US" sz="1250" b="1" dirty="0">
+                <a:solidFill>
+                  <a:srgbClr val="372E8A"/>
+                </a:solidFill>
+                <a:latin typeface="微软雅黑" pitchFamily="34" charset="0"/>
+                <a:ea typeface="微软雅黑" pitchFamily="34" charset="-122"/>
+                <a:cs typeface="微软雅黑" pitchFamily="34" charset="-120"/>
+              </a:rPr>
+              <a:t>时间步注入</a:t>
+            </a:r>
+            <a:endParaRPr lang="en-US" sz="1250" dirty="0"/>
+          </a:p>
+        </p:txBody>
+      </p:sp>
+      <p:sp>
+        <p:nvSpPr>
+          <p:cNvPr id="50" name="Text 48"/>
+          <p:cNvSpPr/>
+          <p:nvPr/>
+        </p:nvSpPr>
+        <p:spPr>
+          <a:xfrm>
+            <a:off x="7543800" y="3968496"/>
+            <a:ext cx="4023360" cy="530352"/>
+          </a:xfrm>
+          <a:prstGeom prst="rect">
+            <a:avLst/>
+          </a:prstGeom>
+          <a:noFill/>
+          <a:ln/>
+        </p:spPr>
+        <p:txBody>
+          <a:bodyPr wrap="square" lIns="0" tIns="0" rIns="0" bIns="0" rtlCol="0" anchor="t"/>
+          <a:lstStyle/>
+          <a:p>
+            <a:pPr indent="0" marL="0">
+              <a:buNone/>
+            </a:pPr>
+            <a:r>
+              <a:rPr lang="en-US" sz="1100" dirty="0">
+                <a:solidFill>
+                  <a:srgbClr val="1F2937"/>
+                </a:solidFill>
+                <a:latin typeface="微软雅黑" pitchFamily="34" charset="0"/>
+                <a:ea typeface="微软雅黑" pitchFamily="34" charset="-122"/>
+                <a:cs typeface="微软雅黑" pitchFamily="34" charset="-120"/>
+              </a:rPr>
+              <a:t>t 经正弦编码＋MLP 得到嵌入向量，逐块加至残差块——一个网络服务全部噪声水平</a:t>
+            </a:r>
+            <a:endParaRPr lang="en-US" sz="1100" dirty="0"/>
+          </a:p>
+        </p:txBody>
+      </p:sp>
+      <p:sp>
+        <p:nvSpPr>
+          <p:cNvPr id="51" name="Shape 49"/>
+          <p:cNvSpPr/>
+          <p:nvPr/>
+        </p:nvSpPr>
+        <p:spPr>
+          <a:xfrm>
+            <a:off x="7360920" y="4681728"/>
+            <a:ext cx="4389120" cy="969264"/>
+          </a:xfrm>
+          <a:prstGeom prst="roundRect">
+            <a:avLst>
+              <a:gd name="adj" fmla="val 5660"/>
+            </a:avLst>
+          </a:prstGeom>
+          <a:solidFill>
+            <a:srgbClr val="EFEDF9"/>
+          </a:solidFill>
+          <a:ln w="9525">
+            <a:solidFill>
+              <a:srgbClr val="D9D5EF"/>
+            </a:solidFill>
+            <a:prstDash val="solid"/>
+          </a:ln>
+        </p:spPr>
+      </p:sp>
+      <p:sp>
+        <p:nvSpPr>
+          <p:cNvPr id="52" name="Text 50"/>
+          <p:cNvSpPr/>
+          <p:nvPr/>
+        </p:nvSpPr>
+        <p:spPr>
+          <a:xfrm>
+            <a:off x="7543800" y="4754880"/>
+            <a:ext cx="4023360" cy="292608"/>
+          </a:xfrm>
+          <a:prstGeom prst="rect">
+            <a:avLst/>
+          </a:prstGeom>
+          <a:noFill/>
+          <a:ln/>
+        </p:spPr>
+        <p:txBody>
+          <a:bodyPr wrap="square" lIns="0" tIns="0" rIns="0" bIns="0" rtlCol="0" anchor="ctr"/>
+          <a:lstStyle/>
+          <a:p>
+            <a:pPr indent="0" marL="0">
+              <a:buNone/>
+            </a:pPr>
+            <a:r>
+              <a:rPr lang="en-US" sz="1250" b="1" dirty="0">
+                <a:solidFill>
+                  <a:srgbClr val="372E8A"/>
+                </a:solidFill>
+                <a:latin typeface="微软雅黑" pitchFamily="34" charset="0"/>
+                <a:ea typeface="微软雅黑" pitchFamily="34" charset="-122"/>
+                <a:cs typeface="微软雅黑" pitchFamily="34" charset="-120"/>
+              </a:rPr>
+              <a:t>组件配置</a:t>
+            </a:r>
+            <a:endParaRPr lang="en-US" sz="1250" dirty="0"/>
+          </a:p>
+        </p:txBody>
+      </p:sp>
+      <p:sp>
+        <p:nvSpPr>
+          <p:cNvPr id="53" name="Text 51"/>
+          <p:cNvSpPr/>
+          <p:nvPr/>
+        </p:nvSpPr>
+        <p:spPr>
+          <a:xfrm>
+            <a:off x="7543800" y="5065776"/>
+            <a:ext cx="4023360" cy="530352"/>
+          </a:xfrm>
+          <a:prstGeom prst="rect">
+            <a:avLst/>
+          </a:prstGeom>
+          <a:noFill/>
+          <a:ln/>
+        </p:spPr>
+        <p:txBody>
+          <a:bodyPr wrap="square" lIns="0" tIns="0" rIns="0" bIns="0" rtlCol="0" anchor="t"/>
+          <a:lstStyle/>
+          <a:p>
+            <a:pPr indent="0" marL="0">
+              <a:buNone/>
+            </a:pPr>
+            <a:r>
+              <a:rPr lang="en-US" sz="1100" dirty="0">
+                <a:solidFill>
+                  <a:srgbClr val="1F2937"/>
+                </a:solidFill>
+                <a:latin typeface="微软雅黑" pitchFamily="34" charset="0"/>
+                <a:ea typeface="微软雅黑" pitchFamily="34" charset="-122"/>
+                <a:cs typeface="微软雅黑" pitchFamily="34" charset="-120"/>
+              </a:rPr>
+              <a:t>残差块＝GroupNorm→SiLU→卷积；self-attention 仅置于低分辨率层：开销可控且深层最需长程依赖</a:t>
+            </a:r>
+            <a:endParaRPr lang="en-US" sz="1100" dirty="0"/>
+          </a:p>
+        </p:txBody>
+      </p:sp>
+      <p:sp>
+        <p:nvSpPr>
+          <p:cNvPr id="54" name="Text 52"/>
+          <p:cNvSpPr/>
+          <p:nvPr/>
+        </p:nvSpPr>
+        <p:spPr>
+          <a:xfrm>
+            <a:off x="7360920" y="5779008"/>
+            <a:ext cx="4389120" cy="274320"/>
+          </a:xfrm>
+          <a:prstGeom prst="rect">
+            <a:avLst/>
+          </a:prstGeom>
+          <a:noFill/>
+          <a:ln/>
+        </p:spPr>
+        <p:txBody>
+          <a:bodyPr wrap="square" lIns="0" tIns="0" rIns="0" bIns="0" rtlCol="0" anchor="ctr"/>
+          <a:lstStyle/>
+          <a:p>
+            <a:pPr indent="0" marL="0">
+              <a:buNone/>
+            </a:pPr>
+            <a:r>
+              <a:rPr lang="en-US" sz="1150" dirty="0">
+                <a:solidFill>
+                  <a:srgbClr val="6B7280"/>
+                </a:solidFill>
+                <a:latin typeface="微软雅黑" pitchFamily="34" charset="0"/>
+                <a:ea typeface="微软雅黑" pitchFamily="34" charset="-122"/>
+                <a:cs typeface="微软雅黑" pitchFamily="34" charset="-120"/>
+              </a:rPr>
+              <a:t>LDM 在此骨架的各层再插入 cross-attention 模块（见条件机制一节）</a:t>
             </a:r>
             <a:endParaRPr lang="en-US" sz="1150" dirty="0"/>
           </a:p>
@@ -11149,134 +11998,7 @@
       </p:sp>
       <p:sp>
         <p:nvSpPr>
-          <p:cNvPr id="34" name="Text 32"/>
-          <p:cNvSpPr/>
-          <p:nvPr/>
-        </p:nvSpPr>
-        <p:spPr>
-          <a:xfrm>
-            <a:off x="7452360" y="1554480"/>
-            <a:ext cx="4251960" cy="4389120"/>
-          </a:xfrm>
-          <a:prstGeom prst="rect">
-            <a:avLst/>
-          </a:prstGeom>
-          <a:noFill/>
-          <a:ln/>
-        </p:spPr>
-        <p:txBody>
-          <a:bodyPr wrap="square" lIns="0" tIns="0" rIns="0" bIns="0" rtlCol="0" anchor="t"/>
-          <a:lstStyle/>
-          <a:p>
-            <a:pPr marL="152400" indent="-152400">
-              <a:spcAft>
-                <a:spcPts val="900"/>
-              </a:spcAft>
-              <a:buSzPct val="100000"/>
-              <a:buChar char="▪"/>
-            </a:pPr>
-            <a:r>
-              <a:rPr lang="en-US" sz="1400" dirty="0">
-                <a:solidFill>
-                  <a:srgbClr val="1F2937"/>
-                </a:solidFill>
-                <a:latin typeface="微软雅黑" pitchFamily="34" charset="0"/>
-                <a:ea typeface="微软雅黑" pitchFamily="34" charset="-122"/>
-                <a:cs typeface="微软雅黑" pitchFamily="34" charset="-120"/>
-              </a:rPr>
-              <a:t>编码器压缩到低分辨率（语义），解码器逐级还原（细节）</a:t>
-            </a:r>
-            <a:endParaRPr lang="en-US" sz="1400" dirty="0"/>
-          </a:p>
-          <a:p>
-            <a:pPr marL="152400" indent="-152400">
-              <a:spcAft>
-                <a:spcPts val="900"/>
-              </a:spcAft>
-              <a:buSzPct val="100000"/>
-              <a:buChar char="▪"/>
-            </a:pPr>
-            <a:r>
-              <a:rPr lang="en-US" sz="1400" dirty="0">
-                <a:solidFill>
-                  <a:srgbClr val="1F2937"/>
-                </a:solidFill>
-                <a:latin typeface="微软雅黑" pitchFamily="34" charset="0"/>
-                <a:ea typeface="微软雅黑" pitchFamily="34" charset="-122"/>
-                <a:cs typeface="微软雅黑" pitchFamily="34" charset="-120"/>
-              </a:rPr>
-              <a:t>跳跃连接：同层特征直通解码端——保细节 + 缓解梯度消失</a:t>
-            </a:r>
-            <a:endParaRPr lang="en-US" sz="1400" dirty="0"/>
-          </a:p>
-          <a:p>
-            <a:pPr marL="152400" indent="-152400">
-              <a:spcAft>
-                <a:spcPts val="900"/>
-              </a:spcAft>
-              <a:buSzPct val="100000"/>
-              <a:buChar char="▪"/>
-            </a:pPr>
-            <a:r>
-              <a:rPr lang="en-US" sz="1400" dirty="0">
-                <a:solidFill>
-                  <a:srgbClr val="1F2937"/>
-                </a:solidFill>
-                <a:latin typeface="微软雅黑" pitchFamily="34" charset="0"/>
-                <a:ea typeface="微软雅黑" pitchFamily="34" charset="-122"/>
-                <a:cs typeface="微软雅黑" pitchFamily="34" charset="-120"/>
-              </a:rPr>
-              <a:t>组件：残差块 + GroupNorm + SiLU；低分辨率层加 self-attention</a:t>
-            </a:r>
-            <a:endParaRPr lang="en-US" sz="1400" dirty="0"/>
-          </a:p>
-          <a:p>
-            <a:pPr marL="152400" indent="-152400">
-              <a:spcAft>
-                <a:spcPts val="900"/>
-              </a:spcAft>
-              <a:buSzPct val="100000"/>
-              <a:buChar char="▪"/>
-            </a:pPr>
-            <a:r>
-              <a:rPr lang="en-US" sz="1400" dirty="0">
-                <a:solidFill>
-                  <a:srgbClr val="1F2937"/>
-                </a:solidFill>
-                <a:latin typeface="微软雅黑" pitchFamily="34" charset="0"/>
-                <a:ea typeface="微软雅黑" pitchFamily="34" charset="-122"/>
-                <a:cs typeface="微软雅黑" pitchFamily="34" charset="-120"/>
-              </a:rPr>
-              <a:t>时间步 t：正弦位置嵌入投影进每个残差块（一个网络管所有噪声水平）</a:t>
-            </a:r>
-            <a:endParaRPr lang="en-US" sz="1400" dirty="0"/>
-          </a:p>
-          <a:p>
-            <a:pPr marL="152400" indent="-152400">
-              <a:spcAft>
-                <a:spcPts val="900"/>
-              </a:spcAft>
-              <a:buSzPct val="100000"/>
-              <a:buChar char="▪"/>
-            </a:pPr>
-            <a:r>
-              <a:rPr lang="en-US" sz="1400" dirty="0">
-                <a:solidFill>
-                  <a:srgbClr val="1F2937"/>
-                </a:solidFill>
-                <a:latin typeface="微软雅黑" pitchFamily="34" charset="0"/>
-                <a:ea typeface="微软雅黑" pitchFamily="34" charset="-122"/>
-                <a:cs typeface="微软雅黑" pitchFamily="34" charset="-120"/>
-              </a:rPr>
-              <a:t>U-Net 2015 年提出，扩散模型让它成为生成领域的事实标准骨干</a:t>
-            </a:r>
-            <a:endParaRPr lang="en-US" sz="1400" dirty="0"/>
-          </a:p>
-        </p:txBody>
-      </p:sp>
-      <p:sp>
-        <p:nvSpPr>
-          <p:cNvPr id="35" name="Text 33"/>
+          <p:cNvPr id="55" name="Text 53"/>
           <p:cNvSpPr/>
           <p:nvPr/>
         </p:nvSpPr>
@@ -11315,7 +12037,7 @@
       </p:sp>
       <p:sp>
         <p:nvSpPr>
-          <p:cNvPr id="36" name="Text 34"/>
+          <p:cNvPr id="56" name="Text 54"/>
           <p:cNvSpPr/>
           <p:nvPr/>
         </p:nvSpPr>
@@ -39314,7 +40036,7 @@
                 <a:ea typeface="微软雅黑" pitchFamily="34" charset="-122"/>
                 <a:cs typeface="微软雅黑" pitchFamily="34" charset="-120"/>
               </a:rPr>
-              <a:t>五句话带走 LDM</a:t>
+              <a:t>LDM：一个核心论断、五个要点、一条遗产</a:t>
             </a:r>
             <a:endParaRPr lang="en-US" sz="2800" dirty="0"/>
           </a:p>
@@ -39328,18 +40050,25 @@
         </p:nvSpPr>
         <p:spPr>
           <a:xfrm>
-            <a:off x="457200" y="1463040"/>
-            <a:ext cx="1600200" cy="749808"/>
+            <a:off x="457200" y="1353312"/>
+            <a:ext cx="11247120" cy="804672"/>
           </a:xfrm>
           <a:prstGeom prst="roundRect">
             <a:avLst>
-              <a:gd name="adj" fmla="val 6098"/>
+              <a:gd name="adj" fmla="val 7955"/>
             </a:avLst>
           </a:prstGeom>
           <a:solidFill>
-            <a:srgbClr val="4C3FB1"/>
+            <a:srgbClr val="17142E"/>
           </a:solidFill>
           <a:ln/>
+          <a:effectLst>
+            <a:outerShdw sx="100000" sy="100000" kx="0" ky="0" algn="bl" rotWithShape="0" blurRad="88900" dist="25400" dir="2700000">
+              <a:srgbClr val="000000">
+                <a:alpha val="13000"/>
+              </a:srgbClr>
+            </a:outerShdw>
+          </a:effectLst>
         </p:spPr>
       </p:sp>
       <p:sp>
@@ -39350,47 +40079,8 @@
         </p:nvSpPr>
         <p:spPr>
           <a:xfrm>
-            <a:off x="457200" y="1463040"/>
-            <a:ext cx="1600200" cy="749808"/>
-          </a:xfrm>
-          <a:prstGeom prst="rect">
-            <a:avLst/>
-          </a:prstGeom>
-          <a:noFill/>
-          <a:ln/>
-        </p:spPr>
-        <p:txBody>
-          <a:bodyPr wrap="square" lIns="0" tIns="0" rIns="0" bIns="0" rtlCol="0" anchor="ctr"/>
-          <a:lstStyle/>
-          <a:p>
-            <a:pPr algn="ctr" indent="0" marL="0">
-              <a:buNone/>
-            </a:pPr>
-            <a:r>
-              <a:rPr lang="en-US" sz="1500" b="1" dirty="0">
-                <a:solidFill>
-                  <a:srgbClr val="FFFFFF"/>
-                </a:solidFill>
-                <a:latin typeface="微软雅黑" pitchFamily="34" charset="0"/>
-                <a:ea typeface="微软雅黑" pitchFamily="34" charset="-122"/>
-                <a:cs typeface="微软雅黑" pitchFamily="34" charset="-120"/>
-              </a:rPr>
-              <a:t>解耦</a:t>
-            </a:r>
-            <a:endParaRPr lang="en-US" sz="1500" dirty="0"/>
-          </a:p>
-        </p:txBody>
-      </p:sp>
-      <p:sp>
-        <p:nvSpPr>
-          <p:cNvPr id="6" name="Text 4"/>
-          <p:cNvSpPr/>
-          <p:nvPr/>
-        </p:nvSpPr>
-        <p:spPr>
-          <a:xfrm>
-            <a:off x="2331720" y="1463040"/>
-            <a:ext cx="9372600" cy="749808"/>
+            <a:off x="749808" y="1353312"/>
+            <a:ext cx="1371600" cy="804672"/>
           </a:xfrm>
           <a:prstGeom prst="rect">
             <a:avLst/>
@@ -39406,91 +40096,30 @@
               <a:buNone/>
             </a:pPr>
             <a:r>
-              <a:rPr lang="en-US" sz="1450" dirty="0">
-                <a:solidFill>
-                  <a:srgbClr val="1F2937"/>
-                </a:solidFill>
-                <a:latin typeface="微软雅黑" pitchFamily="34" charset="0"/>
-                <a:ea typeface="微软雅黑" pitchFamily="34" charset="-122"/>
-                <a:cs typeface="微软雅黑" pitchFamily="34" charset="-120"/>
-              </a:rPr>
-              <a:t>图像生成 = 感知压缩（自编码器）+ 语义生成（潜空间扩散），算力降 1–2 个数量级</a:t>
-            </a:r>
-            <a:endParaRPr lang="en-US" sz="1450" dirty="0"/>
-          </a:p>
-        </p:txBody>
-      </p:sp>
-      <p:sp>
-        <p:nvSpPr>
-          <p:cNvPr id="7" name="Shape 5"/>
-          <p:cNvSpPr/>
-          <p:nvPr/>
-        </p:nvSpPr>
-        <p:spPr>
-          <a:xfrm>
-            <a:off x="457200" y="2395728"/>
-            <a:ext cx="1600200" cy="749808"/>
-          </a:xfrm>
-          <a:prstGeom prst="roundRect">
-            <a:avLst>
-              <a:gd name="adj" fmla="val 6098"/>
-            </a:avLst>
-          </a:prstGeom>
-          <a:solidFill>
-            <a:srgbClr val="4C3FB1"/>
-          </a:solidFill>
-          <a:ln/>
-        </p:spPr>
-      </p:sp>
-      <p:sp>
-        <p:nvSpPr>
-          <p:cNvPr id="8" name="Text 6"/>
-          <p:cNvSpPr/>
-          <p:nvPr/>
-        </p:nvSpPr>
-        <p:spPr>
-          <a:xfrm>
-            <a:off x="457200" y="2395728"/>
-            <a:ext cx="1600200" cy="749808"/>
-          </a:xfrm>
-          <a:prstGeom prst="rect">
-            <a:avLst/>
-          </a:prstGeom>
-          <a:noFill/>
-          <a:ln/>
-        </p:spPr>
-        <p:txBody>
-          <a:bodyPr wrap="square" lIns="0" tIns="0" rIns="0" bIns="0" rtlCol="0" anchor="ctr"/>
-          <a:lstStyle/>
-          <a:p>
-            <a:pPr algn="ctr" indent="0" marL="0">
-              <a:buNone/>
-            </a:pPr>
-            <a:r>
-              <a:rPr lang="en-US" sz="1500" b="1" dirty="0">
-                <a:solidFill>
-                  <a:srgbClr val="FFFFFF"/>
-                </a:solidFill>
-                <a:latin typeface="微软雅黑" pitchFamily="34" charset="0"/>
-                <a:ea typeface="微软雅黑" pitchFamily="34" charset="-122"/>
-                <a:cs typeface="微软雅黑" pitchFamily="34" charset="-120"/>
-              </a:rPr>
-              <a:t>甜点区</a:t>
-            </a:r>
-            <a:endParaRPr lang="en-US" sz="1500" dirty="0"/>
-          </a:p>
-        </p:txBody>
-      </p:sp>
-      <p:sp>
-        <p:nvSpPr>
-          <p:cNvPr id="9" name="Text 7"/>
-          <p:cNvSpPr/>
-          <p:nvPr/>
-        </p:nvSpPr>
-        <p:spPr>
-          <a:xfrm>
-            <a:off x="2331720" y="2395728"/>
-            <a:ext cx="9372600" cy="749808"/>
+              <a:rPr lang="en-US" sz="1650" b="1" dirty="0">
+                <a:solidFill>
+                  <a:srgbClr val="F59E0B"/>
+                </a:solidFill>
+                <a:latin typeface="微软雅黑" pitchFamily="34" charset="0"/>
+                <a:ea typeface="微软雅黑" pitchFamily="34" charset="-122"/>
+                <a:cs typeface="微软雅黑" pitchFamily="34" charset="-120"/>
+              </a:rPr>
+              <a:t>核心论断</a:t>
+            </a:r>
+            <a:endParaRPr lang="en-US" sz="1650" dirty="0"/>
+          </a:p>
+        </p:txBody>
+      </p:sp>
+      <p:sp>
+        <p:nvSpPr>
+          <p:cNvPr id="6" name="Text 4"/>
+          <p:cNvSpPr/>
+          <p:nvPr/>
+        </p:nvSpPr>
+        <p:spPr>
+          <a:xfrm>
+            <a:off x="2212848" y="1353312"/>
+            <a:ext cx="9235440" cy="804672"/>
           </a:xfrm>
           <a:prstGeom prst="rect">
             <a:avLst/>
@@ -39506,91 +40135,55 @@
               <a:buNone/>
             </a:pPr>
             <a:r>
-              <a:rPr lang="en-US" sz="1450" dirty="0">
-                <a:solidFill>
-                  <a:srgbClr val="1F2937"/>
-                </a:solidFill>
-                <a:latin typeface="微软雅黑" pitchFamily="34" charset="0"/>
-                <a:ea typeface="微软雅黑" pitchFamily="34" charset="-122"/>
-                <a:cs typeface="微软雅黑" pitchFamily="34" charset="-120"/>
-              </a:rPr>
-              <a:t>f ∈ [4,16]：压缩不足太贵、过压缩伤上界（ImageNet 消融 FID gap 38）</a:t>
-            </a:r>
-            <a:endParaRPr lang="en-US" sz="1450" dirty="0"/>
-          </a:p>
-        </p:txBody>
-      </p:sp>
-      <p:sp>
-        <p:nvSpPr>
-          <p:cNvPr id="10" name="Shape 8"/>
-          <p:cNvSpPr/>
-          <p:nvPr/>
-        </p:nvSpPr>
-        <p:spPr>
-          <a:xfrm>
-            <a:off x="457200" y="3328416"/>
-            <a:ext cx="1600200" cy="749808"/>
-          </a:xfrm>
-          <a:prstGeom prst="roundRect">
-            <a:avLst>
-              <a:gd name="adj" fmla="val 6098"/>
-            </a:avLst>
+              <a:rPr lang="en-US" sz="1600" dirty="0">
+                <a:solidFill>
+                  <a:srgbClr val="F0EEFB"/>
+                </a:solidFill>
+                <a:latin typeface="微软雅黑" pitchFamily="34" charset="0"/>
+                <a:ea typeface="微软雅黑" pitchFamily="34" charset="-122"/>
+                <a:cs typeface="微软雅黑" pitchFamily="34" charset="-120"/>
+              </a:rPr>
+              <a:t>把扩散模型从像素空间搬进自编码器的潜空间——理论零新增，训练与推理算力降低 1–2 个数量级</a:t>
+            </a:r>
+            <a:endParaRPr lang="en-US" sz="1600" dirty="0"/>
+          </a:p>
+        </p:txBody>
+      </p:sp>
+      <p:sp>
+        <p:nvSpPr>
+          <p:cNvPr id="7" name="Shape 5"/>
+          <p:cNvSpPr/>
+          <p:nvPr/>
+        </p:nvSpPr>
+        <p:spPr>
+          <a:xfrm>
+            <a:off x="457200" y="2359152"/>
+            <a:ext cx="11247120" cy="566928"/>
+          </a:xfrm>
+          <a:prstGeom prst="rect">
+            <a:avLst/>
           </a:prstGeom>
           <a:solidFill>
-            <a:srgbClr val="F59E0B"/>
+            <a:srgbClr val="FFFFFF"/>
           </a:solidFill>
-          <a:ln/>
-        </p:spPr>
-      </p:sp>
-      <p:sp>
-        <p:nvSpPr>
-          <p:cNvPr id="11" name="Text 9"/>
-          <p:cNvSpPr/>
-          <p:nvPr/>
-        </p:nvSpPr>
-        <p:spPr>
-          <a:xfrm>
-            <a:off x="457200" y="3328416"/>
-            <a:ext cx="1600200" cy="749808"/>
-          </a:xfrm>
-          <a:prstGeom prst="rect">
-            <a:avLst/>
-          </a:prstGeom>
-          <a:noFill/>
-          <a:ln/>
-        </p:spPr>
-        <p:txBody>
-          <a:bodyPr wrap="square" lIns="0" tIns="0" rIns="0" bIns="0" rtlCol="0" anchor="ctr"/>
-          <a:lstStyle/>
-          <a:p>
-            <a:pPr algn="ctr" indent="0" marL="0">
-              <a:buNone/>
-            </a:pPr>
-            <a:r>
-              <a:rPr lang="en-US" sz="1500" b="1" dirty="0">
-                <a:solidFill>
-                  <a:srgbClr val="FFFFFF"/>
-                </a:solidFill>
-                <a:latin typeface="微软雅黑" pitchFamily="34" charset="0"/>
-                <a:ea typeface="微软雅黑" pitchFamily="34" charset="-122"/>
-                <a:cs typeface="微软雅黑" pitchFamily="34" charset="-120"/>
-              </a:rPr>
-              <a:t>条件接口</a:t>
-            </a:r>
-            <a:endParaRPr lang="en-US" sz="1500" dirty="0"/>
-          </a:p>
-        </p:txBody>
-      </p:sp>
-      <p:sp>
-        <p:nvSpPr>
-          <p:cNvPr id="12" name="Text 10"/>
-          <p:cNvSpPr/>
-          <p:nvPr/>
-        </p:nvSpPr>
-        <p:spPr>
-          <a:xfrm>
-            <a:off x="2331720" y="3328416"/>
-            <a:ext cx="9372600" cy="749808"/>
+          <a:ln w="9525">
+            <a:solidFill>
+              <a:srgbClr val="E7E4F4"/>
+            </a:solidFill>
+            <a:prstDash val="solid"/>
+          </a:ln>
+        </p:spPr>
+      </p:sp>
+      <p:sp>
+        <p:nvSpPr>
+          <p:cNvPr id="8" name="Text 6"/>
+          <p:cNvSpPr/>
+          <p:nvPr/>
+        </p:nvSpPr>
+        <p:spPr>
+          <a:xfrm>
+            <a:off x="585216" y="2359152"/>
+            <a:ext cx="365760" cy="566928"/>
           </a:xfrm>
           <a:prstGeom prst="rect">
             <a:avLst/>
@@ -39606,91 +40199,30 @@
               <a:buNone/>
             </a:pPr>
             <a:r>
-              <a:rPr lang="en-US" sz="1450" dirty="0">
-                <a:solidFill>
-                  <a:srgbClr val="1F2937"/>
-                </a:solidFill>
-                <a:latin typeface="微软雅黑" pitchFamily="34" charset="0"/>
-                <a:ea typeface="微软雅黑" pitchFamily="34" charset="-122"/>
-                <a:cs typeface="微软雅黑" pitchFamily="34" charset="-120"/>
-              </a:rPr>
-              <a:t>拼接管空间对齐条件；cross-attention 管任意模态——τ_θ 可插拔是多条件系统的关键</a:t>
-            </a:r>
-            <a:endParaRPr lang="en-US" sz="1450" dirty="0"/>
-          </a:p>
-        </p:txBody>
-      </p:sp>
-      <p:sp>
-        <p:nvSpPr>
-          <p:cNvPr id="13" name="Shape 11"/>
-          <p:cNvSpPr/>
-          <p:nvPr/>
-        </p:nvSpPr>
-        <p:spPr>
-          <a:xfrm>
-            <a:off x="457200" y="4261104"/>
-            <a:ext cx="1600200" cy="749808"/>
-          </a:xfrm>
-          <a:prstGeom prst="roundRect">
-            <a:avLst>
-              <a:gd name="adj" fmla="val 6098"/>
-            </a:avLst>
-          </a:prstGeom>
-          <a:solidFill>
-            <a:srgbClr val="4C3FB1"/>
-          </a:solidFill>
-          <a:ln/>
-        </p:spPr>
-      </p:sp>
-      <p:sp>
-        <p:nvSpPr>
-          <p:cNvPr id="14" name="Text 12"/>
-          <p:cNvSpPr/>
-          <p:nvPr/>
-        </p:nvSpPr>
-        <p:spPr>
-          <a:xfrm>
-            <a:off x="457200" y="4261104"/>
-            <a:ext cx="1600200" cy="749808"/>
-          </a:xfrm>
-          <a:prstGeom prst="rect">
-            <a:avLst/>
-          </a:prstGeom>
-          <a:noFill/>
-          <a:ln/>
-        </p:spPr>
-        <p:txBody>
-          <a:bodyPr wrap="square" lIns="0" tIns="0" rIns="0" bIns="0" rtlCol="0" anchor="ctr"/>
-          <a:lstStyle/>
-          <a:p>
-            <a:pPr algn="ctr" indent="0" marL="0">
-              <a:buNone/>
-            </a:pPr>
-            <a:r>
-              <a:rPr lang="en-US" sz="1500" b="1" dirty="0">
-                <a:solidFill>
-                  <a:srgbClr val="FFFFFF"/>
-                </a:solidFill>
-                <a:latin typeface="微软雅黑" pitchFamily="34" charset="0"/>
-                <a:ea typeface="微软雅黑" pitchFamily="34" charset="-122"/>
-                <a:cs typeface="微软雅黑" pitchFamily="34" charset="-120"/>
-              </a:rPr>
-              <a:t>CFG</a:t>
-            </a:r>
-            <a:endParaRPr lang="en-US" sz="1500" dirty="0"/>
-          </a:p>
-        </p:txBody>
-      </p:sp>
-      <p:sp>
-        <p:nvSpPr>
-          <p:cNvPr id="15" name="Text 13"/>
-          <p:cNvSpPr/>
-          <p:nvPr/>
-        </p:nvSpPr>
-        <p:spPr>
-          <a:xfrm>
-            <a:off x="2331720" y="4261104"/>
-            <a:ext cx="9372600" cy="749808"/>
+              <a:rPr lang="en-US" sz="1700" b="1" dirty="0">
+                <a:solidFill>
+                  <a:srgbClr val="F59E0B"/>
+                </a:solidFill>
+                <a:latin typeface="微软雅黑" pitchFamily="34" charset="0"/>
+                <a:ea typeface="微软雅黑" pitchFamily="34" charset="-122"/>
+                <a:cs typeface="微软雅黑" pitchFamily="34" charset="-120"/>
+              </a:rPr>
+              <a:t>1</a:t>
+            </a:r>
+            <a:endParaRPr lang="en-US" sz="1700" dirty="0"/>
+          </a:p>
+        </p:txBody>
+      </p:sp>
+      <p:sp>
+        <p:nvSpPr>
+          <p:cNvPr id="9" name="Text 7"/>
+          <p:cNvSpPr/>
+          <p:nvPr/>
+        </p:nvSpPr>
+        <p:spPr>
+          <a:xfrm>
+            <a:off x="987552" y="2359152"/>
+            <a:ext cx="1783080" cy="566928"/>
           </a:xfrm>
           <a:prstGeom prst="rect">
             <a:avLst/>
@@ -39706,91 +40238,30 @@
               <a:buNone/>
             </a:pPr>
             <a:r>
-              <a:rPr lang="en-US" sz="1450" dirty="0">
-                <a:solidFill>
-                  <a:srgbClr val="1F2937"/>
-                </a:solidFill>
-                <a:latin typeface="微软雅黑" pitchFamily="34" charset="0"/>
-                <a:ea typeface="微软雅黑" pitchFamily="34" charset="-122"/>
-                <a:cs typeface="微软雅黑" pitchFamily="34" charset="-120"/>
-              </a:rPr>
-              <a:t>随机丢条件 + 采样差值外推：类条件 10.56→3.60、文本 23.35→12.61</a:t>
-            </a:r>
-            <a:endParaRPr lang="en-US" sz="1450" dirty="0"/>
-          </a:p>
-        </p:txBody>
-      </p:sp>
-      <p:sp>
-        <p:nvSpPr>
-          <p:cNvPr id="16" name="Shape 14"/>
-          <p:cNvSpPr/>
-          <p:nvPr/>
-        </p:nvSpPr>
-        <p:spPr>
-          <a:xfrm>
-            <a:off x="457200" y="5193792"/>
-            <a:ext cx="1600200" cy="749808"/>
-          </a:xfrm>
-          <a:prstGeom prst="roundRect">
-            <a:avLst>
-              <a:gd name="adj" fmla="val 6098"/>
-            </a:avLst>
-          </a:prstGeom>
-          <a:solidFill>
-            <a:srgbClr val="4C3FB1"/>
-          </a:solidFill>
-          <a:ln/>
-        </p:spPr>
-      </p:sp>
-      <p:sp>
-        <p:nvSpPr>
-          <p:cNvPr id="17" name="Text 15"/>
-          <p:cNvSpPr/>
-          <p:nvPr/>
-        </p:nvSpPr>
-        <p:spPr>
-          <a:xfrm>
-            <a:off x="457200" y="5193792"/>
-            <a:ext cx="1600200" cy="749808"/>
-          </a:xfrm>
-          <a:prstGeom prst="rect">
-            <a:avLst/>
-          </a:prstGeom>
-          <a:noFill/>
-          <a:ln/>
-        </p:spPr>
-        <p:txBody>
-          <a:bodyPr wrap="square" lIns="0" tIns="0" rIns="0" bIns="0" rtlCol="0" anchor="ctr"/>
-          <a:lstStyle/>
-          <a:p>
-            <a:pPr algn="ctr" indent="0" marL="0">
-              <a:buNone/>
-            </a:pPr>
-            <a:r>
-              <a:rPr lang="en-US" sz="1500" b="1" dirty="0">
-                <a:solidFill>
-                  <a:srgbClr val="FFFFFF"/>
-                </a:solidFill>
-                <a:latin typeface="微软雅黑" pitchFamily="34" charset="0"/>
-                <a:ea typeface="微软雅黑" pitchFamily="34" charset="-122"/>
-                <a:cs typeface="微软雅黑" pitchFamily="34" charset="-120"/>
-              </a:rPr>
-              <a:t>统一框架</a:t>
-            </a:r>
-            <a:endParaRPr lang="en-US" sz="1500" dirty="0"/>
-          </a:p>
-        </p:txBody>
-      </p:sp>
-      <p:sp>
-        <p:nvSpPr>
-          <p:cNvPr id="18" name="Text 16"/>
-          <p:cNvSpPr/>
-          <p:nvPr/>
-        </p:nvSpPr>
-        <p:spPr>
-          <a:xfrm>
-            <a:off x="2331720" y="5193792"/>
-            <a:ext cx="9372600" cy="749808"/>
+              <a:rPr lang="en-US" sz="1350" b="1" dirty="0">
+                <a:solidFill>
+                  <a:srgbClr val="372E8A"/>
+                </a:solidFill>
+                <a:latin typeface="微软雅黑" pitchFamily="34" charset="0"/>
+                <a:ea typeface="微软雅黑" pitchFamily="34" charset="-122"/>
+                <a:cs typeface="微软雅黑" pitchFamily="34" charset="-120"/>
+              </a:rPr>
+              <a:t>两阶段解耦</a:t>
+            </a:r>
+            <a:endParaRPr lang="en-US" sz="1350" dirty="0"/>
+          </a:p>
+        </p:txBody>
+      </p:sp>
+      <p:sp>
+        <p:nvSpPr>
+          <p:cNvPr id="10" name="Text 8"/>
+          <p:cNvSpPr/>
+          <p:nvPr/>
+        </p:nvSpPr>
+        <p:spPr>
+          <a:xfrm>
+            <a:off x="2852928" y="2359152"/>
+            <a:ext cx="6537960" cy="566928"/>
           </a:xfrm>
           <a:prstGeom prst="rect">
             <a:avLst/>
@@ -39806,7 +40277,7 @@
               <a:buNone/>
             </a:pPr>
             <a:r>
-              <a:rPr lang="en-US" sz="1450" dirty="0">
+              <a:rPr lang="en-US" sz="1250" dirty="0">
                 <a:solidFill>
                   <a:srgbClr val="1F2937"/>
                 </a:solidFill>
@@ -39814,7 +40285,829 @@
                 <a:ea typeface="微软雅黑" pitchFamily="34" charset="-122"/>
                 <a:cs typeface="微软雅黑" pitchFamily="34" charset="-120"/>
               </a:rPr>
-              <a:t>一个 LDM 覆盖无条件/类/文本/布局/超分/修复，后两者当时 SOTA</a:t>
+              <a:t>图像生成 = 感知压缩（自编码器）+ 语义生成（潜空间扩散），各司其职、分别验收</a:t>
+            </a:r>
+            <a:endParaRPr lang="en-US" sz="1250" dirty="0"/>
+          </a:p>
+        </p:txBody>
+      </p:sp>
+      <p:sp>
+        <p:nvSpPr>
+          <p:cNvPr id="11" name="Text 9"/>
+          <p:cNvSpPr/>
+          <p:nvPr/>
+        </p:nvSpPr>
+        <p:spPr>
+          <a:xfrm>
+            <a:off x="9464040" y="2359152"/>
+            <a:ext cx="2121408" cy="566928"/>
+          </a:xfrm>
+          <a:prstGeom prst="rect">
+            <a:avLst/>
+          </a:prstGeom>
+          <a:noFill/>
+          <a:ln/>
+        </p:spPr>
+        <p:txBody>
+          <a:bodyPr wrap="square" lIns="0" tIns="0" rIns="0" bIns="0" rtlCol="0" anchor="ctr"/>
+          <a:lstStyle/>
+          <a:p>
+            <a:pPr algn="r" indent="0" marL="0">
+              <a:buNone/>
+            </a:pPr>
+            <a:r>
+              <a:rPr lang="en-US" sz="1200" b="1" dirty="0">
+                <a:solidFill>
+                  <a:srgbClr val="372E8A"/>
+                </a:solidFill>
+                <a:latin typeface="微软雅黑" pitchFamily="34" charset="0"/>
+                <a:ea typeface="微软雅黑" pitchFamily="34" charset="-122"/>
+                <a:cs typeface="微软雅黑" pitchFamily="34" charset="-120"/>
+              </a:rPr>
+              <a:t>算力 ↓ 1–2 个数量级</a:t>
+            </a:r>
+            <a:endParaRPr lang="en-US" sz="1200" dirty="0"/>
+          </a:p>
+        </p:txBody>
+      </p:sp>
+      <p:sp>
+        <p:nvSpPr>
+          <p:cNvPr id="12" name="Shape 10"/>
+          <p:cNvSpPr/>
+          <p:nvPr/>
+        </p:nvSpPr>
+        <p:spPr>
+          <a:xfrm>
+            <a:off x="457200" y="3017520"/>
+            <a:ext cx="11247120" cy="566928"/>
+          </a:xfrm>
+          <a:prstGeom prst="rect">
+            <a:avLst/>
+          </a:prstGeom>
+          <a:solidFill>
+            <a:srgbClr val="F7F6FB"/>
+          </a:solidFill>
+          <a:ln w="9525">
+            <a:solidFill>
+              <a:srgbClr val="E7E4F4"/>
+            </a:solidFill>
+            <a:prstDash val="solid"/>
+          </a:ln>
+        </p:spPr>
+      </p:sp>
+      <p:sp>
+        <p:nvSpPr>
+          <p:cNvPr id="13" name="Text 11"/>
+          <p:cNvSpPr/>
+          <p:nvPr/>
+        </p:nvSpPr>
+        <p:spPr>
+          <a:xfrm>
+            <a:off x="585216" y="3017520"/>
+            <a:ext cx="365760" cy="566928"/>
+          </a:xfrm>
+          <a:prstGeom prst="rect">
+            <a:avLst/>
+          </a:prstGeom>
+          <a:noFill/>
+          <a:ln/>
+        </p:spPr>
+        <p:txBody>
+          <a:bodyPr wrap="square" lIns="0" tIns="0" rIns="0" bIns="0" rtlCol="0" anchor="ctr"/>
+          <a:lstStyle/>
+          <a:p>
+            <a:pPr indent="0" marL="0">
+              <a:buNone/>
+            </a:pPr>
+            <a:r>
+              <a:rPr lang="en-US" sz="1700" b="1" dirty="0">
+                <a:solidFill>
+                  <a:srgbClr val="F59E0B"/>
+                </a:solidFill>
+                <a:latin typeface="微软雅黑" pitchFamily="34" charset="0"/>
+                <a:ea typeface="微软雅黑" pitchFamily="34" charset="-122"/>
+                <a:cs typeface="微软雅黑" pitchFamily="34" charset="-120"/>
+              </a:rPr>
+              <a:t>2</a:t>
+            </a:r>
+            <a:endParaRPr lang="en-US" sz="1700" dirty="0"/>
+          </a:p>
+        </p:txBody>
+      </p:sp>
+      <p:sp>
+        <p:nvSpPr>
+          <p:cNvPr id="14" name="Text 12"/>
+          <p:cNvSpPr/>
+          <p:nvPr/>
+        </p:nvSpPr>
+        <p:spPr>
+          <a:xfrm>
+            <a:off x="987552" y="3017520"/>
+            <a:ext cx="1783080" cy="566928"/>
+          </a:xfrm>
+          <a:prstGeom prst="rect">
+            <a:avLst/>
+          </a:prstGeom>
+          <a:noFill/>
+          <a:ln/>
+        </p:spPr>
+        <p:txBody>
+          <a:bodyPr wrap="square" lIns="0" tIns="0" rIns="0" bIns="0" rtlCol="0" anchor="ctr"/>
+          <a:lstStyle/>
+          <a:p>
+            <a:pPr indent="0" marL="0">
+              <a:buNone/>
+            </a:pPr>
+            <a:r>
+              <a:rPr lang="en-US" sz="1350" b="1" dirty="0">
+                <a:solidFill>
+                  <a:srgbClr val="372E8A"/>
+                </a:solidFill>
+                <a:latin typeface="微软雅黑" pitchFamily="34" charset="0"/>
+                <a:ea typeface="微软雅黑" pitchFamily="34" charset="-122"/>
+                <a:cs typeface="微软雅黑" pitchFamily="34" charset="-120"/>
+              </a:rPr>
+              <a:t>压缩率选择</a:t>
+            </a:r>
+            <a:endParaRPr lang="en-US" sz="1350" dirty="0"/>
+          </a:p>
+        </p:txBody>
+      </p:sp>
+      <p:sp>
+        <p:nvSpPr>
+          <p:cNvPr id="15" name="Text 13"/>
+          <p:cNvSpPr/>
+          <p:nvPr/>
+        </p:nvSpPr>
+        <p:spPr>
+          <a:xfrm>
+            <a:off x="2852928" y="3017520"/>
+            <a:ext cx="6537960" cy="566928"/>
+          </a:xfrm>
+          <a:prstGeom prst="rect">
+            <a:avLst/>
+          </a:prstGeom>
+          <a:noFill/>
+          <a:ln/>
+        </p:spPr>
+        <p:txBody>
+          <a:bodyPr wrap="square" lIns="0" tIns="0" rIns="0" bIns="0" rtlCol="0" anchor="ctr"/>
+          <a:lstStyle/>
+          <a:p>
+            <a:pPr indent="0" marL="0">
+              <a:buNone/>
+            </a:pPr>
+            <a:r>
+              <a:rPr lang="en-US" sz="1250" dirty="0">
+                <a:solidFill>
+                  <a:srgbClr val="1F2937"/>
+                </a:solidFill>
+                <a:latin typeface="微软雅黑" pitchFamily="34" charset="0"/>
+                <a:ea typeface="微软雅黑" pitchFamily="34" charset="-122"/>
+                <a:cs typeface="微软雅黑" pitchFamily="34" charset="-120"/>
+              </a:rPr>
+              <a:t>f ∈ [4,16] 为甜点区：压缩不足则训练贵，过压缩则伤第一阶段重建上界</a:t>
+            </a:r>
+            <a:endParaRPr lang="en-US" sz="1250" dirty="0"/>
+          </a:p>
+        </p:txBody>
+      </p:sp>
+      <p:sp>
+        <p:nvSpPr>
+          <p:cNvPr id="16" name="Text 14"/>
+          <p:cNvSpPr/>
+          <p:nvPr/>
+        </p:nvSpPr>
+        <p:spPr>
+          <a:xfrm>
+            <a:off x="9464040" y="3017520"/>
+            <a:ext cx="2121408" cy="566928"/>
+          </a:xfrm>
+          <a:prstGeom prst="rect">
+            <a:avLst/>
+          </a:prstGeom>
+          <a:noFill/>
+          <a:ln/>
+        </p:spPr>
+        <p:txBody>
+          <a:bodyPr wrap="square" lIns="0" tIns="0" rIns="0" bIns="0" rtlCol="0" anchor="ctr"/>
+          <a:lstStyle/>
+          <a:p>
+            <a:pPr algn="r" indent="0" marL="0">
+              <a:buNone/>
+            </a:pPr>
+            <a:r>
+              <a:rPr lang="en-US" sz="1200" b="1" dirty="0">
+                <a:solidFill>
+                  <a:srgbClr val="372E8A"/>
+                </a:solidFill>
+                <a:latin typeface="微软雅黑" pitchFamily="34" charset="0"/>
+                <a:ea typeface="微软雅黑" pitchFamily="34" charset="-122"/>
+                <a:cs typeface="微软雅黑" pitchFamily="34" charset="-120"/>
+              </a:rPr>
+              <a:t>FID gap 38（LDM-1 vs 8）</a:t>
+            </a:r>
+            <a:endParaRPr lang="en-US" sz="1200" dirty="0"/>
+          </a:p>
+        </p:txBody>
+      </p:sp>
+      <p:sp>
+        <p:nvSpPr>
+          <p:cNvPr id="17" name="Shape 15"/>
+          <p:cNvSpPr/>
+          <p:nvPr/>
+        </p:nvSpPr>
+        <p:spPr>
+          <a:xfrm>
+            <a:off x="457200" y="3675888"/>
+            <a:ext cx="11247120" cy="566928"/>
+          </a:xfrm>
+          <a:prstGeom prst="rect">
+            <a:avLst/>
+          </a:prstGeom>
+          <a:solidFill>
+            <a:srgbClr val="FFFFFF"/>
+          </a:solidFill>
+          <a:ln w="9525">
+            <a:solidFill>
+              <a:srgbClr val="E7E4F4"/>
+            </a:solidFill>
+            <a:prstDash val="solid"/>
+          </a:ln>
+        </p:spPr>
+      </p:sp>
+      <p:sp>
+        <p:nvSpPr>
+          <p:cNvPr id="18" name="Text 16"/>
+          <p:cNvSpPr/>
+          <p:nvPr/>
+        </p:nvSpPr>
+        <p:spPr>
+          <a:xfrm>
+            <a:off x="585216" y="3675888"/>
+            <a:ext cx="365760" cy="566928"/>
+          </a:xfrm>
+          <a:prstGeom prst="rect">
+            <a:avLst/>
+          </a:prstGeom>
+          <a:noFill/>
+          <a:ln/>
+        </p:spPr>
+        <p:txBody>
+          <a:bodyPr wrap="square" lIns="0" tIns="0" rIns="0" bIns="0" rtlCol="0" anchor="ctr"/>
+          <a:lstStyle/>
+          <a:p>
+            <a:pPr indent="0" marL="0">
+              <a:buNone/>
+            </a:pPr>
+            <a:r>
+              <a:rPr lang="en-US" sz="1700" b="1" dirty="0">
+                <a:solidFill>
+                  <a:srgbClr val="F59E0B"/>
+                </a:solidFill>
+                <a:latin typeface="微软雅黑" pitchFamily="34" charset="0"/>
+                <a:ea typeface="微软雅黑" pitchFamily="34" charset="-122"/>
+                <a:cs typeface="微软雅黑" pitchFamily="34" charset="-120"/>
+              </a:rPr>
+              <a:t>3</a:t>
+            </a:r>
+            <a:endParaRPr lang="en-US" sz="1700" dirty="0"/>
+          </a:p>
+        </p:txBody>
+      </p:sp>
+      <p:sp>
+        <p:nvSpPr>
+          <p:cNvPr id="19" name="Text 17"/>
+          <p:cNvSpPr/>
+          <p:nvPr/>
+        </p:nvSpPr>
+        <p:spPr>
+          <a:xfrm>
+            <a:off x="987552" y="3675888"/>
+            <a:ext cx="1783080" cy="566928"/>
+          </a:xfrm>
+          <a:prstGeom prst="rect">
+            <a:avLst/>
+          </a:prstGeom>
+          <a:noFill/>
+          <a:ln/>
+        </p:spPr>
+        <p:txBody>
+          <a:bodyPr wrap="square" lIns="0" tIns="0" rIns="0" bIns="0" rtlCol="0" anchor="ctr"/>
+          <a:lstStyle/>
+          <a:p>
+            <a:pPr indent="0" marL="0">
+              <a:buNone/>
+            </a:pPr>
+            <a:r>
+              <a:rPr lang="en-US" sz="1350" b="1" dirty="0">
+                <a:solidFill>
+                  <a:srgbClr val="372E8A"/>
+                </a:solidFill>
+                <a:latin typeface="微软雅黑" pitchFamily="34" charset="0"/>
+                <a:ea typeface="微软雅黑" pitchFamily="34" charset="-122"/>
+                <a:cs typeface="微软雅黑" pitchFamily="34" charset="-120"/>
+              </a:rPr>
+              <a:t>条件机制</a:t>
+            </a:r>
+            <a:endParaRPr lang="en-US" sz="1350" dirty="0"/>
+          </a:p>
+        </p:txBody>
+      </p:sp>
+      <p:sp>
+        <p:nvSpPr>
+          <p:cNvPr id="20" name="Text 18"/>
+          <p:cNvSpPr/>
+          <p:nvPr/>
+        </p:nvSpPr>
+        <p:spPr>
+          <a:xfrm>
+            <a:off x="2852928" y="3675888"/>
+            <a:ext cx="6537960" cy="566928"/>
+          </a:xfrm>
+          <a:prstGeom prst="rect">
+            <a:avLst/>
+          </a:prstGeom>
+          <a:noFill/>
+          <a:ln/>
+        </p:spPr>
+        <p:txBody>
+          <a:bodyPr wrap="square" lIns="0" tIns="0" rIns="0" bIns="0" rtlCol="0" anchor="ctr"/>
+          <a:lstStyle/>
+          <a:p>
+            <a:pPr indent="0" marL="0">
+              <a:buNone/>
+            </a:pPr>
+            <a:r>
+              <a:rPr lang="en-US" sz="1250" dirty="0">
+                <a:solidFill>
+                  <a:srgbClr val="1F2937"/>
+                </a:solidFill>
+                <a:latin typeface="微软雅黑" pitchFamily="34" charset="0"/>
+                <a:ea typeface="微软雅黑" pitchFamily="34" charset="-122"/>
+                <a:cs typeface="微软雅黑" pitchFamily="34" charset="-120"/>
+              </a:rPr>
+              <a:t>拼接注入空间对齐条件；cross-attention 经 τ_θ 接入任意模态，条件侧可插拔</a:t>
+            </a:r>
+            <a:endParaRPr lang="en-US" sz="1250" dirty="0"/>
+          </a:p>
+        </p:txBody>
+      </p:sp>
+      <p:sp>
+        <p:nvSpPr>
+          <p:cNvPr id="21" name="Text 19"/>
+          <p:cNvSpPr/>
+          <p:nvPr/>
+        </p:nvSpPr>
+        <p:spPr>
+          <a:xfrm>
+            <a:off x="9464040" y="3675888"/>
+            <a:ext cx="2121408" cy="566928"/>
+          </a:xfrm>
+          <a:prstGeom prst="rect">
+            <a:avLst/>
+          </a:prstGeom>
+          <a:noFill/>
+          <a:ln/>
+        </p:spPr>
+        <p:txBody>
+          <a:bodyPr wrap="square" lIns="0" tIns="0" rIns="0" bIns="0" rtlCol="0" anchor="ctr"/>
+          <a:lstStyle/>
+          <a:p>
+            <a:pPr algn="r" indent="0" marL="0">
+              <a:buNone/>
+            </a:pPr>
+            <a:r>
+              <a:rPr lang="en-US" sz="1200" b="1" dirty="0">
+                <a:solidFill>
+                  <a:srgbClr val="372E8A"/>
+                </a:solidFill>
+                <a:latin typeface="微软雅黑" pitchFamily="34" charset="0"/>
+                <a:ea typeface="微软雅黑" pitchFamily="34" charset="-122"/>
+                <a:cs typeface="微软雅黑" pitchFamily="34" charset="-120"/>
+              </a:rPr>
+              <a:t>统一 6 类生成任务</a:t>
+            </a:r>
+            <a:endParaRPr lang="en-US" sz="1200" dirty="0"/>
+          </a:p>
+        </p:txBody>
+      </p:sp>
+      <p:sp>
+        <p:nvSpPr>
+          <p:cNvPr id="22" name="Shape 20"/>
+          <p:cNvSpPr/>
+          <p:nvPr/>
+        </p:nvSpPr>
+        <p:spPr>
+          <a:xfrm>
+            <a:off x="457200" y="4334256"/>
+            <a:ext cx="11247120" cy="566928"/>
+          </a:xfrm>
+          <a:prstGeom prst="rect">
+            <a:avLst/>
+          </a:prstGeom>
+          <a:solidFill>
+            <a:srgbClr val="F7F6FB"/>
+          </a:solidFill>
+          <a:ln w="9525">
+            <a:solidFill>
+              <a:srgbClr val="E7E4F4"/>
+            </a:solidFill>
+            <a:prstDash val="solid"/>
+          </a:ln>
+        </p:spPr>
+      </p:sp>
+      <p:sp>
+        <p:nvSpPr>
+          <p:cNvPr id="23" name="Text 21"/>
+          <p:cNvSpPr/>
+          <p:nvPr/>
+        </p:nvSpPr>
+        <p:spPr>
+          <a:xfrm>
+            <a:off x="585216" y="4334256"/>
+            <a:ext cx="365760" cy="566928"/>
+          </a:xfrm>
+          <a:prstGeom prst="rect">
+            <a:avLst/>
+          </a:prstGeom>
+          <a:noFill/>
+          <a:ln/>
+        </p:spPr>
+        <p:txBody>
+          <a:bodyPr wrap="square" lIns="0" tIns="0" rIns="0" bIns="0" rtlCol="0" anchor="ctr"/>
+          <a:lstStyle/>
+          <a:p>
+            <a:pPr indent="0" marL="0">
+              <a:buNone/>
+            </a:pPr>
+            <a:r>
+              <a:rPr lang="en-US" sz="1700" b="1" dirty="0">
+                <a:solidFill>
+                  <a:srgbClr val="F59E0B"/>
+                </a:solidFill>
+                <a:latin typeface="微软雅黑" pitchFamily="34" charset="0"/>
+                <a:ea typeface="微软雅黑" pitchFamily="34" charset="-122"/>
+                <a:cs typeface="微软雅黑" pitchFamily="34" charset="-120"/>
+              </a:rPr>
+              <a:t>4</a:t>
+            </a:r>
+            <a:endParaRPr lang="en-US" sz="1700" dirty="0"/>
+          </a:p>
+        </p:txBody>
+      </p:sp>
+      <p:sp>
+        <p:nvSpPr>
+          <p:cNvPr id="24" name="Text 22"/>
+          <p:cNvSpPr/>
+          <p:nvPr/>
+        </p:nvSpPr>
+        <p:spPr>
+          <a:xfrm>
+            <a:off x="987552" y="4334256"/>
+            <a:ext cx="1783080" cy="566928"/>
+          </a:xfrm>
+          <a:prstGeom prst="rect">
+            <a:avLst/>
+          </a:prstGeom>
+          <a:noFill/>
+          <a:ln/>
+        </p:spPr>
+        <p:txBody>
+          <a:bodyPr wrap="square" lIns="0" tIns="0" rIns="0" bIns="0" rtlCol="0" anchor="ctr"/>
+          <a:lstStyle/>
+          <a:p>
+            <a:pPr indent="0" marL="0">
+              <a:buNone/>
+            </a:pPr>
+            <a:r>
+              <a:rPr lang="en-US" sz="1350" b="1" dirty="0">
+                <a:solidFill>
+                  <a:srgbClr val="372E8A"/>
+                </a:solidFill>
+                <a:latin typeface="微软雅黑" pitchFamily="34" charset="0"/>
+                <a:ea typeface="微软雅黑" pitchFamily="34" charset="-122"/>
+                <a:cs typeface="微软雅黑" pitchFamily="34" charset="-120"/>
+              </a:rPr>
+              <a:t>无分类器引导</a:t>
+            </a:r>
+            <a:endParaRPr lang="en-US" sz="1350" dirty="0"/>
+          </a:p>
+        </p:txBody>
+      </p:sp>
+      <p:sp>
+        <p:nvSpPr>
+          <p:cNvPr id="25" name="Text 23"/>
+          <p:cNvSpPr/>
+          <p:nvPr/>
+        </p:nvSpPr>
+        <p:spPr>
+          <a:xfrm>
+            <a:off x="2852928" y="4334256"/>
+            <a:ext cx="6537960" cy="566928"/>
+          </a:xfrm>
+          <a:prstGeom prst="rect">
+            <a:avLst/>
+          </a:prstGeom>
+          <a:noFill/>
+          <a:ln/>
+        </p:spPr>
+        <p:txBody>
+          <a:bodyPr wrap="square" lIns="0" tIns="0" rIns="0" bIns="0" rtlCol="0" anchor="ctr"/>
+          <a:lstStyle/>
+          <a:p>
+            <a:pPr indent="0" marL="0">
+              <a:buNone/>
+            </a:pPr>
+            <a:r>
+              <a:rPr lang="en-US" sz="1250" dirty="0">
+                <a:solidFill>
+                  <a:srgbClr val="1F2937"/>
+                </a:solidFill>
+                <a:latin typeface="微软雅黑" pitchFamily="34" charset="0"/>
+                <a:ea typeface="微软雅黑" pitchFamily="34" charset="-122"/>
+                <a:cs typeface="微软雅黑" pitchFamily="34" charset="-120"/>
+              </a:rPr>
+              <a:t>训练随机置空条件，采样沿条件方向差值外推，w 权衡遵从度与多样性</a:t>
+            </a:r>
+            <a:endParaRPr lang="en-US" sz="1250" dirty="0"/>
+          </a:p>
+        </p:txBody>
+      </p:sp>
+      <p:sp>
+        <p:nvSpPr>
+          <p:cNvPr id="26" name="Text 24"/>
+          <p:cNvSpPr/>
+          <p:nvPr/>
+        </p:nvSpPr>
+        <p:spPr>
+          <a:xfrm>
+            <a:off x="9464040" y="4334256"/>
+            <a:ext cx="2121408" cy="566928"/>
+          </a:xfrm>
+          <a:prstGeom prst="rect">
+            <a:avLst/>
+          </a:prstGeom>
+          <a:noFill/>
+          <a:ln/>
+        </p:spPr>
+        <p:txBody>
+          <a:bodyPr wrap="square" lIns="0" tIns="0" rIns="0" bIns="0" rtlCol="0" anchor="ctr"/>
+          <a:lstStyle/>
+          <a:p>
+            <a:pPr algn="r" indent="0" marL="0">
+              <a:buNone/>
+            </a:pPr>
+            <a:r>
+              <a:rPr lang="en-US" sz="1200" b="1" dirty="0">
+                <a:solidFill>
+                  <a:srgbClr val="372E8A"/>
+                </a:solidFill>
+                <a:latin typeface="微软雅黑" pitchFamily="34" charset="0"/>
+                <a:ea typeface="微软雅黑" pitchFamily="34" charset="-122"/>
+                <a:cs typeface="微软雅黑" pitchFamily="34" charset="-120"/>
+              </a:rPr>
+              <a:t>10.56 → 3.60（w=1.5）</a:t>
+            </a:r>
+            <a:endParaRPr lang="en-US" sz="1200" dirty="0"/>
+          </a:p>
+        </p:txBody>
+      </p:sp>
+      <p:sp>
+        <p:nvSpPr>
+          <p:cNvPr id="27" name="Shape 25"/>
+          <p:cNvSpPr/>
+          <p:nvPr/>
+        </p:nvSpPr>
+        <p:spPr>
+          <a:xfrm>
+            <a:off x="457200" y="4992624"/>
+            <a:ext cx="11247120" cy="566928"/>
+          </a:xfrm>
+          <a:prstGeom prst="rect">
+            <a:avLst/>
+          </a:prstGeom>
+          <a:solidFill>
+            <a:srgbClr val="FFFFFF"/>
+          </a:solidFill>
+          <a:ln w="9525">
+            <a:solidFill>
+              <a:srgbClr val="E7E4F4"/>
+            </a:solidFill>
+            <a:prstDash val="solid"/>
+          </a:ln>
+        </p:spPr>
+      </p:sp>
+      <p:sp>
+        <p:nvSpPr>
+          <p:cNvPr id="28" name="Text 26"/>
+          <p:cNvSpPr/>
+          <p:nvPr/>
+        </p:nvSpPr>
+        <p:spPr>
+          <a:xfrm>
+            <a:off x="585216" y="4992624"/>
+            <a:ext cx="365760" cy="566928"/>
+          </a:xfrm>
+          <a:prstGeom prst="rect">
+            <a:avLst/>
+          </a:prstGeom>
+          <a:noFill/>
+          <a:ln/>
+        </p:spPr>
+        <p:txBody>
+          <a:bodyPr wrap="square" lIns="0" tIns="0" rIns="0" bIns="0" rtlCol="0" anchor="ctr"/>
+          <a:lstStyle/>
+          <a:p>
+            <a:pPr indent="0" marL="0">
+              <a:buNone/>
+            </a:pPr>
+            <a:r>
+              <a:rPr lang="en-US" sz="1700" b="1" dirty="0">
+                <a:solidFill>
+                  <a:srgbClr val="F59E0B"/>
+                </a:solidFill>
+                <a:latin typeface="微软雅黑" pitchFamily="34" charset="0"/>
+                <a:ea typeface="微软雅黑" pitchFamily="34" charset="-122"/>
+                <a:cs typeface="微软雅黑" pitchFamily="34" charset="-120"/>
+              </a:rPr>
+              <a:t>5</a:t>
+            </a:r>
+            <a:endParaRPr lang="en-US" sz="1700" dirty="0"/>
+          </a:p>
+        </p:txBody>
+      </p:sp>
+      <p:sp>
+        <p:nvSpPr>
+          <p:cNvPr id="29" name="Text 27"/>
+          <p:cNvSpPr/>
+          <p:nvPr/>
+        </p:nvSpPr>
+        <p:spPr>
+          <a:xfrm>
+            <a:off x="987552" y="4992624"/>
+            <a:ext cx="1783080" cy="566928"/>
+          </a:xfrm>
+          <a:prstGeom prst="rect">
+            <a:avLst/>
+          </a:prstGeom>
+          <a:noFill/>
+          <a:ln/>
+        </p:spPr>
+        <p:txBody>
+          <a:bodyPr wrap="square" lIns="0" tIns="0" rIns="0" bIns="0" rtlCol="0" anchor="ctr"/>
+          <a:lstStyle/>
+          <a:p>
+            <a:pPr indent="0" marL="0">
+              <a:buNone/>
+            </a:pPr>
+            <a:r>
+              <a:rPr lang="en-US" sz="1350" b="1" dirty="0">
+                <a:solidFill>
+                  <a:srgbClr val="372E8A"/>
+                </a:solidFill>
+                <a:latin typeface="微软雅黑" pitchFamily="34" charset="0"/>
+                <a:ea typeface="微软雅黑" pitchFamily="34" charset="-122"/>
+                <a:cs typeface="微软雅黑" pitchFamily="34" charset="-120"/>
+              </a:rPr>
+              <a:t>当时 SOTA</a:t>
+            </a:r>
+            <a:endParaRPr lang="en-US" sz="1350" dirty="0"/>
+          </a:p>
+        </p:txBody>
+      </p:sp>
+      <p:sp>
+        <p:nvSpPr>
+          <p:cNvPr id="30" name="Text 28"/>
+          <p:cNvSpPr/>
+          <p:nvPr/>
+        </p:nvSpPr>
+        <p:spPr>
+          <a:xfrm>
+            <a:off x="2852928" y="4992624"/>
+            <a:ext cx="6537960" cy="566928"/>
+          </a:xfrm>
+          <a:prstGeom prst="rect">
+            <a:avLst/>
+          </a:prstGeom>
+          <a:noFill/>
+          <a:ln/>
+        </p:spPr>
+        <p:txBody>
+          <a:bodyPr wrap="square" lIns="0" tIns="0" rIns="0" bIns="0" rtlCol="0" anchor="ctr"/>
+          <a:lstStyle/>
+          <a:p>
+            <a:pPr indent="0" marL="0">
+              <a:buNone/>
+            </a:pPr>
+            <a:r>
+              <a:rPr lang="en-US" sz="1250" dirty="0">
+                <a:solidFill>
+                  <a:srgbClr val="1F2937"/>
+                </a:solidFill>
+                <a:latin typeface="微软雅黑" pitchFamily="34" charset="0"/>
+                <a:ea typeface="微软雅黑" pitchFamily="34" charset="-122"/>
+                <a:cs typeface="微软雅黑" pitchFamily="34" charset="-120"/>
+              </a:rPr>
+              <a:t>类条件 ImageNet 与图像修复刷新纪录，且参数量明显低于对比方法</a:t>
+            </a:r>
+            <a:endParaRPr lang="en-US" sz="1250" dirty="0"/>
+          </a:p>
+        </p:txBody>
+      </p:sp>
+      <p:sp>
+        <p:nvSpPr>
+          <p:cNvPr id="31" name="Text 29"/>
+          <p:cNvSpPr/>
+          <p:nvPr/>
+        </p:nvSpPr>
+        <p:spPr>
+          <a:xfrm>
+            <a:off x="9464040" y="4992624"/>
+            <a:ext cx="2121408" cy="566928"/>
+          </a:xfrm>
+          <a:prstGeom prst="rect">
+            <a:avLst/>
+          </a:prstGeom>
+          <a:noFill/>
+          <a:ln/>
+        </p:spPr>
+        <p:txBody>
+          <a:bodyPr wrap="square" lIns="0" tIns="0" rIns="0" bIns="0" rtlCol="0" anchor="ctr"/>
+          <a:lstStyle/>
+          <a:p>
+            <a:pPr algn="r" indent="0" marL="0">
+              <a:buNone/>
+            </a:pPr>
+            <a:r>
+              <a:rPr lang="en-US" sz="1200" b="1" dirty="0">
+                <a:solidFill>
+                  <a:srgbClr val="372E8A"/>
+                </a:solidFill>
+                <a:latin typeface="微软雅黑" pitchFamily="34" charset="0"/>
+                <a:ea typeface="微软雅黑" pitchFamily="34" charset="-122"/>
+                <a:cs typeface="微软雅黑" pitchFamily="34" charset="-120"/>
+              </a:rPr>
+              <a:t>400M 胜 608M（ADM-G）</a:t>
+            </a:r>
+            <a:endParaRPr lang="en-US" sz="1200" dirty="0"/>
+          </a:p>
+        </p:txBody>
+      </p:sp>
+      <p:sp>
+        <p:nvSpPr>
+          <p:cNvPr id="32" name="Shape 30"/>
+          <p:cNvSpPr/>
+          <p:nvPr/>
+        </p:nvSpPr>
+        <p:spPr>
+          <a:xfrm>
+            <a:off x="0" y="5742432"/>
+            <a:ext cx="12188952" cy="566928"/>
+          </a:xfrm>
+          <a:prstGeom prst="rect">
+            <a:avLst/>
+          </a:prstGeom>
+          <a:solidFill>
+            <a:srgbClr val="EFEDF9"/>
+          </a:solidFill>
+          <a:ln/>
+        </p:spPr>
+      </p:sp>
+      <p:sp>
+        <p:nvSpPr>
+          <p:cNvPr id="33" name="Text 31"/>
+          <p:cNvSpPr/>
+          <p:nvPr/>
+        </p:nvSpPr>
+        <p:spPr>
+          <a:xfrm>
+            <a:off x="457200" y="5742432"/>
+            <a:ext cx="11274552" cy="566928"/>
+          </a:xfrm>
+          <a:prstGeom prst="rect">
+            <a:avLst/>
+          </a:prstGeom>
+          <a:noFill/>
+          <a:ln/>
+        </p:spPr>
+        <p:txBody>
+          <a:bodyPr wrap="square" lIns="0" tIns="0" rIns="0" bIns="0" rtlCol="0" anchor="ctr"/>
+          <a:lstStyle/>
+          <a:p>
+            <a:pPr indent="0" marL="0">
+              <a:buNone/>
+            </a:pPr>
+            <a:r>
+              <a:rPr lang="en-US" sz="1450" b="1" dirty="0">
+                <a:solidFill>
+                  <a:srgbClr val="372E8A"/>
+                </a:solidFill>
+                <a:latin typeface="微软雅黑" pitchFamily="34" charset="0"/>
+                <a:ea typeface="微软雅黑" pitchFamily="34" charset="-122"/>
+                <a:cs typeface="微软雅黑" pitchFamily="34" charset="-120"/>
+              </a:rPr>
+              <a:t>方法论遗产：两阶段解耦 + 通用条件接口，成为 Stable Diffusion 及后续文生图模型的标准架构</a:t>
             </a:r>
             <a:endParaRPr lang="en-US" sz="1450" dirty="0"/>
           </a:p>
@@ -39822,7 +41115,7 @@
       </p:sp>
       <p:sp>
         <p:nvSpPr>
-          <p:cNvPr id="19" name="Text 17"/>
+          <p:cNvPr id="34" name="Text 32"/>
           <p:cNvSpPr/>
           <p:nvPr/>
         </p:nvSpPr>
